--- a/submission/GCB/figures_SI/FigS2.pptx
+++ b/submission/GCB/figures_SI/FigS2.pptx
@@ -521,7 +521,7 @@
         </p:nvSpPr>
         <p:spPr>
           <a:xfrm>
-            <a:off x="525960" y="2048040"/>
+            <a:off x="525960" y="2053080"/>
             <a:ext cx="4490640" cy="0"/>
           </a:xfrm>
           <a:prstGeom prst="line">
@@ -564,7 +564,7 @@
         </p:nvSpPr>
         <p:spPr>
           <a:xfrm>
-            <a:off x="525960" y="1349280"/>
+            <a:off x="525960" y="1359360"/>
             <a:ext cx="4490640" cy="0"/>
           </a:xfrm>
           <a:prstGeom prst="line">
@@ -602,6 +602,49 @@
       <p:sp>
         <p:nvSpPr>
           <p:cNvPr id="12" name=""/>
+          <p:cNvSpPr/>
+          <p:nvPr/>
+        </p:nvSpPr>
+        <p:spPr>
+          <a:xfrm>
+            <a:off x="525960" y="666000"/>
+            <a:ext cx="4490640" cy="0"/>
+          </a:xfrm>
+          <a:prstGeom prst="line">
+            <a:avLst/>
+          </a:prstGeom>
+          <a:ln w="6480">
+            <a:solidFill>
+              <a:srgbClr val="EBEBEB"/>
+            </a:solidFill>
+            <a:round/>
+          </a:ln>
+        </p:spPr>
+        <p:style>
+          <a:lnRef idx="0"/>
+          <a:fillRef idx="0"/>
+          <a:effectRef idx="0"/>
+          <a:fontRef idx="minor"/>
+        </p:style>
+        <p:txBody>
+          <a:bodyPr lIns="3240" tIns="-3240" rIns="3240" bIns="-3240" anchor="t">
+            <a:noAutofit/>
+          </a:bodyPr>
+          <a:p>
+            <a:endParaRPr lang="en-US" sz="2400" b="0" u="none" strike="noStrike">
+              <a:solidFill>
+                <a:srgbClr val="000000"/>
+              </a:solidFill>
+              <a:effectLst/>
+              <a:uFillTx/>
+              <a:latin typeface="Times New Roman"/>
+            </a:endParaRPr>
+          </a:p>
+        </p:txBody>
+      </p:sp>
+      <p:sp>
+        <p:nvSpPr>
+          <p:cNvPr id="13" name=""/>
           <p:cNvSpPr/>
           <p:nvPr/>
         </p:nvSpPr>
@@ -647,14 +690,14 @@
       </p:sp>
       <p:sp>
         <p:nvSpPr>
-          <p:cNvPr id="13" name=""/>
+          <p:cNvPr id="14" name=""/>
           <p:cNvSpPr/>
           <p:nvPr/>
         </p:nvSpPr>
         <p:spPr>
           <a:xfrm>
             <a:off x="730080" y="763920"/>
-            <a:ext cx="4082760" cy="1796400"/>
+            <a:ext cx="4082760" cy="1786680"/>
           </a:xfrm>
           <a:custGeom>
             <a:avLst/>
@@ -662,12 +705,12 @@
             <a:ahLst/>
             <a:rect l="0" t="0" r="r" b="b"/>
             <a:pathLst>
-              <a:path w="11341" h="4990">
+              <a:path w="11341" h="4963">
                 <a:moveTo>
-                  <a:pt x="0" y="2671"/>
+                  <a:pt x="0" y="2652"/>
                 </a:moveTo>
                 <a:lnTo>
-                  <a:pt x="3781" y="2070"/>
+                  <a:pt x="3781" y="2003"/>
                 </a:lnTo>
                 <a:lnTo>
                   <a:pt x="7561" y="420"/>
@@ -676,19 +719,19 @@
                   <a:pt x="11341" y="0"/>
                 </a:lnTo>
                 <a:lnTo>
-                  <a:pt x="11341" y="3141"/>
-                </a:lnTo>
-                <a:lnTo>
-                  <a:pt x="7561" y="3410"/>
-                </a:lnTo>
-                <a:lnTo>
-                  <a:pt x="3781" y="4674"/>
-                </a:lnTo>
-                <a:lnTo>
-                  <a:pt x="0" y="4990"/>
-                </a:lnTo>
-                <a:lnTo>
-                  <a:pt x="0" y="2671"/>
+                  <a:pt x="11341" y="3129"/>
+                </a:lnTo>
+                <a:lnTo>
+                  <a:pt x="7561" y="3402"/>
+                </a:lnTo>
+                <a:lnTo>
+                  <a:pt x="3781" y="4611"/>
+                </a:lnTo>
+                <a:lnTo>
+                  <a:pt x="0" y="4963"/>
+                </a:lnTo>
+                <a:lnTo>
+                  <a:pt x="0" y="2652"/>
                 </a:lnTo>
                 <a:close/>
               </a:path>
@@ -721,14 +764,14 @@
       </p:sp>
       <p:sp>
         <p:nvSpPr>
-          <p:cNvPr id="14" name=""/>
-          <p:cNvSpPr/>
-          <p:nvPr/>
-        </p:nvSpPr>
-        <p:spPr>
-          <a:xfrm>
-            <a:off x="730080" y="924120"/>
-            <a:ext cx="4082760" cy="1679040"/>
+          <p:cNvPr id="15" name=""/>
+          <p:cNvSpPr/>
+          <p:nvPr/>
+        </p:nvSpPr>
+        <p:spPr>
+          <a:xfrm>
+            <a:off x="730080" y="866160"/>
+            <a:ext cx="4082760" cy="1716840"/>
           </a:xfrm>
           <a:custGeom>
             <a:avLst/>
@@ -736,33 +779,33 @@
             <a:ahLst/>
             <a:rect l="0" t="0" r="r" b="b"/>
             <a:pathLst>
-              <a:path w="11341" h="4664">
+              <a:path w="11341" h="4769">
                 <a:moveTo>
-                  <a:pt x="0" y="2337"/>
+                  <a:pt x="0" y="2448"/>
                 </a:moveTo>
                 <a:lnTo>
-                  <a:pt x="3781" y="1856"/>
-                </a:lnTo>
-                <a:lnTo>
-                  <a:pt x="7561" y="613"/>
+                  <a:pt x="3781" y="1880"/>
+                </a:lnTo>
+                <a:lnTo>
+                  <a:pt x="7561" y="668"/>
                 </a:lnTo>
                 <a:lnTo>
                   <a:pt x="11341" y="0"/>
                 </a:lnTo>
                 <a:lnTo>
-                  <a:pt x="11341" y="2975"/>
-                </a:lnTo>
-                <a:lnTo>
-                  <a:pt x="7561" y="3408"/>
-                </a:lnTo>
-                <a:lnTo>
-                  <a:pt x="3781" y="4390"/>
-                </a:lnTo>
-                <a:lnTo>
-                  <a:pt x="0" y="4664"/>
-                </a:lnTo>
-                <a:lnTo>
-                  <a:pt x="0" y="2337"/>
+                  <a:pt x="11341" y="3002"/>
+                </a:lnTo>
+                <a:lnTo>
+                  <a:pt x="7561" y="3477"/>
+                </a:lnTo>
+                <a:lnTo>
+                  <a:pt x="3781" y="4429"/>
+                </a:lnTo>
+                <a:lnTo>
+                  <a:pt x="0" y="4769"/>
+                </a:lnTo>
+                <a:lnTo>
+                  <a:pt x="0" y="2448"/>
                 </a:lnTo>
                 <a:close/>
               </a:path>
@@ -795,14 +838,14 @@
       </p:sp>
       <p:sp>
         <p:nvSpPr>
-          <p:cNvPr id="15" name=""/>
-          <p:cNvSpPr/>
-          <p:nvPr/>
-        </p:nvSpPr>
-        <p:spPr>
-          <a:xfrm>
-            <a:off x="730080" y="785520"/>
-            <a:ext cx="4082760" cy="1640160"/>
+          <p:cNvPr id="16" name=""/>
+          <p:cNvSpPr/>
+          <p:nvPr/>
+        </p:nvSpPr>
+        <p:spPr>
+          <a:xfrm>
+            <a:off x="730080" y="767520"/>
+            <a:ext cx="4082760" cy="1641600"/>
           </a:xfrm>
           <a:custGeom>
             <a:avLst/>
@@ -810,33 +853,33 @@
             <a:ahLst/>
             <a:rect l="0" t="0" r="r" b="b"/>
             <a:pathLst>
-              <a:path w="11341" h="4556">
+              <a:path w="11341" h="4560">
                 <a:moveTo>
-                  <a:pt x="0" y="2110"/>
+                  <a:pt x="0" y="2117"/>
                 </a:moveTo>
                 <a:lnTo>
-                  <a:pt x="3781" y="1535"/>
-                </a:lnTo>
-                <a:lnTo>
-                  <a:pt x="7561" y="381"/>
+                  <a:pt x="3781" y="1487"/>
+                </a:lnTo>
+                <a:lnTo>
+                  <a:pt x="7561" y="403"/>
                 </a:lnTo>
                 <a:lnTo>
                   <a:pt x="11341" y="0"/>
                 </a:lnTo>
                 <a:lnTo>
-                  <a:pt x="11341" y="3041"/>
-                </a:lnTo>
-                <a:lnTo>
-                  <a:pt x="7561" y="3352"/>
-                </a:lnTo>
-                <a:lnTo>
-                  <a:pt x="3781" y="4231"/>
-                </a:lnTo>
-                <a:lnTo>
-                  <a:pt x="0" y="4556"/>
-                </a:lnTo>
-                <a:lnTo>
-                  <a:pt x="0" y="2110"/>
+                  <a:pt x="11341" y="3047"/>
+                </a:lnTo>
+                <a:lnTo>
+                  <a:pt x="7561" y="3377"/>
+                </a:lnTo>
+                <a:lnTo>
+                  <a:pt x="3781" y="4199"/>
+                </a:lnTo>
+                <a:lnTo>
+                  <a:pt x="0" y="4560"/>
+                </a:lnTo>
+                <a:lnTo>
+                  <a:pt x="0" y="2117"/>
                 </a:lnTo>
                 <a:close/>
               </a:path>
@@ -869,14 +912,14 @@
       </p:sp>
       <p:sp>
         <p:nvSpPr>
-          <p:cNvPr id="16" name=""/>
-          <p:cNvSpPr/>
-          <p:nvPr/>
-        </p:nvSpPr>
-        <p:spPr>
-          <a:xfrm>
-            <a:off x="730080" y="1361520"/>
-            <a:ext cx="4082760" cy="802800"/>
+          <p:cNvPr id="17" name=""/>
+          <p:cNvSpPr/>
+          <p:nvPr/>
+        </p:nvSpPr>
+        <p:spPr>
+          <a:xfrm>
+            <a:off x="730080" y="1359360"/>
+            <a:ext cx="4082760" cy="796680"/>
           </a:xfrm>
           <a:custGeom>
             <a:avLst/>
@@ -884,15 +927,15 @@
             <a:ahLst/>
             <a:rect l="0" t="0" r="r" b="b"/>
             <a:pathLst>
-              <a:path fill="none" w="11341" h="2230">
+              <a:path fill="none" w="11341" h="2213">
                 <a:moveTo>
-                  <a:pt x="0" y="2230"/>
+                  <a:pt x="0" y="2213"/>
                 </a:moveTo>
                 <a:lnTo>
-                  <a:pt x="3781" y="1783"/>
-                </a:lnTo>
-                <a:lnTo>
-                  <a:pt x="7561" y="338"/>
+                  <a:pt x="3781" y="1724"/>
+                </a:lnTo>
+                <a:lnTo>
+                  <a:pt x="7561" y="340"/>
                 </a:lnTo>
                 <a:lnTo>
                   <a:pt x="11341" y="0"/>
@@ -925,14 +968,14 @@
       </p:sp>
       <p:sp>
         <p:nvSpPr>
-          <p:cNvPr id="17" name=""/>
-          <p:cNvSpPr/>
-          <p:nvPr/>
-        </p:nvSpPr>
-        <p:spPr>
-          <a:xfrm>
-            <a:off x="730080" y="1489680"/>
-            <a:ext cx="4082760" cy="716400"/>
+          <p:cNvPr id="18" name=""/>
+          <p:cNvSpPr/>
+          <p:nvPr/>
+        </p:nvSpPr>
+        <p:spPr>
+          <a:xfrm>
+            <a:off x="730080" y="1437120"/>
+            <a:ext cx="4082760" cy="749880"/>
           </a:xfrm>
           <a:custGeom>
             <a:avLst/>
@@ -940,15 +983,15 @@
             <a:ahLst/>
             <a:rect l="0" t="0" r="r" b="b"/>
             <a:pathLst>
-              <a:path fill="none" w="11341" h="1990">
+              <a:path fill="none" w="11341" h="2083">
                 <a:moveTo>
-                  <a:pt x="0" y="1990"/>
+                  <a:pt x="0" y="2083"/>
                 </a:moveTo>
                 <a:lnTo>
-                  <a:pt x="3781" y="1622"/>
-                </a:lnTo>
-                <a:lnTo>
-                  <a:pt x="7561" y="517"/>
+                  <a:pt x="3781" y="1639"/>
+                </a:lnTo>
+                <a:lnTo>
+                  <a:pt x="7561" y="564"/>
                 </a:lnTo>
                 <a:lnTo>
                   <a:pt x="11341" y="0"/>
@@ -981,14 +1024,14 @@
       </p:sp>
       <p:sp>
         <p:nvSpPr>
-          <p:cNvPr id="18" name=""/>
-          <p:cNvSpPr/>
-          <p:nvPr/>
-        </p:nvSpPr>
-        <p:spPr>
-          <a:xfrm>
-            <a:off x="730080" y="1363320"/>
-            <a:ext cx="4082760" cy="645120"/>
+          <p:cNvPr id="19" name=""/>
+          <p:cNvSpPr/>
+          <p:nvPr/>
+        </p:nvSpPr>
+        <p:spPr>
+          <a:xfrm>
+            <a:off x="730080" y="1346760"/>
+            <a:ext cx="4082760" cy="645480"/>
           </a:xfrm>
           <a:custGeom>
             <a:avLst/>
@@ -996,15 +1039,15 @@
             <a:ahLst/>
             <a:rect l="0" t="0" r="r" b="b"/>
             <a:pathLst>
-              <a:path fill="none" w="11341" h="1792">
+              <a:path fill="none" w="11341" h="1793">
                 <a:moveTo>
-                  <a:pt x="0" y="1792"/>
+                  <a:pt x="0" y="1793"/>
                 </a:moveTo>
                 <a:lnTo>
-                  <a:pt x="3781" y="1353"/>
-                </a:lnTo>
-                <a:lnTo>
-                  <a:pt x="7561" y="343"/>
+                  <a:pt x="3781" y="1309"/>
+                </a:lnTo>
+                <a:lnTo>
+                  <a:pt x="7561" y="363"/>
                 </a:lnTo>
                 <a:lnTo>
                   <a:pt x="11341" y="0"/>
@@ -1037,13 +1080,13 @@
       </p:sp>
       <p:sp>
         <p:nvSpPr>
-          <p:cNvPr id="19" name=""/>
-          <p:cNvSpPr/>
-          <p:nvPr/>
-        </p:nvSpPr>
-        <p:spPr>
-          <a:xfrm>
-            <a:off x="707040" y="1984680"/>
+          <p:cNvPr id="20" name=""/>
+          <p:cNvSpPr/>
+          <p:nvPr/>
+        </p:nvSpPr>
+        <p:spPr>
+          <a:xfrm>
+            <a:off x="707040" y="1968840"/>
             <a:ext cx="46440" cy="46440"/>
           </a:xfrm>
           <a:custGeom>
@@ -1057,13 +1100,13 @@
                   <a:pt x="0" y="65"/>
                 </a:moveTo>
                 <a:cubicBezTo>
-                  <a:pt x="0" y="-22"/>
-                  <a:pt x="129" y="-22"/>
+                  <a:pt x="0" y="-21"/>
+                  <a:pt x="129" y="-21"/>
                   <a:pt x="129" y="65"/>
                 </a:cubicBezTo>
                 <a:cubicBezTo>
-                  <a:pt x="129" y="150"/>
-                  <a:pt x="0" y="150"/>
+                  <a:pt x="129" y="151"/>
+                  <a:pt x="0" y="151"/>
                   <a:pt x="0" y="65"/>
                 </a:cubicBezTo>
                 <a:close/>
@@ -1095,13 +1138,13 @@
       </p:sp>
       <p:sp>
         <p:nvSpPr>
-          <p:cNvPr id="20" name=""/>
-          <p:cNvSpPr/>
-          <p:nvPr/>
-        </p:nvSpPr>
-        <p:spPr>
-          <a:xfrm>
-            <a:off x="707040" y="1984680"/>
+          <p:cNvPr id="21" name=""/>
+          <p:cNvSpPr/>
+          <p:nvPr/>
+        </p:nvSpPr>
+        <p:spPr>
+          <a:xfrm>
+            <a:off x="707040" y="1968840"/>
             <a:ext cx="46440" cy="46440"/>
           </a:xfrm>
           <a:custGeom>
@@ -1115,13 +1158,13 @@
                   <a:pt x="129" y="65"/>
                 </a:moveTo>
                 <a:cubicBezTo>
-                  <a:pt x="129" y="150"/>
-                  <a:pt x="0" y="150"/>
+                  <a:pt x="129" y="151"/>
+                  <a:pt x="0" y="151"/>
                   <a:pt x="0" y="65"/>
                 </a:cubicBezTo>
                 <a:cubicBezTo>
-                  <a:pt x="0" y="-22"/>
-                  <a:pt x="129" y="-22"/>
+                  <a:pt x="0" y="-21"/>
+                  <a:pt x="129" y="-21"/>
                   <a:pt x="129" y="65"/>
                 </a:cubicBezTo>
               </a:path>
@@ -1152,14 +1195,14 @@
       </p:sp>
       <p:sp>
         <p:nvSpPr>
-          <p:cNvPr id="21" name=""/>
-          <p:cNvSpPr/>
-          <p:nvPr/>
-        </p:nvSpPr>
-        <p:spPr>
-          <a:xfrm>
-            <a:off x="2067840" y="1827000"/>
-            <a:ext cx="46440" cy="46800"/>
+          <p:cNvPr id="22" name=""/>
+          <p:cNvSpPr/>
+          <p:nvPr/>
+        </p:nvSpPr>
+        <p:spPr>
+          <a:xfrm>
+            <a:off x="2067840" y="1794600"/>
+            <a:ext cx="46440" cy="46440"/>
           </a:xfrm>
           <a:custGeom>
             <a:avLst/>
@@ -1167,19 +1210,19 @@
             <a:ahLst/>
             <a:rect l="0" t="0" r="r" b="b"/>
             <a:pathLst>
-              <a:path w="129" h="130">
+              <a:path w="129" h="129">
                 <a:moveTo>
-                  <a:pt x="0" y="65"/>
+                  <a:pt x="0" y="64"/>
                 </a:moveTo>
                 <a:cubicBezTo>
-                  <a:pt x="0" y="-22"/>
-                  <a:pt x="129" y="-22"/>
-                  <a:pt x="129" y="65"/>
+                  <a:pt x="0" y="-21"/>
+                  <a:pt x="129" y="-21"/>
+                  <a:pt x="129" y="64"/>
                 </a:cubicBezTo>
                 <a:cubicBezTo>
                   <a:pt x="129" y="151"/>
                   <a:pt x="0" y="151"/>
-                  <a:pt x="0" y="65"/>
+                  <a:pt x="0" y="64"/>
                 </a:cubicBezTo>
                 <a:close/>
               </a:path>
@@ -1210,14 +1253,14 @@
       </p:sp>
       <p:sp>
         <p:nvSpPr>
-          <p:cNvPr id="22" name=""/>
-          <p:cNvSpPr/>
-          <p:nvPr/>
-        </p:nvSpPr>
-        <p:spPr>
-          <a:xfrm>
-            <a:off x="2067840" y="1827000"/>
-            <a:ext cx="46440" cy="46800"/>
+          <p:cNvPr id="23" name=""/>
+          <p:cNvSpPr/>
+          <p:nvPr/>
+        </p:nvSpPr>
+        <p:spPr>
+          <a:xfrm>
+            <a:off x="2067840" y="1794600"/>
+            <a:ext cx="46440" cy="46440"/>
           </a:xfrm>
           <a:custGeom>
             <a:avLst/>
@@ -1225,19 +1268,19 @@
             <a:ahLst/>
             <a:rect l="0" t="0" r="r" b="b"/>
             <a:pathLst>
-              <a:path fill="none" w="129" h="130">
+              <a:path fill="none" w="129" h="129">
                 <a:moveTo>
-                  <a:pt x="129" y="65"/>
+                  <a:pt x="129" y="64"/>
                 </a:moveTo>
                 <a:cubicBezTo>
                   <a:pt x="129" y="151"/>
                   <a:pt x="0" y="151"/>
-                  <a:pt x="0" y="65"/>
-                </a:cubicBezTo>
-                <a:cubicBezTo>
-                  <a:pt x="0" y="-22"/>
-                  <a:pt x="129" y="-22"/>
-                  <a:pt x="129" y="65"/>
+                  <a:pt x="0" y="64"/>
+                </a:cubicBezTo>
+                <a:cubicBezTo>
+                  <a:pt x="0" y="-21"/>
+                  <a:pt x="129" y="-21"/>
+                  <a:pt x="129" y="64"/>
                 </a:cubicBezTo>
               </a:path>
             </a:pathLst>
@@ -1267,14 +1310,14 @@
       </p:sp>
       <p:sp>
         <p:nvSpPr>
-          <p:cNvPr id="23" name=""/>
-          <p:cNvSpPr/>
-          <p:nvPr/>
-        </p:nvSpPr>
-        <p:spPr>
-          <a:xfrm>
-            <a:off x="3428640" y="1463760"/>
-            <a:ext cx="46440" cy="46440"/>
+          <p:cNvPr id="24" name=""/>
+          <p:cNvSpPr/>
+          <p:nvPr/>
+        </p:nvSpPr>
+        <p:spPr>
+          <a:xfrm>
+            <a:off x="3428640" y="1454400"/>
+            <a:ext cx="46440" cy="46800"/>
           </a:xfrm>
           <a:custGeom>
             <a:avLst/>
@@ -1282,19 +1325,19 @@
             <a:ahLst/>
             <a:rect l="0" t="0" r="r" b="b"/>
             <a:pathLst>
-              <a:path w="129" h="129">
+              <a:path w="129" h="130">
                 <a:moveTo>
-                  <a:pt x="0" y="64"/>
+                  <a:pt x="0" y="65"/>
                 </a:moveTo>
                 <a:cubicBezTo>
                   <a:pt x="0" y="-21"/>
                   <a:pt x="129" y="-21"/>
-                  <a:pt x="129" y="64"/>
-                </a:cubicBezTo>
-                <a:cubicBezTo>
-                  <a:pt x="129" y="151"/>
-                  <a:pt x="0" y="151"/>
-                  <a:pt x="0" y="64"/>
+                  <a:pt x="129" y="65"/>
+                </a:cubicBezTo>
+                <a:cubicBezTo>
+                  <a:pt x="129" y="152"/>
+                  <a:pt x="0" y="152"/>
+                  <a:pt x="0" y="65"/>
                 </a:cubicBezTo>
                 <a:close/>
               </a:path>
@@ -1325,14 +1368,14 @@
       </p:sp>
       <p:sp>
         <p:nvSpPr>
-          <p:cNvPr id="24" name=""/>
-          <p:cNvSpPr/>
-          <p:nvPr/>
-        </p:nvSpPr>
-        <p:spPr>
-          <a:xfrm>
-            <a:off x="3428640" y="1463760"/>
-            <a:ext cx="46440" cy="46440"/>
+          <p:cNvPr id="25" name=""/>
+          <p:cNvSpPr/>
+          <p:nvPr/>
+        </p:nvSpPr>
+        <p:spPr>
+          <a:xfrm>
+            <a:off x="3428640" y="1454400"/>
+            <a:ext cx="46440" cy="46800"/>
           </a:xfrm>
           <a:custGeom>
             <a:avLst/>
@@ -1340,19 +1383,19 @@
             <a:ahLst/>
             <a:rect l="0" t="0" r="r" b="b"/>
             <a:pathLst>
-              <a:path fill="none" w="129" h="129">
+              <a:path fill="none" w="129" h="130">
                 <a:moveTo>
-                  <a:pt x="129" y="64"/>
+                  <a:pt x="129" y="65"/>
                 </a:moveTo>
                 <a:cubicBezTo>
-                  <a:pt x="129" y="151"/>
-                  <a:pt x="0" y="151"/>
-                  <a:pt x="0" y="64"/>
+                  <a:pt x="129" y="152"/>
+                  <a:pt x="0" y="152"/>
+                  <a:pt x="0" y="65"/>
                 </a:cubicBezTo>
                 <a:cubicBezTo>
                   <a:pt x="0" y="-21"/>
                   <a:pt x="129" y="-21"/>
-                  <a:pt x="129" y="64"/>
+                  <a:pt x="129" y="65"/>
                 </a:cubicBezTo>
               </a:path>
             </a:pathLst>
@@ -1382,14 +1425,14 @@
       </p:sp>
       <p:sp>
         <p:nvSpPr>
-          <p:cNvPr id="25" name=""/>
-          <p:cNvSpPr/>
-          <p:nvPr/>
-        </p:nvSpPr>
-        <p:spPr>
-          <a:xfrm>
-            <a:off x="4789440" y="1340280"/>
-            <a:ext cx="46440" cy="46080"/>
+          <p:cNvPr id="26" name=""/>
+          <p:cNvSpPr/>
+          <p:nvPr/>
+        </p:nvSpPr>
+        <p:spPr>
+          <a:xfrm>
+            <a:off x="4789440" y="1323720"/>
+            <a:ext cx="46440" cy="46440"/>
           </a:xfrm>
           <a:custGeom>
             <a:avLst/>
@@ -1397,7 +1440,7 @@
             <a:ahLst/>
             <a:rect l="0" t="0" r="r" b="b"/>
             <a:pathLst>
-              <a:path w="129" h="128">
+              <a:path w="129" h="129">
                 <a:moveTo>
                   <a:pt x="0" y="65"/>
                 </a:moveTo>
@@ -1407,8 +1450,8 @@
                   <a:pt x="129" y="65"/>
                 </a:cubicBezTo>
                 <a:cubicBezTo>
-                  <a:pt x="129" y="150"/>
-                  <a:pt x="0" y="150"/>
+                  <a:pt x="129" y="151"/>
+                  <a:pt x="0" y="151"/>
                   <a:pt x="0" y="65"/>
                 </a:cubicBezTo>
                 <a:close/>
@@ -1440,14 +1483,14 @@
       </p:sp>
       <p:sp>
         <p:nvSpPr>
-          <p:cNvPr id="26" name=""/>
-          <p:cNvSpPr/>
-          <p:nvPr/>
-        </p:nvSpPr>
-        <p:spPr>
-          <a:xfrm>
-            <a:off x="4789440" y="1340280"/>
-            <a:ext cx="46440" cy="46080"/>
+          <p:cNvPr id="27" name=""/>
+          <p:cNvSpPr/>
+          <p:nvPr/>
+        </p:nvSpPr>
+        <p:spPr>
+          <a:xfrm>
+            <a:off x="4789440" y="1323720"/>
+            <a:ext cx="46440" cy="46440"/>
           </a:xfrm>
           <a:custGeom>
             <a:avLst/>
@@ -1455,13 +1498,13 @@
             <a:ahLst/>
             <a:rect l="0" t="0" r="r" b="b"/>
             <a:pathLst>
-              <a:path fill="none" w="129" h="128">
+              <a:path fill="none" w="129" h="129">
                 <a:moveTo>
                   <a:pt x="129" y="65"/>
                 </a:moveTo>
                 <a:cubicBezTo>
-                  <a:pt x="129" y="150"/>
-                  <a:pt x="0" y="150"/>
+                  <a:pt x="129" y="151"/>
+                  <a:pt x="0" y="151"/>
                   <a:pt x="0" y="65"/>
                 </a:cubicBezTo>
                 <a:cubicBezTo>
@@ -1497,14 +1540,14 @@
       </p:sp>
       <p:sp>
         <p:nvSpPr>
-          <p:cNvPr id="27" name=""/>
-          <p:cNvSpPr/>
-          <p:nvPr/>
-        </p:nvSpPr>
-        <p:spPr>
-          <a:xfrm>
-            <a:off x="707040" y="2182680"/>
-            <a:ext cx="46440" cy="46800"/>
+          <p:cNvPr id="28" name=""/>
+          <p:cNvSpPr/>
+          <p:nvPr/>
+        </p:nvSpPr>
+        <p:spPr>
+          <a:xfrm>
+            <a:off x="707040" y="2163600"/>
+            <a:ext cx="46440" cy="46440"/>
           </a:xfrm>
           <a:custGeom>
             <a:avLst/>
@@ -1512,7 +1555,7 @@
             <a:ahLst/>
             <a:rect l="0" t="0" r="r" b="b"/>
             <a:pathLst>
-              <a:path w="129" h="130">
+              <a:path w="129" h="129">
                 <a:moveTo>
                   <a:pt x="0" y="65"/>
                 </a:moveTo>
@@ -1522,8 +1565,8 @@
                   <a:pt x="129" y="65"/>
                 </a:cubicBezTo>
                 <a:cubicBezTo>
-                  <a:pt x="129" y="152"/>
-                  <a:pt x="0" y="152"/>
+                  <a:pt x="129" y="151"/>
+                  <a:pt x="0" y="151"/>
                   <a:pt x="0" y="65"/>
                 </a:cubicBezTo>
                 <a:close/>
@@ -1555,14 +1598,14 @@
       </p:sp>
       <p:sp>
         <p:nvSpPr>
-          <p:cNvPr id="28" name=""/>
-          <p:cNvSpPr/>
-          <p:nvPr/>
-        </p:nvSpPr>
-        <p:spPr>
-          <a:xfrm>
-            <a:off x="707040" y="2182680"/>
-            <a:ext cx="46440" cy="46800"/>
+          <p:cNvPr id="29" name=""/>
+          <p:cNvSpPr/>
+          <p:nvPr/>
+        </p:nvSpPr>
+        <p:spPr>
+          <a:xfrm>
+            <a:off x="707040" y="2163600"/>
+            <a:ext cx="46440" cy="46440"/>
           </a:xfrm>
           <a:custGeom>
             <a:avLst/>
@@ -1570,13 +1613,13 @@
             <a:ahLst/>
             <a:rect l="0" t="0" r="r" b="b"/>
             <a:pathLst>
-              <a:path fill="none" w="129" h="130">
+              <a:path fill="none" w="129" h="129">
                 <a:moveTo>
                   <a:pt x="129" y="65"/>
                 </a:moveTo>
                 <a:cubicBezTo>
-                  <a:pt x="129" y="152"/>
-                  <a:pt x="0" y="152"/>
+                  <a:pt x="129" y="151"/>
+                  <a:pt x="0" y="151"/>
                   <a:pt x="0" y="65"/>
                 </a:cubicBezTo>
                 <a:cubicBezTo>
@@ -1612,13 +1655,13 @@
       </p:sp>
       <p:sp>
         <p:nvSpPr>
-          <p:cNvPr id="29" name=""/>
-          <p:cNvSpPr/>
-          <p:nvPr/>
-        </p:nvSpPr>
-        <p:spPr>
-          <a:xfrm>
-            <a:off x="2067840" y="2050200"/>
+          <p:cNvPr id="30" name=""/>
+          <p:cNvSpPr/>
+          <p:nvPr/>
+        </p:nvSpPr>
+        <p:spPr>
+          <a:xfrm>
+            <a:off x="2067840" y="2003760"/>
             <a:ext cx="46440" cy="46440"/>
           </a:xfrm>
           <a:custGeom>
@@ -1670,13 +1713,13 @@
       </p:sp>
       <p:sp>
         <p:nvSpPr>
-          <p:cNvPr id="30" name=""/>
-          <p:cNvSpPr/>
-          <p:nvPr/>
-        </p:nvSpPr>
-        <p:spPr>
-          <a:xfrm>
-            <a:off x="2067840" y="2050200"/>
+          <p:cNvPr id="31" name=""/>
+          <p:cNvSpPr/>
+          <p:nvPr/>
+        </p:nvSpPr>
+        <p:spPr>
+          <a:xfrm>
+            <a:off x="2067840" y="2003760"/>
             <a:ext cx="46440" cy="46440"/>
           </a:xfrm>
           <a:custGeom>
@@ -1727,13 +1770,13 @@
       </p:sp>
       <p:sp>
         <p:nvSpPr>
-          <p:cNvPr id="31" name=""/>
-          <p:cNvSpPr/>
-          <p:nvPr/>
-        </p:nvSpPr>
-        <p:spPr>
-          <a:xfrm>
-            <a:off x="3428640" y="1652400"/>
+          <p:cNvPr id="32" name=""/>
+          <p:cNvSpPr/>
+          <p:nvPr/>
+        </p:nvSpPr>
+        <p:spPr>
+          <a:xfrm>
+            <a:off x="3428640" y="1617120"/>
             <a:ext cx="46440" cy="46440"/>
           </a:xfrm>
           <a:custGeom>
@@ -1785,13 +1828,13 @@
       </p:sp>
       <p:sp>
         <p:nvSpPr>
-          <p:cNvPr id="32" name=""/>
-          <p:cNvSpPr/>
-          <p:nvPr/>
-        </p:nvSpPr>
-        <p:spPr>
-          <a:xfrm>
-            <a:off x="3428640" y="1652400"/>
+          <p:cNvPr id="33" name=""/>
+          <p:cNvSpPr/>
+          <p:nvPr/>
+        </p:nvSpPr>
+        <p:spPr>
+          <a:xfrm>
+            <a:off x="3428640" y="1617120"/>
             <a:ext cx="46440" cy="46440"/>
           </a:xfrm>
           <a:custGeom>
@@ -1842,13 +1885,13 @@
       </p:sp>
       <p:sp>
         <p:nvSpPr>
-          <p:cNvPr id="33" name=""/>
-          <p:cNvSpPr/>
-          <p:nvPr/>
-        </p:nvSpPr>
-        <p:spPr>
-          <a:xfrm>
-            <a:off x="4789440" y="1466640"/>
+          <p:cNvPr id="34" name=""/>
+          <p:cNvSpPr/>
+          <p:nvPr/>
+        </p:nvSpPr>
+        <p:spPr>
+          <a:xfrm>
+            <a:off x="4789440" y="1414080"/>
             <a:ext cx="46440" cy="46440"/>
           </a:xfrm>
           <a:custGeom>
@@ -1859,17 +1902,17 @@
             <a:pathLst>
               <a:path w="129" h="129">
                 <a:moveTo>
-                  <a:pt x="0" y="64"/>
+                  <a:pt x="0" y="65"/>
                 </a:moveTo>
                 <a:cubicBezTo>
                   <a:pt x="0" y="-21"/>
                   <a:pt x="129" y="-21"/>
-                  <a:pt x="129" y="64"/>
+                  <a:pt x="129" y="65"/>
                 </a:cubicBezTo>
                 <a:cubicBezTo>
                   <a:pt x="129" y="151"/>
                   <a:pt x="0" y="151"/>
-                  <a:pt x="0" y="64"/>
+                  <a:pt x="0" y="65"/>
                 </a:cubicBezTo>
                 <a:close/>
               </a:path>
@@ -1900,13 +1943,13 @@
       </p:sp>
       <p:sp>
         <p:nvSpPr>
-          <p:cNvPr id="34" name=""/>
-          <p:cNvSpPr/>
-          <p:nvPr/>
-        </p:nvSpPr>
-        <p:spPr>
-          <a:xfrm>
-            <a:off x="4789440" y="1466640"/>
+          <p:cNvPr id="35" name=""/>
+          <p:cNvSpPr/>
+          <p:nvPr/>
+        </p:nvSpPr>
+        <p:spPr>
+          <a:xfrm>
+            <a:off x="4789440" y="1414080"/>
             <a:ext cx="46440" cy="46440"/>
           </a:xfrm>
           <a:custGeom>
@@ -1917,17 +1960,17 @@
             <a:pathLst>
               <a:path fill="none" w="129" h="129">
                 <a:moveTo>
-                  <a:pt x="129" y="64"/>
+                  <a:pt x="129" y="65"/>
                 </a:moveTo>
                 <a:cubicBezTo>
                   <a:pt x="129" y="151"/>
                   <a:pt x="0" y="151"/>
-                  <a:pt x="0" y="64"/>
+                  <a:pt x="0" y="65"/>
                 </a:cubicBezTo>
                 <a:cubicBezTo>
                   <a:pt x="0" y="-21"/>
                   <a:pt x="129" y="-21"/>
-                  <a:pt x="129" y="64"/>
+                  <a:pt x="129" y="65"/>
                 </a:cubicBezTo>
               </a:path>
             </a:pathLst>
@@ -1957,14 +2000,14 @@
       </p:sp>
       <p:sp>
         <p:nvSpPr>
-          <p:cNvPr id="35" name=""/>
-          <p:cNvSpPr/>
-          <p:nvPr/>
-        </p:nvSpPr>
-        <p:spPr>
-          <a:xfrm>
-            <a:off x="707040" y="2140560"/>
-            <a:ext cx="46440" cy="46800"/>
+          <p:cNvPr id="36" name=""/>
+          <p:cNvSpPr/>
+          <p:nvPr/>
+        </p:nvSpPr>
+        <p:spPr>
+          <a:xfrm>
+            <a:off x="707040" y="2132640"/>
+            <a:ext cx="46440" cy="46440"/>
           </a:xfrm>
           <a:custGeom>
             <a:avLst/>
@@ -1972,7 +2015,7 @@
             <a:ahLst/>
             <a:rect l="0" t="0" r="r" b="b"/>
             <a:pathLst>
-              <a:path w="129" h="130">
+              <a:path w="129" h="129">
                 <a:moveTo>
                   <a:pt x="0" y="65"/>
                 </a:moveTo>
@@ -1982,8 +2025,8 @@
                   <a:pt x="129" y="65"/>
                 </a:cubicBezTo>
                 <a:cubicBezTo>
-                  <a:pt x="129" y="151"/>
-                  <a:pt x="0" y="151"/>
+                  <a:pt x="129" y="150"/>
+                  <a:pt x="0" y="150"/>
                   <a:pt x="0" y="65"/>
                 </a:cubicBezTo>
                 <a:close/>
@@ -2015,14 +2058,14 @@
       </p:sp>
       <p:sp>
         <p:nvSpPr>
-          <p:cNvPr id="36" name=""/>
-          <p:cNvSpPr/>
-          <p:nvPr/>
-        </p:nvSpPr>
-        <p:spPr>
-          <a:xfrm>
-            <a:off x="707040" y="2140560"/>
-            <a:ext cx="46440" cy="46800"/>
+          <p:cNvPr id="37" name=""/>
+          <p:cNvSpPr/>
+          <p:nvPr/>
+        </p:nvSpPr>
+        <p:spPr>
+          <a:xfrm>
+            <a:off x="707040" y="2132640"/>
+            <a:ext cx="46440" cy="46440"/>
           </a:xfrm>
           <a:custGeom>
             <a:avLst/>
@@ -2030,13 +2073,13 @@
             <a:ahLst/>
             <a:rect l="0" t="0" r="r" b="b"/>
             <a:pathLst>
-              <a:path fill="none" w="129" h="130">
+              <a:path fill="none" w="129" h="129">
                 <a:moveTo>
                   <a:pt x="129" y="65"/>
                 </a:moveTo>
                 <a:cubicBezTo>
-                  <a:pt x="129" y="151"/>
-                  <a:pt x="0" y="151"/>
+                  <a:pt x="129" y="150"/>
+                  <a:pt x="0" y="150"/>
                   <a:pt x="0" y="65"/>
                 </a:cubicBezTo>
                 <a:cubicBezTo>
@@ -2072,14 +2115,14 @@
       </p:sp>
       <p:sp>
         <p:nvSpPr>
-          <p:cNvPr id="37" name=""/>
-          <p:cNvSpPr/>
-          <p:nvPr/>
-        </p:nvSpPr>
-        <p:spPr>
-          <a:xfrm>
-            <a:off x="2067840" y="1980360"/>
-            <a:ext cx="46440" cy="46080"/>
+          <p:cNvPr id="38" name=""/>
+          <p:cNvSpPr/>
+          <p:nvPr/>
+        </p:nvSpPr>
+        <p:spPr>
+          <a:xfrm>
+            <a:off x="2067840" y="1956960"/>
+            <a:ext cx="46440" cy="46800"/>
           </a:xfrm>
           <a:custGeom>
             <a:avLst/>
@@ -2087,19 +2130,19 @@
             <a:ahLst/>
             <a:rect l="0" t="0" r="r" b="b"/>
             <a:pathLst>
-              <a:path w="129" h="128">
+              <a:path w="129" h="130">
                 <a:moveTo>
-                  <a:pt x="0" y="64"/>
+                  <a:pt x="0" y="65"/>
                 </a:moveTo>
                 <a:cubicBezTo>
                   <a:pt x="0" y="-21"/>
                   <a:pt x="129" y="-21"/>
-                  <a:pt x="129" y="64"/>
-                </a:cubicBezTo>
-                <a:cubicBezTo>
-                  <a:pt x="129" y="150"/>
-                  <a:pt x="0" y="150"/>
-                  <a:pt x="0" y="64"/>
+                  <a:pt x="129" y="65"/>
+                </a:cubicBezTo>
+                <a:cubicBezTo>
+                  <a:pt x="129" y="152"/>
+                  <a:pt x="0" y="152"/>
+                  <a:pt x="0" y="65"/>
                 </a:cubicBezTo>
                 <a:close/>
               </a:path>
@@ -2130,14 +2173,14 @@
       </p:sp>
       <p:sp>
         <p:nvSpPr>
-          <p:cNvPr id="38" name=""/>
-          <p:cNvSpPr/>
-          <p:nvPr/>
-        </p:nvSpPr>
-        <p:spPr>
-          <a:xfrm>
-            <a:off x="2067840" y="1980360"/>
-            <a:ext cx="46440" cy="46080"/>
+          <p:cNvPr id="39" name=""/>
+          <p:cNvSpPr/>
+          <p:nvPr/>
+        </p:nvSpPr>
+        <p:spPr>
+          <a:xfrm>
+            <a:off x="2067840" y="1956960"/>
+            <a:ext cx="46440" cy="46800"/>
           </a:xfrm>
           <a:custGeom>
             <a:avLst/>
@@ -2145,19 +2188,19 @@
             <a:ahLst/>
             <a:rect l="0" t="0" r="r" b="b"/>
             <a:pathLst>
-              <a:path fill="none" w="129" h="128">
+              <a:path fill="none" w="129" h="130">
                 <a:moveTo>
-                  <a:pt x="129" y="64"/>
+                  <a:pt x="129" y="65"/>
                 </a:moveTo>
                 <a:cubicBezTo>
-                  <a:pt x="129" y="150"/>
-                  <a:pt x="0" y="150"/>
-                  <a:pt x="0" y="64"/>
+                  <a:pt x="129" y="152"/>
+                  <a:pt x="0" y="152"/>
+                  <a:pt x="0" y="65"/>
                 </a:cubicBezTo>
                 <a:cubicBezTo>
                   <a:pt x="0" y="-21"/>
                   <a:pt x="129" y="-21"/>
-                  <a:pt x="129" y="64"/>
+                  <a:pt x="129" y="65"/>
                 </a:cubicBezTo>
               </a:path>
             </a:pathLst>
@@ -2187,14 +2230,14 @@
       </p:sp>
       <p:sp>
         <p:nvSpPr>
-          <p:cNvPr id="39" name=""/>
-          <p:cNvSpPr/>
-          <p:nvPr/>
-        </p:nvSpPr>
-        <p:spPr>
-          <a:xfrm>
-            <a:off x="3428640" y="1460160"/>
-            <a:ext cx="46440" cy="46440"/>
+          <p:cNvPr id="40" name=""/>
+          <p:cNvSpPr/>
+          <p:nvPr/>
+        </p:nvSpPr>
+        <p:spPr>
+          <a:xfrm>
+            <a:off x="3428640" y="1458720"/>
+            <a:ext cx="46440" cy="46800"/>
           </a:xfrm>
           <a:custGeom>
             <a:avLst/>
@@ -2202,19 +2245,19 @@
             <a:ahLst/>
             <a:rect l="0" t="0" r="r" b="b"/>
             <a:pathLst>
-              <a:path w="129" h="129">
+              <a:path w="129" h="130">
                 <a:moveTo>
-                  <a:pt x="0" y="64"/>
+                  <a:pt x="0" y="65"/>
                 </a:moveTo>
                 <a:cubicBezTo>
-                  <a:pt x="0" y="-21"/>
-                  <a:pt x="129" y="-21"/>
-                  <a:pt x="129" y="64"/>
+                  <a:pt x="0" y="-22"/>
+                  <a:pt x="129" y="-22"/>
+                  <a:pt x="129" y="65"/>
                 </a:cubicBezTo>
                 <a:cubicBezTo>
                   <a:pt x="129" y="151"/>
                   <a:pt x="0" y="151"/>
-                  <a:pt x="0" y="64"/>
+                  <a:pt x="0" y="65"/>
                 </a:cubicBezTo>
                 <a:close/>
               </a:path>
@@ -2245,14 +2288,14 @@
       </p:sp>
       <p:sp>
         <p:nvSpPr>
-          <p:cNvPr id="40" name=""/>
-          <p:cNvSpPr/>
-          <p:nvPr/>
-        </p:nvSpPr>
-        <p:spPr>
-          <a:xfrm>
-            <a:off x="3428640" y="1460160"/>
-            <a:ext cx="46440" cy="46440"/>
+          <p:cNvPr id="41" name=""/>
+          <p:cNvSpPr/>
+          <p:nvPr/>
+        </p:nvSpPr>
+        <p:spPr>
+          <a:xfrm>
+            <a:off x="3428640" y="1458720"/>
+            <a:ext cx="46440" cy="46800"/>
           </a:xfrm>
           <a:custGeom>
             <a:avLst/>
@@ -2260,19 +2303,19 @@
             <a:ahLst/>
             <a:rect l="0" t="0" r="r" b="b"/>
             <a:pathLst>
-              <a:path fill="none" w="129" h="129">
+              <a:path fill="none" w="129" h="130">
                 <a:moveTo>
-                  <a:pt x="129" y="64"/>
+                  <a:pt x="129" y="65"/>
                 </a:moveTo>
                 <a:cubicBezTo>
                   <a:pt x="129" y="151"/>
                   <a:pt x="0" y="151"/>
-                  <a:pt x="0" y="64"/>
-                </a:cubicBezTo>
-                <a:cubicBezTo>
-                  <a:pt x="0" y="-21"/>
-                  <a:pt x="129" y="-21"/>
-                  <a:pt x="129" y="64"/>
+                  <a:pt x="0" y="65"/>
+                </a:cubicBezTo>
+                <a:cubicBezTo>
+                  <a:pt x="0" y="-22"/>
+                  <a:pt x="129" y="-22"/>
+                  <a:pt x="129" y="65"/>
                 </a:cubicBezTo>
               </a:path>
             </a:pathLst>
@@ -2302,13 +2345,13 @@
       </p:sp>
       <p:sp>
         <p:nvSpPr>
-          <p:cNvPr id="41" name=""/>
-          <p:cNvSpPr/>
-          <p:nvPr/>
-        </p:nvSpPr>
-        <p:spPr>
-          <a:xfrm>
-            <a:off x="4789440" y="1338480"/>
+          <p:cNvPr id="42" name=""/>
+          <p:cNvSpPr/>
+          <p:nvPr/>
+        </p:nvSpPr>
+        <p:spPr>
+          <a:xfrm>
+            <a:off x="4789440" y="1336320"/>
             <a:ext cx="46440" cy="46440"/>
           </a:xfrm>
           <a:custGeom>
@@ -2360,13 +2403,13 @@
       </p:sp>
       <p:sp>
         <p:nvSpPr>
-          <p:cNvPr id="42" name=""/>
-          <p:cNvSpPr/>
-          <p:nvPr/>
-        </p:nvSpPr>
-        <p:spPr>
-          <a:xfrm>
-            <a:off x="4789440" y="1338480"/>
+          <p:cNvPr id="43" name=""/>
+          <p:cNvSpPr/>
+          <p:nvPr/>
+        </p:nvSpPr>
+        <p:spPr>
+          <a:xfrm>
+            <a:off x="4789440" y="1336320"/>
             <a:ext cx="46440" cy="46440"/>
           </a:xfrm>
           <a:custGeom>
@@ -2417,7 +2460,7 @@
       </p:sp>
       <p:sp>
         <p:nvSpPr>
-          <p:cNvPr id="43" name=""/>
+          <p:cNvPr id="44" name=""/>
           <p:cNvSpPr/>
           <p:nvPr/>
         </p:nvSpPr>
@@ -2460,7 +2503,7 @@
       </p:sp>
       <p:sp>
         <p:nvSpPr>
-          <p:cNvPr id="44" name=""/>
+          <p:cNvPr id="45" name=""/>
           <p:cNvSpPr txBox="1"/>
           <p:nvPr/>
         </p:nvSpPr>
@@ -2508,13 +2551,13 @@
       </p:sp>
       <p:sp>
         <p:nvSpPr>
-          <p:cNvPr id="45" name=""/>
+          <p:cNvPr id="46" name=""/>
           <p:cNvSpPr txBox="1"/>
           <p:nvPr/>
         </p:nvSpPr>
         <p:spPr>
           <a:xfrm>
-            <a:off x="342000" y="1997280"/>
+            <a:off x="342000" y="2002680"/>
             <a:ext cx="142560" cy="102600"/>
           </a:xfrm>
           <a:prstGeom prst="rect">
@@ -2556,357 +2599,13 @@
       </p:sp>
       <p:sp>
         <p:nvSpPr>
-          <p:cNvPr id="46" name=""/>
-          <p:cNvSpPr/>
-          <p:nvPr/>
-        </p:nvSpPr>
-        <p:spPr>
-          <a:xfrm>
-            <a:off x="494280" y="2746800"/>
-            <a:ext cx="31680" cy="0"/>
-          </a:xfrm>
-          <a:prstGeom prst="line">
-            <a:avLst/>
-          </a:prstGeom>
-          <a:ln w="7920">
-            <a:solidFill>
-              <a:srgbClr val="333333"/>
-            </a:solidFill>
-            <a:round/>
-          </a:ln>
-        </p:spPr>
-        <p:style>
-          <a:lnRef idx="0"/>
-          <a:fillRef idx="0"/>
-          <a:effectRef idx="0"/>
-          <a:fontRef idx="minor"/>
-        </p:style>
-        <p:txBody>
-          <a:bodyPr lIns="3960" tIns="-3960" rIns="3960" bIns="-3960" anchor="t">
-            <a:noAutofit/>
-          </a:bodyPr>
-          <a:p>
-            <a:endParaRPr lang="en-US" sz="2400" b="0" u="none" strike="noStrike">
-              <a:solidFill>
-                <a:srgbClr val="000000"/>
-              </a:solidFill>
-              <a:effectLst/>
-              <a:uFillTx/>
-              <a:latin typeface="Times New Roman"/>
-            </a:endParaRPr>
-          </a:p>
-        </p:txBody>
-      </p:sp>
-      <p:sp>
-        <p:nvSpPr>
           <p:cNvPr id="47" name=""/>
-          <p:cNvSpPr/>
-          <p:nvPr/>
-        </p:nvSpPr>
-        <p:spPr>
-          <a:xfrm>
-            <a:off x="494280" y="2048040"/>
-            <a:ext cx="31680" cy="0"/>
-          </a:xfrm>
-          <a:prstGeom prst="line">
-            <a:avLst/>
-          </a:prstGeom>
-          <a:ln w="7920">
-            <a:solidFill>
-              <a:srgbClr val="333333"/>
-            </a:solidFill>
-            <a:round/>
-          </a:ln>
-        </p:spPr>
-        <p:style>
-          <a:lnRef idx="0"/>
-          <a:fillRef idx="0"/>
-          <a:effectRef idx="0"/>
-          <a:fontRef idx="minor"/>
-        </p:style>
-        <p:txBody>
-          <a:bodyPr lIns="3960" tIns="-3960" rIns="3960" bIns="-3960" anchor="t">
-            <a:noAutofit/>
-          </a:bodyPr>
-          <a:p>
-            <a:endParaRPr lang="en-US" sz="2400" b="0" u="none" strike="noStrike">
-              <a:solidFill>
-                <a:srgbClr val="000000"/>
-              </a:solidFill>
-              <a:effectLst/>
-              <a:uFillTx/>
-              <a:latin typeface="Times New Roman"/>
-            </a:endParaRPr>
-          </a:p>
-        </p:txBody>
-      </p:sp>
-      <p:sp>
-        <p:nvSpPr>
-          <p:cNvPr id="48" name=""/>
-          <p:cNvSpPr/>
-          <p:nvPr/>
-        </p:nvSpPr>
-        <p:spPr>
-          <a:xfrm>
-            <a:off x="494280" y="1349280"/>
-            <a:ext cx="31680" cy="0"/>
-          </a:xfrm>
-          <a:prstGeom prst="line">
-            <a:avLst/>
-          </a:prstGeom>
-          <a:ln w="7920">
-            <a:solidFill>
-              <a:srgbClr val="333333"/>
-            </a:solidFill>
-            <a:round/>
-          </a:ln>
-        </p:spPr>
-        <p:style>
-          <a:lnRef idx="0"/>
-          <a:fillRef idx="0"/>
-          <a:effectRef idx="0"/>
-          <a:fontRef idx="minor"/>
-        </p:style>
-        <p:txBody>
-          <a:bodyPr lIns="3960" tIns="-3960" rIns="3960" bIns="-3960" anchor="t">
-            <a:noAutofit/>
-          </a:bodyPr>
-          <a:p>
-            <a:endParaRPr lang="en-US" sz="2400" b="0" u="none" strike="noStrike">
-              <a:solidFill>
-                <a:srgbClr val="000000"/>
-              </a:solidFill>
-              <a:effectLst/>
-              <a:uFillTx/>
-              <a:latin typeface="Times New Roman"/>
-            </a:endParaRPr>
-          </a:p>
-        </p:txBody>
-      </p:sp>
-      <p:sp>
-        <p:nvSpPr>
-          <p:cNvPr id="49" name=""/>
-          <p:cNvSpPr/>
-          <p:nvPr/>
-        </p:nvSpPr>
-        <p:spPr>
-          <a:xfrm>
-            <a:off x="525960" y="2846160"/>
-            <a:ext cx="4490640" cy="0"/>
-          </a:xfrm>
-          <a:prstGeom prst="line">
-            <a:avLst/>
-          </a:prstGeom>
-          <a:ln cap="sq" w="9360">
-            <a:solidFill>
-              <a:srgbClr val="333333"/>
-            </a:solidFill>
-            <a:round/>
-          </a:ln>
-        </p:spPr>
-        <p:style>
-          <a:lnRef idx="0"/>
-          <a:fillRef idx="0"/>
-          <a:effectRef idx="0"/>
-          <a:fontRef idx="minor"/>
-        </p:style>
-        <p:txBody>
-          <a:bodyPr lIns="4680" tIns="-4680" rIns="4680" bIns="-4680" anchor="t">
-            <a:noAutofit/>
-          </a:bodyPr>
-          <a:p>
-            <a:endParaRPr lang="en-US" sz="2400" b="0" u="none" strike="noStrike">
-              <a:solidFill>
-                <a:srgbClr val="000000"/>
-              </a:solidFill>
-              <a:effectLst/>
-              <a:uFillTx/>
-              <a:latin typeface="Times New Roman"/>
-            </a:endParaRPr>
-          </a:p>
-        </p:txBody>
-      </p:sp>
-      <p:sp>
-        <p:nvSpPr>
-          <p:cNvPr id="50" name=""/>
-          <p:cNvSpPr/>
-          <p:nvPr/>
-        </p:nvSpPr>
-        <p:spPr>
-          <a:xfrm flipV="1">
-            <a:off x="730080" y="2846160"/>
-            <a:ext cx="0" cy="31680"/>
-          </a:xfrm>
-          <a:prstGeom prst="line">
-            <a:avLst/>
-          </a:prstGeom>
-          <a:ln w="7920">
-            <a:solidFill>
-              <a:srgbClr val="333333"/>
-            </a:solidFill>
-            <a:round/>
-          </a:ln>
-        </p:spPr>
-        <p:style>
-          <a:lnRef idx="0"/>
-          <a:fillRef idx="0"/>
-          <a:effectRef idx="0"/>
-          <a:fontRef idx="minor"/>
-        </p:style>
-        <p:txBody>
-          <a:bodyPr lIns="3960" tIns="3960" rIns="3960" bIns="3960" anchor="t">
-            <a:noAutofit/>
-          </a:bodyPr>
-          <a:p>
-            <a:endParaRPr lang="en-US" sz="2400" b="0" u="none" strike="noStrike">
-              <a:solidFill>
-                <a:srgbClr val="000000"/>
-              </a:solidFill>
-              <a:effectLst/>
-              <a:uFillTx/>
-              <a:latin typeface="Times New Roman"/>
-            </a:endParaRPr>
-          </a:p>
-        </p:txBody>
-      </p:sp>
-      <p:sp>
-        <p:nvSpPr>
-          <p:cNvPr id="51" name=""/>
-          <p:cNvSpPr/>
-          <p:nvPr/>
-        </p:nvSpPr>
-        <p:spPr>
-          <a:xfrm flipV="1">
-            <a:off x="2090880" y="2846160"/>
-            <a:ext cx="0" cy="31680"/>
-          </a:xfrm>
-          <a:prstGeom prst="line">
-            <a:avLst/>
-          </a:prstGeom>
-          <a:ln w="7920">
-            <a:solidFill>
-              <a:srgbClr val="333333"/>
-            </a:solidFill>
-            <a:round/>
-          </a:ln>
-        </p:spPr>
-        <p:style>
-          <a:lnRef idx="0"/>
-          <a:fillRef idx="0"/>
-          <a:effectRef idx="0"/>
-          <a:fontRef idx="minor"/>
-        </p:style>
-        <p:txBody>
-          <a:bodyPr lIns="3960" tIns="3960" rIns="3960" bIns="3960" anchor="t">
-            <a:noAutofit/>
-          </a:bodyPr>
-          <a:p>
-            <a:endParaRPr lang="en-US" sz="2400" b="0" u="none" strike="noStrike">
-              <a:solidFill>
-                <a:srgbClr val="000000"/>
-              </a:solidFill>
-              <a:effectLst/>
-              <a:uFillTx/>
-              <a:latin typeface="Times New Roman"/>
-            </a:endParaRPr>
-          </a:p>
-        </p:txBody>
-      </p:sp>
-      <p:sp>
-        <p:nvSpPr>
-          <p:cNvPr id="52" name=""/>
-          <p:cNvSpPr/>
-          <p:nvPr/>
-        </p:nvSpPr>
-        <p:spPr>
-          <a:xfrm flipV="1">
-            <a:off x="3451680" y="2846160"/>
-            <a:ext cx="0" cy="31680"/>
-          </a:xfrm>
-          <a:prstGeom prst="line">
-            <a:avLst/>
-          </a:prstGeom>
-          <a:ln w="7920">
-            <a:solidFill>
-              <a:srgbClr val="333333"/>
-            </a:solidFill>
-            <a:round/>
-          </a:ln>
-        </p:spPr>
-        <p:style>
-          <a:lnRef idx="0"/>
-          <a:fillRef idx="0"/>
-          <a:effectRef idx="0"/>
-          <a:fontRef idx="minor"/>
-        </p:style>
-        <p:txBody>
-          <a:bodyPr lIns="3960" tIns="3960" rIns="3960" bIns="3960" anchor="t">
-            <a:noAutofit/>
-          </a:bodyPr>
-          <a:p>
-            <a:endParaRPr lang="en-US" sz="2400" b="0" u="none" strike="noStrike">
-              <a:solidFill>
-                <a:srgbClr val="000000"/>
-              </a:solidFill>
-              <a:effectLst/>
-              <a:uFillTx/>
-              <a:latin typeface="Times New Roman"/>
-            </a:endParaRPr>
-          </a:p>
-        </p:txBody>
-      </p:sp>
-      <p:sp>
-        <p:nvSpPr>
-          <p:cNvPr id="53" name=""/>
-          <p:cNvSpPr/>
-          <p:nvPr/>
-        </p:nvSpPr>
-        <p:spPr>
-          <a:xfrm flipV="1">
-            <a:off x="4812480" y="2846160"/>
-            <a:ext cx="0" cy="31680"/>
-          </a:xfrm>
-          <a:prstGeom prst="line">
-            <a:avLst/>
-          </a:prstGeom>
-          <a:ln w="7920">
-            <a:solidFill>
-              <a:srgbClr val="333333"/>
-            </a:solidFill>
-            <a:round/>
-          </a:ln>
-        </p:spPr>
-        <p:style>
-          <a:lnRef idx="0"/>
-          <a:fillRef idx="0"/>
-          <a:effectRef idx="0"/>
-          <a:fontRef idx="minor"/>
-        </p:style>
-        <p:txBody>
-          <a:bodyPr lIns="3960" tIns="3960" rIns="3960" bIns="3960" anchor="t">
-            <a:noAutofit/>
-          </a:bodyPr>
-          <a:p>
-            <a:endParaRPr lang="en-US" sz="2400" b="0" u="none" strike="noStrike">
-              <a:solidFill>
-                <a:srgbClr val="000000"/>
-              </a:solidFill>
-              <a:effectLst/>
-              <a:uFillTx/>
-              <a:latin typeface="Times New Roman"/>
-            </a:endParaRPr>
-          </a:p>
-        </p:txBody>
-      </p:sp>
-      <p:sp>
-        <p:nvSpPr>
-          <p:cNvPr id="54" name=""/>
           <p:cNvSpPr txBox="1"/>
           <p:nvPr/>
         </p:nvSpPr>
         <p:spPr>
           <a:xfrm>
-            <a:off x="342000" y="1298520"/>
+            <a:off x="342000" y="1308960"/>
             <a:ext cx="142560" cy="102600"/>
           </a:xfrm>
           <a:prstGeom prst="rect">
@@ -2948,7 +2647,442 @@
       </p:sp>
       <p:sp>
         <p:nvSpPr>
+          <p:cNvPr id="48" name=""/>
+          <p:cNvSpPr/>
+          <p:nvPr/>
+        </p:nvSpPr>
+        <p:spPr>
+          <a:xfrm>
+            <a:off x="494280" y="2746800"/>
+            <a:ext cx="31680" cy="0"/>
+          </a:xfrm>
+          <a:prstGeom prst="line">
+            <a:avLst/>
+          </a:prstGeom>
+          <a:ln w="7920">
+            <a:solidFill>
+              <a:srgbClr val="333333"/>
+            </a:solidFill>
+            <a:round/>
+          </a:ln>
+        </p:spPr>
+        <p:style>
+          <a:lnRef idx="0"/>
+          <a:fillRef idx="0"/>
+          <a:effectRef idx="0"/>
+          <a:fontRef idx="minor"/>
+        </p:style>
+        <p:txBody>
+          <a:bodyPr lIns="3960" tIns="-3960" rIns="3960" bIns="-3960" anchor="t">
+            <a:noAutofit/>
+          </a:bodyPr>
+          <a:p>
+            <a:endParaRPr lang="en-US" sz="2400" b="0" u="none" strike="noStrike">
+              <a:solidFill>
+                <a:srgbClr val="000000"/>
+              </a:solidFill>
+              <a:effectLst/>
+              <a:uFillTx/>
+              <a:latin typeface="Times New Roman"/>
+            </a:endParaRPr>
+          </a:p>
+        </p:txBody>
+      </p:sp>
+      <p:sp>
+        <p:nvSpPr>
+          <p:cNvPr id="49" name=""/>
+          <p:cNvSpPr/>
+          <p:nvPr/>
+        </p:nvSpPr>
+        <p:spPr>
+          <a:xfrm>
+            <a:off x="494280" y="2053080"/>
+            <a:ext cx="31680" cy="0"/>
+          </a:xfrm>
+          <a:prstGeom prst="line">
+            <a:avLst/>
+          </a:prstGeom>
+          <a:ln w="7920">
+            <a:solidFill>
+              <a:srgbClr val="333333"/>
+            </a:solidFill>
+            <a:round/>
+          </a:ln>
+        </p:spPr>
+        <p:style>
+          <a:lnRef idx="0"/>
+          <a:fillRef idx="0"/>
+          <a:effectRef idx="0"/>
+          <a:fontRef idx="minor"/>
+        </p:style>
+        <p:txBody>
+          <a:bodyPr lIns="3960" tIns="-3960" rIns="3960" bIns="-3960" anchor="t">
+            <a:noAutofit/>
+          </a:bodyPr>
+          <a:p>
+            <a:endParaRPr lang="en-US" sz="2400" b="0" u="none" strike="noStrike">
+              <a:solidFill>
+                <a:srgbClr val="000000"/>
+              </a:solidFill>
+              <a:effectLst/>
+              <a:uFillTx/>
+              <a:latin typeface="Times New Roman"/>
+            </a:endParaRPr>
+          </a:p>
+        </p:txBody>
+      </p:sp>
+      <p:sp>
+        <p:nvSpPr>
+          <p:cNvPr id="50" name=""/>
+          <p:cNvSpPr/>
+          <p:nvPr/>
+        </p:nvSpPr>
+        <p:spPr>
+          <a:xfrm>
+            <a:off x="494280" y="1359360"/>
+            <a:ext cx="31680" cy="0"/>
+          </a:xfrm>
+          <a:prstGeom prst="line">
+            <a:avLst/>
+          </a:prstGeom>
+          <a:ln w="7920">
+            <a:solidFill>
+              <a:srgbClr val="333333"/>
+            </a:solidFill>
+            <a:round/>
+          </a:ln>
+        </p:spPr>
+        <p:style>
+          <a:lnRef idx="0"/>
+          <a:fillRef idx="0"/>
+          <a:effectRef idx="0"/>
+          <a:fontRef idx="minor"/>
+        </p:style>
+        <p:txBody>
+          <a:bodyPr lIns="3960" tIns="-3960" rIns="3960" bIns="-3960" anchor="t">
+            <a:noAutofit/>
+          </a:bodyPr>
+          <a:p>
+            <a:endParaRPr lang="en-US" sz="2400" b="0" u="none" strike="noStrike">
+              <a:solidFill>
+                <a:srgbClr val="000000"/>
+              </a:solidFill>
+              <a:effectLst/>
+              <a:uFillTx/>
+              <a:latin typeface="Times New Roman"/>
+            </a:endParaRPr>
+          </a:p>
+        </p:txBody>
+      </p:sp>
+      <p:sp>
+        <p:nvSpPr>
+          <p:cNvPr id="51" name=""/>
+          <p:cNvSpPr/>
+          <p:nvPr/>
+        </p:nvSpPr>
+        <p:spPr>
+          <a:xfrm>
+            <a:off x="494280" y="666000"/>
+            <a:ext cx="31680" cy="0"/>
+          </a:xfrm>
+          <a:prstGeom prst="line">
+            <a:avLst/>
+          </a:prstGeom>
+          <a:ln w="7920">
+            <a:solidFill>
+              <a:srgbClr val="333333"/>
+            </a:solidFill>
+            <a:round/>
+          </a:ln>
+        </p:spPr>
+        <p:style>
+          <a:lnRef idx="0"/>
+          <a:fillRef idx="0"/>
+          <a:effectRef idx="0"/>
+          <a:fontRef idx="minor"/>
+        </p:style>
+        <p:txBody>
+          <a:bodyPr lIns="3960" tIns="-3960" rIns="3960" bIns="-3960" anchor="t">
+            <a:noAutofit/>
+          </a:bodyPr>
+          <a:p>
+            <a:endParaRPr lang="en-US" sz="2400" b="0" u="none" strike="noStrike">
+              <a:solidFill>
+                <a:srgbClr val="000000"/>
+              </a:solidFill>
+              <a:effectLst/>
+              <a:uFillTx/>
+              <a:latin typeface="Times New Roman"/>
+            </a:endParaRPr>
+          </a:p>
+        </p:txBody>
+      </p:sp>
+      <p:sp>
+        <p:nvSpPr>
+          <p:cNvPr id="52" name=""/>
+          <p:cNvSpPr/>
+          <p:nvPr/>
+        </p:nvSpPr>
+        <p:spPr>
+          <a:xfrm>
+            <a:off x="525960" y="2846160"/>
+            <a:ext cx="4490640" cy="0"/>
+          </a:xfrm>
+          <a:prstGeom prst="line">
+            <a:avLst/>
+          </a:prstGeom>
+          <a:ln cap="sq" w="9360">
+            <a:solidFill>
+              <a:srgbClr val="333333"/>
+            </a:solidFill>
+            <a:round/>
+          </a:ln>
+        </p:spPr>
+        <p:style>
+          <a:lnRef idx="0"/>
+          <a:fillRef idx="0"/>
+          <a:effectRef idx="0"/>
+          <a:fontRef idx="minor"/>
+        </p:style>
+        <p:txBody>
+          <a:bodyPr lIns="4680" tIns="-4680" rIns="4680" bIns="-4680" anchor="t">
+            <a:noAutofit/>
+          </a:bodyPr>
+          <a:p>
+            <a:endParaRPr lang="en-US" sz="2400" b="0" u="none" strike="noStrike">
+              <a:solidFill>
+                <a:srgbClr val="000000"/>
+              </a:solidFill>
+              <a:effectLst/>
+              <a:uFillTx/>
+              <a:latin typeface="Times New Roman"/>
+            </a:endParaRPr>
+          </a:p>
+        </p:txBody>
+      </p:sp>
+      <p:sp>
+        <p:nvSpPr>
+          <p:cNvPr id="53" name=""/>
+          <p:cNvSpPr/>
+          <p:nvPr/>
+        </p:nvSpPr>
+        <p:spPr>
+          <a:xfrm flipV="1">
+            <a:off x="730080" y="2846160"/>
+            <a:ext cx="0" cy="31680"/>
+          </a:xfrm>
+          <a:prstGeom prst="line">
+            <a:avLst/>
+          </a:prstGeom>
+          <a:ln w="7920">
+            <a:solidFill>
+              <a:srgbClr val="333333"/>
+            </a:solidFill>
+            <a:round/>
+          </a:ln>
+        </p:spPr>
+        <p:style>
+          <a:lnRef idx="0"/>
+          <a:fillRef idx="0"/>
+          <a:effectRef idx="0"/>
+          <a:fontRef idx="minor"/>
+        </p:style>
+        <p:txBody>
+          <a:bodyPr lIns="3960" tIns="3960" rIns="3960" bIns="3960" anchor="t">
+            <a:noAutofit/>
+          </a:bodyPr>
+          <a:p>
+            <a:endParaRPr lang="en-US" sz="2400" b="0" u="none" strike="noStrike">
+              <a:solidFill>
+                <a:srgbClr val="000000"/>
+              </a:solidFill>
+              <a:effectLst/>
+              <a:uFillTx/>
+              <a:latin typeface="Times New Roman"/>
+            </a:endParaRPr>
+          </a:p>
+        </p:txBody>
+      </p:sp>
+      <p:sp>
+        <p:nvSpPr>
+          <p:cNvPr id="54" name=""/>
+          <p:cNvSpPr/>
+          <p:nvPr/>
+        </p:nvSpPr>
+        <p:spPr>
+          <a:xfrm flipV="1">
+            <a:off x="2090880" y="2846160"/>
+            <a:ext cx="0" cy="31680"/>
+          </a:xfrm>
+          <a:prstGeom prst="line">
+            <a:avLst/>
+          </a:prstGeom>
+          <a:ln w="7920">
+            <a:solidFill>
+              <a:srgbClr val="333333"/>
+            </a:solidFill>
+            <a:round/>
+          </a:ln>
+        </p:spPr>
+        <p:style>
+          <a:lnRef idx="0"/>
+          <a:fillRef idx="0"/>
+          <a:effectRef idx="0"/>
+          <a:fontRef idx="minor"/>
+        </p:style>
+        <p:txBody>
+          <a:bodyPr lIns="3960" tIns="3960" rIns="3960" bIns="3960" anchor="t">
+            <a:noAutofit/>
+          </a:bodyPr>
+          <a:p>
+            <a:endParaRPr lang="en-US" sz="2400" b="0" u="none" strike="noStrike">
+              <a:solidFill>
+                <a:srgbClr val="000000"/>
+              </a:solidFill>
+              <a:effectLst/>
+              <a:uFillTx/>
+              <a:latin typeface="Times New Roman"/>
+            </a:endParaRPr>
+          </a:p>
+        </p:txBody>
+      </p:sp>
+      <p:sp>
+        <p:nvSpPr>
           <p:cNvPr id="55" name=""/>
+          <p:cNvSpPr/>
+          <p:nvPr/>
+        </p:nvSpPr>
+        <p:spPr>
+          <a:xfrm flipV="1">
+            <a:off x="3451680" y="2846160"/>
+            <a:ext cx="0" cy="31680"/>
+          </a:xfrm>
+          <a:prstGeom prst="line">
+            <a:avLst/>
+          </a:prstGeom>
+          <a:ln w="7920">
+            <a:solidFill>
+              <a:srgbClr val="333333"/>
+            </a:solidFill>
+            <a:round/>
+          </a:ln>
+        </p:spPr>
+        <p:style>
+          <a:lnRef idx="0"/>
+          <a:fillRef idx="0"/>
+          <a:effectRef idx="0"/>
+          <a:fontRef idx="minor"/>
+        </p:style>
+        <p:txBody>
+          <a:bodyPr lIns="3960" tIns="3960" rIns="3960" bIns="3960" anchor="t">
+            <a:noAutofit/>
+          </a:bodyPr>
+          <a:p>
+            <a:endParaRPr lang="en-US" sz="2400" b="0" u="none" strike="noStrike">
+              <a:solidFill>
+                <a:srgbClr val="000000"/>
+              </a:solidFill>
+              <a:effectLst/>
+              <a:uFillTx/>
+              <a:latin typeface="Times New Roman"/>
+            </a:endParaRPr>
+          </a:p>
+        </p:txBody>
+      </p:sp>
+      <p:sp>
+        <p:nvSpPr>
+          <p:cNvPr id="56" name=""/>
+          <p:cNvSpPr/>
+          <p:nvPr/>
+        </p:nvSpPr>
+        <p:spPr>
+          <a:xfrm flipV="1">
+            <a:off x="4812480" y="2846160"/>
+            <a:ext cx="0" cy="31680"/>
+          </a:xfrm>
+          <a:prstGeom prst="line">
+            <a:avLst/>
+          </a:prstGeom>
+          <a:ln w="7920">
+            <a:solidFill>
+              <a:srgbClr val="333333"/>
+            </a:solidFill>
+            <a:round/>
+          </a:ln>
+        </p:spPr>
+        <p:style>
+          <a:lnRef idx="0"/>
+          <a:fillRef idx="0"/>
+          <a:effectRef idx="0"/>
+          <a:fontRef idx="minor"/>
+        </p:style>
+        <p:txBody>
+          <a:bodyPr lIns="3960" tIns="3960" rIns="3960" bIns="3960" anchor="t">
+            <a:noAutofit/>
+          </a:bodyPr>
+          <a:p>
+            <a:endParaRPr lang="en-US" sz="2400" b="0" u="none" strike="noStrike">
+              <a:solidFill>
+                <a:srgbClr val="000000"/>
+              </a:solidFill>
+              <a:effectLst/>
+              <a:uFillTx/>
+              <a:latin typeface="Times New Roman"/>
+            </a:endParaRPr>
+          </a:p>
+        </p:txBody>
+      </p:sp>
+      <p:sp>
+        <p:nvSpPr>
+          <p:cNvPr id="57" name=""/>
+          <p:cNvSpPr txBox="1"/>
+          <p:nvPr/>
+        </p:nvSpPr>
+        <p:spPr>
+          <a:xfrm>
+            <a:off x="342000" y="615240"/>
+            <a:ext cx="142560" cy="102600"/>
+          </a:xfrm>
+          <a:prstGeom prst="rect">
+            <a:avLst/>
+          </a:prstGeom>
+          <a:noFill/>
+          <a:ln w="0">
+            <a:noFill/>
+          </a:ln>
+        </p:spPr>
+        <p:txBody>
+          <a:bodyPr wrap="none" lIns="0" tIns="0" rIns="0" bIns="0" anchor="t">
+            <a:spAutoFit/>
+          </a:bodyPr>
+          <a:p>
+            <a:pPr/>
+            <a:r>
+              <a:rPr lang="en-US" sz="800" b="0" u="none" strike="noStrike">
+                <a:solidFill>
+                  <a:srgbClr val="262626"/>
+                </a:solidFill>
+                <a:effectLst/>
+                <a:uFillTx/>
+                <a:latin typeface="Arial"/>
+                <a:ea typeface="Arial"/>
+              </a:rPr>
+              <a:t>1.6</a:t>
+            </a:r>
+            <a:endParaRPr lang="en-US" sz="800" b="0" u="none" strike="noStrike">
+              <a:solidFill>
+                <a:srgbClr val="000000"/>
+              </a:solidFill>
+              <a:effectLst/>
+              <a:uFillTx/>
+              <a:latin typeface="Times New Roman"/>
+            </a:endParaRPr>
+          </a:p>
+        </p:txBody>
+      </p:sp>
+      <p:sp>
+        <p:nvSpPr>
+          <p:cNvPr id="58" name=""/>
           <p:cNvSpPr txBox="1"/>
           <p:nvPr/>
         </p:nvSpPr>
@@ -2996,7 +3130,7 @@
       </p:sp>
       <p:sp>
         <p:nvSpPr>
-          <p:cNvPr id="56" name=""/>
+          <p:cNvPr id="59" name=""/>
           <p:cNvSpPr txBox="1"/>
           <p:nvPr/>
         </p:nvSpPr>
@@ -3044,7 +3178,7 @@
       </p:sp>
       <p:sp>
         <p:nvSpPr>
-          <p:cNvPr id="57" name=""/>
+          <p:cNvPr id="60" name=""/>
           <p:cNvSpPr txBox="1"/>
           <p:nvPr/>
         </p:nvSpPr>
@@ -3092,7 +3226,7 @@
       </p:sp>
       <p:sp>
         <p:nvSpPr>
-          <p:cNvPr id="58" name=""/>
+          <p:cNvPr id="61" name=""/>
           <p:cNvSpPr txBox="1"/>
           <p:nvPr/>
         </p:nvSpPr>
@@ -3140,7 +3274,7 @@
       </p:sp>
       <p:sp>
         <p:nvSpPr>
-          <p:cNvPr id="59" name=""/>
+          <p:cNvPr id="62" name=""/>
           <p:cNvSpPr txBox="1"/>
           <p:nvPr/>
         </p:nvSpPr>
@@ -3188,7 +3322,7 @@
       </p:sp>
       <p:sp>
         <p:nvSpPr>
-          <p:cNvPr id="60" name=""/>
+          <p:cNvPr id="63" name=""/>
           <p:cNvSpPr/>
           <p:nvPr/>
         </p:nvSpPr>
@@ -3248,7 +3382,7 @@
       </p:sp>
       <p:sp>
         <p:nvSpPr>
-          <p:cNvPr id="61" name=""/>
+          <p:cNvPr id="64" name=""/>
           <p:cNvSpPr txBox="1"/>
           <p:nvPr/>
         </p:nvSpPr>
@@ -3296,7 +3430,7 @@
       </p:sp>
       <p:sp>
         <p:nvSpPr>
-          <p:cNvPr id="62" name=""/>
+          <p:cNvPr id="65" name=""/>
           <p:cNvSpPr/>
           <p:nvPr/>
         </p:nvSpPr>
@@ -3356,7 +3490,7 @@
       </p:sp>
       <p:sp>
         <p:nvSpPr>
-          <p:cNvPr id="63" name=""/>
+          <p:cNvPr id="66" name=""/>
           <p:cNvSpPr/>
           <p:nvPr/>
         </p:nvSpPr>
@@ -3399,7 +3533,7 @@
       </p:sp>
       <p:sp>
         <p:nvSpPr>
-          <p:cNvPr id="64" name=""/>
+          <p:cNvPr id="67" name=""/>
           <p:cNvSpPr/>
           <p:nvPr/>
         </p:nvSpPr>
@@ -3457,7 +3591,7 @@
       </p:sp>
       <p:sp>
         <p:nvSpPr>
-          <p:cNvPr id="65" name=""/>
+          <p:cNvPr id="68" name=""/>
           <p:cNvSpPr/>
           <p:nvPr/>
         </p:nvSpPr>
@@ -3514,7 +3648,7 @@
       </p:sp>
       <p:sp>
         <p:nvSpPr>
-          <p:cNvPr id="66" name=""/>
+          <p:cNvPr id="69" name=""/>
           <p:cNvSpPr/>
           <p:nvPr/>
         </p:nvSpPr>
@@ -3574,7 +3708,7 @@
       </p:sp>
       <p:sp>
         <p:nvSpPr>
-          <p:cNvPr id="67" name=""/>
+          <p:cNvPr id="70" name=""/>
           <p:cNvSpPr/>
           <p:nvPr/>
         </p:nvSpPr>
@@ -3617,7 +3751,7 @@
       </p:sp>
       <p:sp>
         <p:nvSpPr>
-          <p:cNvPr id="68" name=""/>
+          <p:cNvPr id="71" name=""/>
           <p:cNvSpPr/>
           <p:nvPr/>
         </p:nvSpPr>
@@ -3675,7 +3809,7 @@
       </p:sp>
       <p:sp>
         <p:nvSpPr>
-          <p:cNvPr id="69" name=""/>
+          <p:cNvPr id="72" name=""/>
           <p:cNvSpPr/>
           <p:nvPr/>
         </p:nvSpPr>
@@ -3732,7 +3866,7 @@
       </p:sp>
       <p:sp>
         <p:nvSpPr>
-          <p:cNvPr id="70" name=""/>
+          <p:cNvPr id="73" name=""/>
           <p:cNvSpPr/>
           <p:nvPr/>
         </p:nvSpPr>
@@ -3792,7 +3926,7 @@
       </p:sp>
       <p:sp>
         <p:nvSpPr>
-          <p:cNvPr id="71" name=""/>
+          <p:cNvPr id="74" name=""/>
           <p:cNvSpPr/>
           <p:nvPr/>
         </p:nvSpPr>
@@ -3835,7 +3969,7 @@
       </p:sp>
       <p:sp>
         <p:nvSpPr>
-          <p:cNvPr id="72" name=""/>
+          <p:cNvPr id="75" name=""/>
           <p:cNvSpPr/>
           <p:nvPr/>
         </p:nvSpPr>
@@ -3893,7 +4027,7 @@
       </p:sp>
       <p:sp>
         <p:nvSpPr>
-          <p:cNvPr id="73" name=""/>
+          <p:cNvPr id="76" name=""/>
           <p:cNvSpPr/>
           <p:nvPr/>
         </p:nvSpPr>
@@ -3950,7 +4084,7 @@
       </p:sp>
       <p:sp>
         <p:nvSpPr>
-          <p:cNvPr id="74" name=""/>
+          <p:cNvPr id="77" name=""/>
           <p:cNvSpPr txBox="1"/>
           <p:nvPr/>
         </p:nvSpPr>
@@ -3998,7 +4132,7 @@
       </p:sp>
       <p:sp>
         <p:nvSpPr>
-          <p:cNvPr id="75" name=""/>
+          <p:cNvPr id="78" name=""/>
           <p:cNvSpPr txBox="1"/>
           <p:nvPr/>
         </p:nvSpPr>
@@ -4046,7 +4180,7 @@
       </p:sp>
       <p:sp>
         <p:nvSpPr>
-          <p:cNvPr id="76" name=""/>
+          <p:cNvPr id="79" name=""/>
           <p:cNvSpPr txBox="1"/>
           <p:nvPr/>
         </p:nvSpPr>
@@ -4094,7 +4228,7 @@
       </p:sp>
       <p:sp>
         <p:nvSpPr>
-          <p:cNvPr id="77" name=""/>
+          <p:cNvPr id="80" name=""/>
           <p:cNvSpPr txBox="1"/>
           <p:nvPr/>
         </p:nvSpPr>
@@ -4142,7 +4276,7 @@
       </p:sp>
       <p:sp>
         <p:nvSpPr>
-          <p:cNvPr id="78" name=""/>
+          <p:cNvPr id="81" name=""/>
           <p:cNvSpPr txBox="1"/>
           <p:nvPr/>
         </p:nvSpPr>
@@ -4190,7 +4324,7 @@
       </p:sp>
       <p:sp>
         <p:nvSpPr>
-          <p:cNvPr id="79" name=""/>
+          <p:cNvPr id="82" name=""/>
           <p:cNvSpPr txBox="1"/>
           <p:nvPr/>
         </p:nvSpPr>
@@ -4238,7 +4372,7 @@
       </p:sp>
       <p:sp>
         <p:nvSpPr>
-          <p:cNvPr id="80" name=""/>
+          <p:cNvPr id="83" name=""/>
           <p:cNvSpPr/>
           <p:nvPr/>
         </p:nvSpPr>
@@ -4298,7 +4432,7 @@
       </p:sp>
       <p:sp>
         <p:nvSpPr>
-          <p:cNvPr id="81" name=""/>
+          <p:cNvPr id="84" name=""/>
           <p:cNvSpPr/>
           <p:nvPr/>
         </p:nvSpPr>
@@ -4341,13 +4475,13 @@
       </p:sp>
       <p:sp>
         <p:nvSpPr>
-          <p:cNvPr id="82" name=""/>
-          <p:cNvSpPr/>
-          <p:nvPr/>
-        </p:nvSpPr>
-        <p:spPr>
-          <a:xfrm>
-            <a:off x="5574600" y="2072520"/>
+          <p:cNvPr id="85" name=""/>
+          <p:cNvSpPr/>
+          <p:nvPr/>
+        </p:nvSpPr>
+        <p:spPr>
+          <a:xfrm>
+            <a:off x="5574600" y="2106000"/>
             <a:ext cx="4490640" cy="0"/>
           </a:xfrm>
           <a:prstGeom prst="line">
@@ -4384,13 +4518,13 @@
       </p:sp>
       <p:sp>
         <p:nvSpPr>
-          <p:cNvPr id="83" name=""/>
-          <p:cNvSpPr/>
-          <p:nvPr/>
-        </p:nvSpPr>
-        <p:spPr>
-          <a:xfrm>
-            <a:off x="5574600" y="1397880"/>
+          <p:cNvPr id="86" name=""/>
+          <p:cNvSpPr/>
+          <p:nvPr/>
+        </p:nvSpPr>
+        <p:spPr>
+          <a:xfrm>
+            <a:off x="5574600" y="1465200"/>
             <a:ext cx="4490640" cy="0"/>
           </a:xfrm>
           <a:prstGeom prst="line">
@@ -4427,13 +4561,13 @@
       </p:sp>
       <p:sp>
         <p:nvSpPr>
-          <p:cNvPr id="84" name=""/>
-          <p:cNvSpPr/>
-          <p:nvPr/>
-        </p:nvSpPr>
-        <p:spPr>
-          <a:xfrm>
-            <a:off x="5574600" y="723240"/>
+          <p:cNvPr id="87" name=""/>
+          <p:cNvSpPr/>
+          <p:nvPr/>
+        </p:nvSpPr>
+        <p:spPr>
+          <a:xfrm>
+            <a:off x="5574600" y="824400"/>
             <a:ext cx="4490640" cy="0"/>
           </a:xfrm>
           <a:prstGeom prst="line">
@@ -4470,7 +4604,7 @@
       </p:sp>
       <p:sp>
         <p:nvSpPr>
-          <p:cNvPr id="85" name=""/>
+          <p:cNvPr id="88" name=""/>
           <p:cNvSpPr/>
           <p:nvPr/>
         </p:nvSpPr>
@@ -4516,14 +4650,14 @@
       </p:sp>
       <p:sp>
         <p:nvSpPr>
-          <p:cNvPr id="86" name=""/>
+          <p:cNvPr id="89" name=""/>
           <p:cNvSpPr/>
           <p:nvPr/>
         </p:nvSpPr>
         <p:spPr>
           <a:xfrm>
             <a:off x="5778360" y="763920"/>
-            <a:ext cx="4083120" cy="1195920"/>
+            <a:ext cx="4083120" cy="1161720"/>
           </a:xfrm>
           <a:custGeom>
             <a:avLst/>
@@ -4531,33 +4665,33 @@
             <a:ahLst/>
             <a:rect l="0" t="0" r="r" b="b"/>
             <a:pathLst>
-              <a:path w="11342" h="3322">
+              <a:path w="11342" h="3227">
                 <a:moveTo>
-                  <a:pt x="0" y="159"/>
+                  <a:pt x="0" y="173"/>
                 </a:moveTo>
                 <a:lnTo>
                   <a:pt x="3782" y="0"/>
                 </a:lnTo>
                 <a:lnTo>
-                  <a:pt x="7562" y="51"/>
-                </a:lnTo>
-                <a:lnTo>
-                  <a:pt x="11342" y="104"/>
-                </a:lnTo>
-                <a:lnTo>
-                  <a:pt x="11342" y="3235"/>
-                </a:lnTo>
-                <a:lnTo>
-                  <a:pt x="7562" y="3211"/>
-                </a:lnTo>
-                <a:lnTo>
-                  <a:pt x="3782" y="3203"/>
-                </a:lnTo>
-                <a:lnTo>
-                  <a:pt x="0" y="3322"/>
-                </a:lnTo>
-                <a:lnTo>
-                  <a:pt x="0" y="159"/>
+                  <a:pt x="7562" y="69"/>
+                </a:lnTo>
+                <a:lnTo>
+                  <a:pt x="11342" y="141"/>
+                </a:lnTo>
+                <a:lnTo>
+                  <a:pt x="11342" y="3162"/>
+                </a:lnTo>
+                <a:lnTo>
+                  <a:pt x="7562" y="3123"/>
+                </a:lnTo>
+                <a:lnTo>
+                  <a:pt x="3782" y="3096"/>
+                </a:lnTo>
+                <a:lnTo>
+                  <a:pt x="0" y="3227"/>
+                </a:lnTo>
+                <a:lnTo>
+                  <a:pt x="0" y="173"/>
                 </a:lnTo>
                 <a:close/>
               </a:path>
@@ -4590,14 +4724,14 @@
       </p:sp>
       <p:sp>
         <p:nvSpPr>
-          <p:cNvPr id="87" name=""/>
-          <p:cNvSpPr/>
-          <p:nvPr/>
-        </p:nvSpPr>
-        <p:spPr>
-          <a:xfrm>
-            <a:off x="5778360" y="946800"/>
-            <a:ext cx="4083120" cy="1156680"/>
+          <p:cNvPr id="90" name=""/>
+          <p:cNvSpPr/>
+          <p:nvPr/>
+        </p:nvSpPr>
+        <p:spPr>
+          <a:xfrm>
+            <a:off x="5778360" y="898920"/>
+            <a:ext cx="4083120" cy="1144080"/>
           </a:xfrm>
           <a:custGeom>
             <a:avLst/>
@@ -4605,33 +4739,33 @@
             <a:ahLst/>
             <a:rect l="0" t="0" r="r" b="b"/>
             <a:pathLst>
-              <a:path w="11342" h="3213">
+              <a:path w="11342" h="3178">
                 <a:moveTo>
-                  <a:pt x="0" y="131"/>
+                  <a:pt x="0" y="191"/>
                 </a:moveTo>
                 <a:lnTo>
                   <a:pt x="3782" y="0"/>
                 </a:lnTo>
                 <a:lnTo>
-                  <a:pt x="7562" y="145"/>
-                </a:lnTo>
-                <a:lnTo>
-                  <a:pt x="11342" y="196"/>
-                </a:lnTo>
-                <a:lnTo>
-                  <a:pt x="11342" y="3213"/>
-                </a:lnTo>
-                <a:lnTo>
-                  <a:pt x="7562" y="3191"/>
-                </a:lnTo>
-                <a:lnTo>
-                  <a:pt x="3782" y="3125"/>
-                </a:lnTo>
-                <a:lnTo>
-                  <a:pt x="0" y="3205"/>
-                </a:lnTo>
-                <a:lnTo>
-                  <a:pt x="0" y="131"/>
+                  <a:pt x="7562" y="184"/>
+                </a:lnTo>
+                <a:lnTo>
+                  <a:pt x="11342" y="252"/>
+                </a:lnTo>
+                <a:lnTo>
+                  <a:pt x="11342" y="3178"/>
+                </a:lnTo>
+                <a:lnTo>
+                  <a:pt x="7562" y="3144"/>
+                </a:lnTo>
+                <a:lnTo>
+                  <a:pt x="3782" y="3046"/>
+                </a:lnTo>
+                <a:lnTo>
+                  <a:pt x="0" y="3177"/>
+                </a:lnTo>
+                <a:lnTo>
+                  <a:pt x="0" y="191"/>
                 </a:lnTo>
                 <a:close/>
               </a:path>
@@ -4664,14 +4798,14 @@
       </p:sp>
       <p:sp>
         <p:nvSpPr>
-          <p:cNvPr id="88" name=""/>
-          <p:cNvSpPr/>
-          <p:nvPr/>
-        </p:nvSpPr>
-        <p:spPr>
-          <a:xfrm>
-            <a:off x="5778360" y="888480"/>
-            <a:ext cx="4083120" cy="1187640"/>
+          <p:cNvPr id="91" name=""/>
+          <p:cNvSpPr/>
+          <p:nvPr/>
+        </p:nvSpPr>
+        <p:spPr>
+          <a:xfrm>
+            <a:off x="5778360" y="837720"/>
+            <a:ext cx="4083120" cy="1177920"/>
           </a:xfrm>
           <a:custGeom>
             <a:avLst/>
@@ -4679,33 +4813,33 @@
             <a:ahLst/>
             <a:rect l="0" t="0" r="r" b="b"/>
             <a:pathLst>
-              <a:path w="11342" h="3299">
+              <a:path w="11342" h="3272">
                 <a:moveTo>
-                  <a:pt x="0" y="205"/>
+                  <a:pt x="0" y="264"/>
                 </a:moveTo>
                 <a:lnTo>
                   <a:pt x="3782" y="0"/>
                 </a:lnTo>
                 <a:lnTo>
-                  <a:pt x="7562" y="86"/>
-                </a:lnTo>
-                <a:lnTo>
-                  <a:pt x="11342" y="54"/>
-                </a:lnTo>
-                <a:lnTo>
-                  <a:pt x="11342" y="3145"/>
-                </a:lnTo>
-                <a:lnTo>
-                  <a:pt x="7562" y="3190"/>
-                </a:lnTo>
-                <a:lnTo>
-                  <a:pt x="3782" y="3163"/>
-                </a:lnTo>
-                <a:lnTo>
-                  <a:pt x="0" y="3299"/>
-                </a:lnTo>
-                <a:lnTo>
-                  <a:pt x="0" y="205"/>
+                  <a:pt x="7562" y="132"/>
+                </a:lnTo>
+                <a:lnTo>
+                  <a:pt x="11342" y="132"/>
+                </a:lnTo>
+                <a:lnTo>
+                  <a:pt x="11342" y="3132"/>
+                </a:lnTo>
+                <a:lnTo>
+                  <a:pt x="7562" y="3153"/>
+                </a:lnTo>
+                <a:lnTo>
+                  <a:pt x="3782" y="3086"/>
+                </a:lnTo>
+                <a:lnTo>
+                  <a:pt x="0" y="3272"/>
+                </a:lnTo>
+                <a:lnTo>
+                  <a:pt x="0" y="264"/>
                 </a:lnTo>
                 <a:close/>
               </a:path>
@@ -4738,14 +4872,14 @@
       </p:sp>
       <p:sp>
         <p:nvSpPr>
-          <p:cNvPr id="89" name=""/>
-          <p:cNvSpPr/>
-          <p:nvPr/>
-        </p:nvSpPr>
-        <p:spPr>
-          <a:xfrm>
-            <a:off x="5778360" y="1375200"/>
-            <a:ext cx="4083120" cy="49680"/>
+          <p:cNvPr id="92" name=""/>
+          <p:cNvSpPr/>
+          <p:nvPr/>
+        </p:nvSpPr>
+        <p:spPr>
+          <a:xfrm>
+            <a:off x="5778360" y="1354680"/>
+            <a:ext cx="4083120" cy="54720"/>
           </a:xfrm>
           <a:custGeom>
             <a:avLst/>
@@ -4753,18 +4887,18 @@
             <a:ahLst/>
             <a:rect l="0" t="0" r="r" b="b"/>
             <a:pathLst>
-              <a:path fill="none" w="11342" h="138">
+              <a:path fill="none" w="11342" h="152">
                 <a:moveTo>
-                  <a:pt x="0" y="138"/>
+                  <a:pt x="0" y="152"/>
                 </a:moveTo>
                 <a:lnTo>
                   <a:pt x="3782" y="0"/>
                 </a:lnTo>
                 <a:lnTo>
-                  <a:pt x="7562" y="27"/>
-                </a:lnTo>
-                <a:lnTo>
-                  <a:pt x="11342" y="64"/>
+                  <a:pt x="7562" y="46"/>
+                </a:lnTo>
+                <a:lnTo>
+                  <a:pt x="11342" y="101"/>
                 </a:lnTo>
               </a:path>
             </a:pathLst>
@@ -4794,14 +4928,14 @@
       </p:sp>
       <p:sp>
         <p:nvSpPr>
-          <p:cNvPr id="90" name=""/>
-          <p:cNvSpPr/>
-          <p:nvPr/>
-        </p:nvSpPr>
-        <p:spPr>
-          <a:xfrm>
-            <a:off x="5778360" y="1543680"/>
-            <a:ext cx="4083120" cy="49320"/>
+          <p:cNvPr id="93" name=""/>
+          <p:cNvSpPr/>
+          <p:nvPr/>
+        </p:nvSpPr>
+        <p:spPr>
+          <a:xfrm>
+            <a:off x="5778360" y="1480320"/>
+            <a:ext cx="4083120" cy="67320"/>
           </a:xfrm>
           <a:custGeom>
             <a:avLst/>
@@ -4809,18 +4943,18 @@
             <a:ahLst/>
             <a:rect l="0" t="0" r="r" b="b"/>
             <a:pathLst>
-              <a:path fill="none" w="11342" h="137">
+              <a:path fill="none" w="11342" h="187">
                 <a:moveTo>
-                  <a:pt x="0" y="103"/>
+                  <a:pt x="0" y="160"/>
                 </a:moveTo>
                 <a:lnTo>
                   <a:pt x="3782" y="0"/>
                 </a:lnTo>
                 <a:lnTo>
-                  <a:pt x="7562" y="101"/>
-                </a:lnTo>
-                <a:lnTo>
-                  <a:pt x="11342" y="137"/>
+                  <a:pt x="7562" y="138"/>
+                </a:lnTo>
+                <a:lnTo>
+                  <a:pt x="11342" y="187"/>
                 </a:lnTo>
               </a:path>
             </a:pathLst>
@@ -4850,14 +4984,14 @@
       </p:sp>
       <p:sp>
         <p:nvSpPr>
-          <p:cNvPr id="91" name=""/>
-          <p:cNvSpPr/>
-          <p:nvPr/>
-        </p:nvSpPr>
-        <p:spPr>
-          <a:xfrm>
-            <a:off x="5778360" y="1492560"/>
-            <a:ext cx="4083120" cy="60840"/>
+          <p:cNvPr id="94" name=""/>
+          <p:cNvSpPr/>
+          <p:nvPr/>
+        </p:nvSpPr>
+        <p:spPr>
+          <a:xfrm>
+            <a:off x="5778360" y="1427040"/>
+            <a:ext cx="4083120" cy="80280"/>
           </a:xfrm>
           <a:custGeom>
             <a:avLst/>
@@ -4865,18 +4999,18 @@
             <a:ahLst/>
             <a:rect l="0" t="0" r="r" b="b"/>
             <a:pathLst>
-              <a:path fill="none" w="11342" h="169">
+              <a:path fill="none" w="11342" h="223">
                 <a:moveTo>
-                  <a:pt x="0" y="169"/>
+                  <a:pt x="0" y="223"/>
                 </a:moveTo>
                 <a:lnTo>
                   <a:pt x="3782" y="0"/>
                 </a:lnTo>
                 <a:lnTo>
-                  <a:pt x="7562" y="53"/>
-                </a:lnTo>
-                <a:lnTo>
-                  <a:pt x="11342" y="14"/>
+                  <a:pt x="7562" y="96"/>
+                </a:lnTo>
+                <a:lnTo>
+                  <a:pt x="11342" y="84"/>
                 </a:lnTo>
               </a:path>
             </a:pathLst>
@@ -4906,13 +5040,13 @@
       </p:sp>
       <p:sp>
         <p:nvSpPr>
-          <p:cNvPr id="92" name=""/>
-          <p:cNvSpPr/>
-          <p:nvPr/>
-        </p:nvSpPr>
-        <p:spPr>
-          <a:xfrm>
-            <a:off x="5755320" y="1530000"/>
+          <p:cNvPr id="95" name=""/>
+          <p:cNvSpPr/>
+          <p:nvPr/>
+        </p:nvSpPr>
+        <p:spPr>
+          <a:xfrm>
+            <a:off x="5755320" y="1483920"/>
             <a:ext cx="46800" cy="46440"/>
           </a:xfrm>
           <a:custGeom>
@@ -4964,13 +5098,13 @@
       </p:sp>
       <p:sp>
         <p:nvSpPr>
-          <p:cNvPr id="93" name=""/>
-          <p:cNvSpPr/>
-          <p:nvPr/>
-        </p:nvSpPr>
-        <p:spPr>
-          <a:xfrm>
-            <a:off x="5755320" y="1530000"/>
+          <p:cNvPr id="96" name=""/>
+          <p:cNvSpPr/>
+          <p:nvPr/>
+        </p:nvSpPr>
+        <p:spPr>
+          <a:xfrm>
+            <a:off x="5755320" y="1483920"/>
             <a:ext cx="46800" cy="46440"/>
           </a:xfrm>
           <a:custGeom>
@@ -5021,14 +5155,14 @@
       </p:sp>
       <p:sp>
         <p:nvSpPr>
-          <p:cNvPr id="94" name=""/>
-          <p:cNvSpPr/>
-          <p:nvPr/>
-        </p:nvSpPr>
-        <p:spPr>
-          <a:xfrm>
-            <a:off x="7116480" y="1469520"/>
-            <a:ext cx="46440" cy="46440"/>
+          <p:cNvPr id="97" name=""/>
+          <p:cNvSpPr/>
+          <p:nvPr/>
+        </p:nvSpPr>
+        <p:spPr>
+          <a:xfrm>
+            <a:off x="7116480" y="1403640"/>
+            <a:ext cx="46440" cy="46800"/>
           </a:xfrm>
           <a:custGeom>
             <a:avLst/>
@@ -5036,13 +5170,13 @@
             <a:ahLst/>
             <a:rect l="0" t="0" r="r" b="b"/>
             <a:pathLst>
-              <a:path w="129" h="129">
+              <a:path w="129" h="130">
                 <a:moveTo>
                   <a:pt x="0" y="65"/>
                 </a:moveTo>
                 <a:cubicBezTo>
-                  <a:pt x="0" y="-21"/>
-                  <a:pt x="129" y="-21"/>
+                  <a:pt x="0" y="-22"/>
+                  <a:pt x="129" y="-22"/>
                   <a:pt x="129" y="65"/>
                 </a:cubicBezTo>
                 <a:cubicBezTo>
@@ -5079,14 +5213,14 @@
       </p:sp>
       <p:sp>
         <p:nvSpPr>
-          <p:cNvPr id="95" name=""/>
-          <p:cNvSpPr/>
-          <p:nvPr/>
-        </p:nvSpPr>
-        <p:spPr>
-          <a:xfrm>
-            <a:off x="7116480" y="1469520"/>
-            <a:ext cx="46440" cy="46440"/>
+          <p:cNvPr id="98" name=""/>
+          <p:cNvSpPr/>
+          <p:nvPr/>
+        </p:nvSpPr>
+        <p:spPr>
+          <a:xfrm>
+            <a:off x="7116480" y="1403640"/>
+            <a:ext cx="46440" cy="46800"/>
           </a:xfrm>
           <a:custGeom>
             <a:avLst/>
@@ -5094,7 +5228,7 @@
             <a:ahLst/>
             <a:rect l="0" t="0" r="r" b="b"/>
             <a:pathLst>
-              <a:path fill="none" w="129" h="129">
+              <a:path fill="none" w="129" h="130">
                 <a:moveTo>
                   <a:pt x="129" y="65"/>
                 </a:moveTo>
@@ -5104,8 +5238,8 @@
                   <a:pt x="0" y="65"/>
                 </a:cubicBezTo>
                 <a:cubicBezTo>
-                  <a:pt x="0" y="-21"/>
-                  <a:pt x="129" y="-21"/>
+                  <a:pt x="0" y="-22"/>
+                  <a:pt x="129" y="-22"/>
                   <a:pt x="129" y="65"/>
                 </a:cubicBezTo>
               </a:path>
@@ -5136,13 +5270,13 @@
       </p:sp>
       <p:sp>
         <p:nvSpPr>
-          <p:cNvPr id="96" name=""/>
-          <p:cNvSpPr/>
-          <p:nvPr/>
-        </p:nvSpPr>
-        <p:spPr>
-          <a:xfrm>
-            <a:off x="8477280" y="1488600"/>
+          <p:cNvPr id="99" name=""/>
+          <p:cNvSpPr/>
+          <p:nvPr/>
+        </p:nvSpPr>
+        <p:spPr>
+          <a:xfrm>
+            <a:off x="8477280" y="1438560"/>
             <a:ext cx="46440" cy="46440"/>
           </a:xfrm>
           <a:custGeom>
@@ -5194,13 +5328,13 @@
       </p:sp>
       <p:sp>
         <p:nvSpPr>
-          <p:cNvPr id="97" name=""/>
-          <p:cNvSpPr/>
-          <p:nvPr/>
-        </p:nvSpPr>
-        <p:spPr>
-          <a:xfrm>
-            <a:off x="8477280" y="1488600"/>
+          <p:cNvPr id="100" name=""/>
+          <p:cNvSpPr/>
+          <p:nvPr/>
+        </p:nvSpPr>
+        <p:spPr>
+          <a:xfrm>
+            <a:off x="8477280" y="1438560"/>
             <a:ext cx="46440" cy="46440"/>
           </a:xfrm>
           <a:custGeom>
@@ -5251,13 +5385,13 @@
       </p:sp>
       <p:sp>
         <p:nvSpPr>
-          <p:cNvPr id="98" name=""/>
-          <p:cNvSpPr/>
-          <p:nvPr/>
-        </p:nvSpPr>
-        <p:spPr>
-          <a:xfrm>
-            <a:off x="9838080" y="1474560"/>
+          <p:cNvPr id="101" name=""/>
+          <p:cNvSpPr/>
+          <p:nvPr/>
+        </p:nvSpPr>
+        <p:spPr>
+          <a:xfrm>
+            <a:off x="9838080" y="1434240"/>
             <a:ext cx="46440" cy="46440"/>
           </a:xfrm>
           <a:custGeom>
@@ -5271,13 +5405,13 @@
                   <a:pt x="0" y="65"/>
                 </a:moveTo>
                 <a:cubicBezTo>
-                  <a:pt x="0" y="-22"/>
-                  <a:pt x="129" y="-22"/>
+                  <a:pt x="0" y="-21"/>
+                  <a:pt x="129" y="-21"/>
                   <a:pt x="129" y="65"/>
                 </a:cubicBezTo>
                 <a:cubicBezTo>
-                  <a:pt x="129" y="150"/>
-                  <a:pt x="0" y="150"/>
+                  <a:pt x="129" y="151"/>
+                  <a:pt x="0" y="151"/>
                   <a:pt x="0" y="65"/>
                 </a:cubicBezTo>
                 <a:close/>
@@ -5309,13 +5443,13 @@
       </p:sp>
       <p:sp>
         <p:nvSpPr>
-          <p:cNvPr id="99" name=""/>
-          <p:cNvSpPr/>
-          <p:nvPr/>
-        </p:nvSpPr>
-        <p:spPr>
-          <a:xfrm>
-            <a:off x="9838080" y="1474560"/>
+          <p:cNvPr id="102" name=""/>
+          <p:cNvSpPr/>
+          <p:nvPr/>
+        </p:nvSpPr>
+        <p:spPr>
+          <a:xfrm>
+            <a:off x="9838080" y="1434240"/>
             <a:ext cx="46440" cy="46440"/>
           </a:xfrm>
           <a:custGeom>
@@ -5329,13 +5463,13 @@
                   <a:pt x="129" y="65"/>
                 </a:moveTo>
                 <a:cubicBezTo>
-                  <a:pt x="129" y="150"/>
-                  <a:pt x="0" y="150"/>
+                  <a:pt x="129" y="151"/>
+                  <a:pt x="0" y="151"/>
                   <a:pt x="0" y="65"/>
                 </a:cubicBezTo>
                 <a:cubicBezTo>
-                  <a:pt x="0" y="-22"/>
-                  <a:pt x="129" y="-22"/>
+                  <a:pt x="0" y="-21"/>
+                  <a:pt x="129" y="-21"/>
                   <a:pt x="129" y="65"/>
                 </a:cubicBezTo>
               </a:path>
@@ -5366,13 +5500,13 @@
       </p:sp>
       <p:sp>
         <p:nvSpPr>
-          <p:cNvPr id="100" name=""/>
-          <p:cNvSpPr/>
-          <p:nvPr/>
-        </p:nvSpPr>
-        <p:spPr>
-          <a:xfrm>
-            <a:off x="5755320" y="1557720"/>
+          <p:cNvPr id="103" name=""/>
+          <p:cNvSpPr/>
+          <p:nvPr/>
+        </p:nvSpPr>
+        <p:spPr>
+          <a:xfrm>
+            <a:off x="5755320" y="1514520"/>
             <a:ext cx="46800" cy="46080"/>
           </a:xfrm>
           <a:custGeom>
@@ -5424,13 +5558,13 @@
       </p:sp>
       <p:sp>
         <p:nvSpPr>
-          <p:cNvPr id="101" name=""/>
-          <p:cNvSpPr/>
-          <p:nvPr/>
-        </p:nvSpPr>
-        <p:spPr>
-          <a:xfrm>
-            <a:off x="5755320" y="1557720"/>
+          <p:cNvPr id="104" name=""/>
+          <p:cNvSpPr/>
+          <p:nvPr/>
+        </p:nvSpPr>
+        <p:spPr>
+          <a:xfrm>
+            <a:off x="5755320" y="1514520"/>
             <a:ext cx="46800" cy="46080"/>
           </a:xfrm>
           <a:custGeom>
@@ -5481,14 +5615,14 @@
       </p:sp>
       <p:sp>
         <p:nvSpPr>
-          <p:cNvPr id="102" name=""/>
-          <p:cNvSpPr/>
-          <p:nvPr/>
-        </p:nvSpPr>
-        <p:spPr>
-          <a:xfrm>
-            <a:off x="7116480" y="1520640"/>
-            <a:ext cx="46440" cy="46440"/>
+          <p:cNvPr id="105" name=""/>
+          <p:cNvSpPr/>
+          <p:nvPr/>
+        </p:nvSpPr>
+        <p:spPr>
+          <a:xfrm>
+            <a:off x="7116480" y="1457280"/>
+            <a:ext cx="46440" cy="46800"/>
           </a:xfrm>
           <a:custGeom>
             <a:avLst/>
@@ -5496,18 +5630,18 @@
             <a:ahLst/>
             <a:rect l="0" t="0" r="r" b="b"/>
             <a:pathLst>
-              <a:path w="129" h="129">
+              <a:path w="129" h="130">
                 <a:moveTo>
                   <a:pt x="0" y="65"/>
                 </a:moveTo>
                 <a:cubicBezTo>
-                  <a:pt x="0" y="-22"/>
-                  <a:pt x="129" y="-22"/>
+                  <a:pt x="0" y="-21"/>
+                  <a:pt x="129" y="-21"/>
                   <a:pt x="129" y="65"/>
                 </a:cubicBezTo>
                 <a:cubicBezTo>
-                  <a:pt x="129" y="150"/>
-                  <a:pt x="0" y="150"/>
+                  <a:pt x="129" y="152"/>
+                  <a:pt x="0" y="152"/>
                   <a:pt x="0" y="65"/>
                 </a:cubicBezTo>
                 <a:close/>
@@ -5539,14 +5673,14 @@
       </p:sp>
       <p:sp>
         <p:nvSpPr>
-          <p:cNvPr id="103" name=""/>
-          <p:cNvSpPr/>
-          <p:nvPr/>
-        </p:nvSpPr>
-        <p:spPr>
-          <a:xfrm>
-            <a:off x="7116480" y="1520640"/>
-            <a:ext cx="46440" cy="46440"/>
+          <p:cNvPr id="106" name=""/>
+          <p:cNvSpPr/>
+          <p:nvPr/>
+        </p:nvSpPr>
+        <p:spPr>
+          <a:xfrm>
+            <a:off x="7116480" y="1457280"/>
+            <a:ext cx="46440" cy="46800"/>
           </a:xfrm>
           <a:custGeom>
             <a:avLst/>
@@ -5554,18 +5688,18 @@
             <a:ahLst/>
             <a:rect l="0" t="0" r="r" b="b"/>
             <a:pathLst>
-              <a:path fill="none" w="129" h="129">
+              <a:path fill="none" w="129" h="130">
                 <a:moveTo>
                   <a:pt x="129" y="65"/>
                 </a:moveTo>
                 <a:cubicBezTo>
-                  <a:pt x="129" y="150"/>
-                  <a:pt x="0" y="150"/>
+                  <a:pt x="129" y="152"/>
+                  <a:pt x="0" y="152"/>
                   <a:pt x="0" y="65"/>
                 </a:cubicBezTo>
                 <a:cubicBezTo>
-                  <a:pt x="0" y="-22"/>
-                  <a:pt x="129" y="-22"/>
+                  <a:pt x="0" y="-21"/>
+                  <a:pt x="129" y="-21"/>
                   <a:pt x="129" y="65"/>
                 </a:cubicBezTo>
               </a:path>
@@ -5596,14 +5730,14 @@
       </p:sp>
       <p:sp>
         <p:nvSpPr>
-          <p:cNvPr id="104" name=""/>
-          <p:cNvSpPr/>
-          <p:nvPr/>
-        </p:nvSpPr>
-        <p:spPr>
-          <a:xfrm>
-            <a:off x="8477280" y="1557000"/>
-            <a:ext cx="46440" cy="46440"/>
+          <p:cNvPr id="107" name=""/>
+          <p:cNvSpPr/>
+          <p:nvPr/>
+        </p:nvSpPr>
+        <p:spPr>
+          <a:xfrm>
+            <a:off x="8477280" y="1506600"/>
+            <a:ext cx="46440" cy="46080"/>
           </a:xfrm>
           <a:custGeom>
             <a:avLst/>
@@ -5611,7 +5745,7 @@
             <a:ahLst/>
             <a:rect l="0" t="0" r="r" b="b"/>
             <a:pathLst>
-              <a:path w="129" h="129">
+              <a:path w="129" h="128">
                 <a:moveTo>
                   <a:pt x="0" y="64"/>
                 </a:moveTo>
@@ -5621,8 +5755,8 @@
                   <a:pt x="129" y="64"/>
                 </a:cubicBezTo>
                 <a:cubicBezTo>
-                  <a:pt x="129" y="151"/>
-                  <a:pt x="0" y="151"/>
+                  <a:pt x="129" y="150"/>
+                  <a:pt x="0" y="150"/>
                   <a:pt x="0" y="64"/>
                 </a:cubicBezTo>
                 <a:close/>
@@ -5654,14 +5788,14 @@
       </p:sp>
       <p:sp>
         <p:nvSpPr>
-          <p:cNvPr id="105" name=""/>
-          <p:cNvSpPr/>
-          <p:nvPr/>
-        </p:nvSpPr>
-        <p:spPr>
-          <a:xfrm>
-            <a:off x="8477280" y="1557000"/>
-            <a:ext cx="46440" cy="46440"/>
+          <p:cNvPr id="108" name=""/>
+          <p:cNvSpPr/>
+          <p:nvPr/>
+        </p:nvSpPr>
+        <p:spPr>
+          <a:xfrm>
+            <a:off x="8477280" y="1506600"/>
+            <a:ext cx="46440" cy="46080"/>
           </a:xfrm>
           <a:custGeom>
             <a:avLst/>
@@ -5669,13 +5803,13 @@
             <a:ahLst/>
             <a:rect l="0" t="0" r="r" b="b"/>
             <a:pathLst>
-              <a:path fill="none" w="129" h="129">
+              <a:path fill="none" w="129" h="128">
                 <a:moveTo>
                   <a:pt x="129" y="64"/>
                 </a:moveTo>
                 <a:cubicBezTo>
-                  <a:pt x="129" y="151"/>
-                  <a:pt x="0" y="151"/>
+                  <a:pt x="129" y="150"/>
+                  <a:pt x="0" y="150"/>
                   <a:pt x="0" y="64"/>
                 </a:cubicBezTo>
                 <a:cubicBezTo>
@@ -5711,14 +5845,14 @@
       </p:sp>
       <p:sp>
         <p:nvSpPr>
-          <p:cNvPr id="106" name=""/>
-          <p:cNvSpPr/>
-          <p:nvPr/>
-        </p:nvSpPr>
-        <p:spPr>
-          <a:xfrm>
-            <a:off x="9838080" y="1569600"/>
-            <a:ext cx="46440" cy="46080"/>
+          <p:cNvPr id="109" name=""/>
+          <p:cNvSpPr/>
+          <p:nvPr/>
+        </p:nvSpPr>
+        <p:spPr>
+          <a:xfrm>
+            <a:off x="9838080" y="1524240"/>
+            <a:ext cx="46440" cy="46440"/>
           </a:xfrm>
           <a:custGeom>
             <a:avLst/>
@@ -5726,7 +5860,7 @@
             <a:ahLst/>
             <a:rect l="0" t="0" r="r" b="b"/>
             <a:pathLst>
-              <a:path w="129" h="128">
+              <a:path w="129" h="129">
                 <a:moveTo>
                   <a:pt x="0" y="65"/>
                 </a:moveTo>
@@ -5736,8 +5870,8 @@
                   <a:pt x="129" y="65"/>
                 </a:cubicBezTo>
                 <a:cubicBezTo>
-                  <a:pt x="129" y="150"/>
-                  <a:pt x="0" y="150"/>
+                  <a:pt x="129" y="151"/>
+                  <a:pt x="0" y="151"/>
                   <a:pt x="0" y="65"/>
                 </a:cubicBezTo>
                 <a:close/>
@@ -5769,14 +5903,14 @@
       </p:sp>
       <p:sp>
         <p:nvSpPr>
-          <p:cNvPr id="107" name=""/>
-          <p:cNvSpPr/>
-          <p:nvPr/>
-        </p:nvSpPr>
-        <p:spPr>
-          <a:xfrm>
-            <a:off x="9838080" y="1569600"/>
-            <a:ext cx="46440" cy="46080"/>
+          <p:cNvPr id="110" name=""/>
+          <p:cNvSpPr/>
+          <p:nvPr/>
+        </p:nvSpPr>
+        <p:spPr>
+          <a:xfrm>
+            <a:off x="9838080" y="1524240"/>
+            <a:ext cx="46440" cy="46440"/>
           </a:xfrm>
           <a:custGeom>
             <a:avLst/>
@@ -5784,13 +5918,13 @@
             <a:ahLst/>
             <a:rect l="0" t="0" r="r" b="b"/>
             <a:pathLst>
-              <a:path fill="none" w="129" h="128">
+              <a:path fill="none" w="129" h="129">
                 <a:moveTo>
                   <a:pt x="129" y="65"/>
                 </a:moveTo>
                 <a:cubicBezTo>
-                  <a:pt x="129" y="150"/>
-                  <a:pt x="0" y="150"/>
+                  <a:pt x="129" y="151"/>
+                  <a:pt x="0" y="151"/>
                   <a:pt x="0" y="65"/>
                 </a:cubicBezTo>
                 <a:cubicBezTo>
@@ -5826,14 +5960,14 @@
       </p:sp>
       <p:sp>
         <p:nvSpPr>
-          <p:cNvPr id="108" name=""/>
-          <p:cNvSpPr/>
-          <p:nvPr/>
-        </p:nvSpPr>
-        <p:spPr>
-          <a:xfrm>
-            <a:off x="5755320" y="1401480"/>
-            <a:ext cx="46800" cy="46800"/>
+          <p:cNvPr id="111" name=""/>
+          <p:cNvSpPr/>
+          <p:nvPr/>
+        </p:nvSpPr>
+        <p:spPr>
+          <a:xfrm>
+            <a:off x="5755320" y="1386000"/>
+            <a:ext cx="46800" cy="46440"/>
           </a:xfrm>
           <a:custGeom>
             <a:avLst/>
@@ -5841,18 +5975,18 @@
             <a:ahLst/>
             <a:rect l="0" t="0" r="r" b="b"/>
             <a:pathLst>
-              <a:path w="130" h="130">
+              <a:path w="130" h="129">
                 <a:moveTo>
                   <a:pt x="0" y="65"/>
                 </a:moveTo>
                 <a:cubicBezTo>
-                  <a:pt x="0" y="-21"/>
-                  <a:pt x="130" y="-21"/>
+                  <a:pt x="0" y="-22"/>
+                  <a:pt x="130" y="-22"/>
                   <a:pt x="130" y="65"/>
                 </a:cubicBezTo>
                 <a:cubicBezTo>
-                  <a:pt x="130" y="152"/>
-                  <a:pt x="0" y="152"/>
+                  <a:pt x="130" y="150"/>
+                  <a:pt x="0" y="150"/>
                   <a:pt x="0" y="65"/>
                 </a:cubicBezTo>
                 <a:close/>
@@ -5884,14 +6018,14 @@
       </p:sp>
       <p:sp>
         <p:nvSpPr>
-          <p:cNvPr id="109" name=""/>
-          <p:cNvSpPr/>
-          <p:nvPr/>
-        </p:nvSpPr>
-        <p:spPr>
-          <a:xfrm>
-            <a:off x="5755320" y="1401480"/>
-            <a:ext cx="46800" cy="46800"/>
+          <p:cNvPr id="112" name=""/>
+          <p:cNvSpPr/>
+          <p:nvPr/>
+        </p:nvSpPr>
+        <p:spPr>
+          <a:xfrm>
+            <a:off x="5755320" y="1386000"/>
+            <a:ext cx="46800" cy="46440"/>
           </a:xfrm>
           <a:custGeom>
             <a:avLst/>
@@ -5899,18 +6033,18 @@
             <a:ahLst/>
             <a:rect l="0" t="0" r="r" b="b"/>
             <a:pathLst>
-              <a:path fill="none" w="130" h="130">
+              <a:path fill="none" w="130" h="129">
                 <a:moveTo>
                   <a:pt x="130" y="65"/>
                 </a:moveTo>
                 <a:cubicBezTo>
-                  <a:pt x="130" y="152"/>
-                  <a:pt x="0" y="152"/>
+                  <a:pt x="130" y="150"/>
+                  <a:pt x="0" y="150"/>
                   <a:pt x="0" y="65"/>
                 </a:cubicBezTo>
                 <a:cubicBezTo>
-                  <a:pt x="0" y="-21"/>
-                  <a:pt x="130" y="-21"/>
+                  <a:pt x="0" y="-22"/>
+                  <a:pt x="130" y="-22"/>
                   <a:pt x="130" y="65"/>
                 </a:cubicBezTo>
               </a:path>
@@ -5941,14 +6075,14 @@
       </p:sp>
       <p:sp>
         <p:nvSpPr>
-          <p:cNvPr id="110" name=""/>
-          <p:cNvSpPr/>
-          <p:nvPr/>
-        </p:nvSpPr>
-        <p:spPr>
-          <a:xfrm>
-            <a:off x="7116480" y="1352160"/>
-            <a:ext cx="46440" cy="46800"/>
+          <p:cNvPr id="113" name=""/>
+          <p:cNvSpPr/>
+          <p:nvPr/>
+        </p:nvSpPr>
+        <p:spPr>
+          <a:xfrm>
+            <a:off x="7116480" y="1331640"/>
+            <a:ext cx="46440" cy="46440"/>
           </a:xfrm>
           <a:custGeom>
             <a:avLst/>
@@ -5956,13 +6090,13 @@
             <a:ahLst/>
             <a:rect l="0" t="0" r="r" b="b"/>
             <a:pathLst>
-              <a:path w="129" h="130">
+              <a:path w="129" h="129">
                 <a:moveTo>
                   <a:pt x="0" y="65"/>
                 </a:moveTo>
                 <a:cubicBezTo>
-                  <a:pt x="0" y="-22"/>
-                  <a:pt x="129" y="-22"/>
+                  <a:pt x="0" y="-21"/>
+                  <a:pt x="129" y="-21"/>
                   <a:pt x="129" y="65"/>
                 </a:cubicBezTo>
                 <a:cubicBezTo>
@@ -5999,14 +6133,14 @@
       </p:sp>
       <p:sp>
         <p:nvSpPr>
-          <p:cNvPr id="111" name=""/>
-          <p:cNvSpPr/>
-          <p:nvPr/>
-        </p:nvSpPr>
-        <p:spPr>
-          <a:xfrm>
-            <a:off x="7116480" y="1352160"/>
-            <a:ext cx="46440" cy="46800"/>
+          <p:cNvPr id="114" name=""/>
+          <p:cNvSpPr/>
+          <p:nvPr/>
+        </p:nvSpPr>
+        <p:spPr>
+          <a:xfrm>
+            <a:off x="7116480" y="1331640"/>
+            <a:ext cx="46440" cy="46440"/>
           </a:xfrm>
           <a:custGeom>
             <a:avLst/>
@@ -6014,7 +6148,7 @@
             <a:ahLst/>
             <a:rect l="0" t="0" r="r" b="b"/>
             <a:pathLst>
-              <a:path fill="none" w="129" h="130">
+              <a:path fill="none" w="129" h="129">
                 <a:moveTo>
                   <a:pt x="129" y="65"/>
                 </a:moveTo>
@@ -6024,8 +6158,8 @@
                   <a:pt x="0" y="65"/>
                 </a:cubicBezTo>
                 <a:cubicBezTo>
-                  <a:pt x="0" y="-22"/>
-                  <a:pt x="129" y="-22"/>
+                  <a:pt x="0" y="-21"/>
+                  <a:pt x="129" y="-21"/>
                   <a:pt x="129" y="65"/>
                 </a:cubicBezTo>
               </a:path>
@@ -6056,14 +6190,14 @@
       </p:sp>
       <p:sp>
         <p:nvSpPr>
-          <p:cNvPr id="112" name=""/>
-          <p:cNvSpPr/>
-          <p:nvPr/>
-        </p:nvSpPr>
-        <p:spPr>
-          <a:xfrm>
-            <a:off x="8477280" y="1361880"/>
-            <a:ext cx="46440" cy="46800"/>
+          <p:cNvPr id="115" name=""/>
+          <p:cNvSpPr/>
+          <p:nvPr/>
+        </p:nvSpPr>
+        <p:spPr>
+          <a:xfrm>
+            <a:off x="8477280" y="1348200"/>
+            <a:ext cx="46440" cy="46440"/>
           </a:xfrm>
           <a:custGeom>
             <a:avLst/>
@@ -6071,18 +6205,18 @@
             <a:ahLst/>
             <a:rect l="0" t="0" r="r" b="b"/>
             <a:pathLst>
-              <a:path w="129" h="130">
+              <a:path w="129" h="129">
                 <a:moveTo>
                   <a:pt x="0" y="65"/>
                 </a:moveTo>
                 <a:cubicBezTo>
-                  <a:pt x="0" y="-21"/>
-                  <a:pt x="129" y="-21"/>
+                  <a:pt x="0" y="-22"/>
+                  <a:pt x="129" y="-22"/>
                   <a:pt x="129" y="65"/>
                 </a:cubicBezTo>
                 <a:cubicBezTo>
-                  <a:pt x="129" y="152"/>
-                  <a:pt x="0" y="152"/>
+                  <a:pt x="129" y="150"/>
+                  <a:pt x="0" y="150"/>
                   <a:pt x="0" y="65"/>
                 </a:cubicBezTo>
                 <a:close/>
@@ -6114,14 +6248,14 @@
       </p:sp>
       <p:sp>
         <p:nvSpPr>
-          <p:cNvPr id="113" name=""/>
-          <p:cNvSpPr/>
-          <p:nvPr/>
-        </p:nvSpPr>
-        <p:spPr>
-          <a:xfrm>
-            <a:off x="8477280" y="1361880"/>
-            <a:ext cx="46440" cy="46800"/>
+          <p:cNvPr id="116" name=""/>
+          <p:cNvSpPr/>
+          <p:nvPr/>
+        </p:nvSpPr>
+        <p:spPr>
+          <a:xfrm>
+            <a:off x="8477280" y="1348200"/>
+            <a:ext cx="46440" cy="46440"/>
           </a:xfrm>
           <a:custGeom>
             <a:avLst/>
@@ -6129,18 +6263,18 @@
             <a:ahLst/>
             <a:rect l="0" t="0" r="r" b="b"/>
             <a:pathLst>
-              <a:path fill="none" w="129" h="130">
+              <a:path fill="none" w="129" h="129">
                 <a:moveTo>
                   <a:pt x="129" y="65"/>
                 </a:moveTo>
                 <a:cubicBezTo>
-                  <a:pt x="129" y="152"/>
-                  <a:pt x="0" y="152"/>
+                  <a:pt x="129" y="150"/>
+                  <a:pt x="0" y="150"/>
                   <a:pt x="0" y="65"/>
                 </a:cubicBezTo>
                 <a:cubicBezTo>
-                  <a:pt x="0" y="-21"/>
-                  <a:pt x="129" y="-21"/>
+                  <a:pt x="0" y="-22"/>
+                  <a:pt x="129" y="-22"/>
                   <a:pt x="129" y="65"/>
                 </a:cubicBezTo>
               </a:path>
@@ -6171,13 +6305,13 @@
       </p:sp>
       <p:sp>
         <p:nvSpPr>
-          <p:cNvPr id="114" name=""/>
-          <p:cNvSpPr/>
-          <p:nvPr/>
-        </p:nvSpPr>
-        <p:spPr>
-          <a:xfrm>
-            <a:off x="9838080" y="1375200"/>
+          <p:cNvPr id="117" name=""/>
+          <p:cNvSpPr/>
+          <p:nvPr/>
+        </p:nvSpPr>
+        <p:spPr>
+          <a:xfrm>
+            <a:off x="9838080" y="1367280"/>
             <a:ext cx="46440" cy="46440"/>
           </a:xfrm>
           <a:custGeom>
@@ -6229,13 +6363,13 @@
       </p:sp>
       <p:sp>
         <p:nvSpPr>
-          <p:cNvPr id="115" name=""/>
-          <p:cNvSpPr/>
-          <p:nvPr/>
-        </p:nvSpPr>
-        <p:spPr>
-          <a:xfrm>
-            <a:off x="9838080" y="1375200"/>
+          <p:cNvPr id="118" name=""/>
+          <p:cNvSpPr/>
+          <p:nvPr/>
+        </p:nvSpPr>
+        <p:spPr>
+          <a:xfrm>
+            <a:off x="9838080" y="1367280"/>
             <a:ext cx="46440" cy="46440"/>
           </a:xfrm>
           <a:custGeom>
@@ -6286,7 +6420,7 @@
       </p:sp>
       <p:sp>
         <p:nvSpPr>
-          <p:cNvPr id="116" name=""/>
+          <p:cNvPr id="119" name=""/>
           <p:cNvSpPr/>
           <p:nvPr/>
         </p:nvSpPr>
@@ -6329,7 +6463,7 @@
       </p:sp>
       <p:sp>
         <p:nvSpPr>
-          <p:cNvPr id="117" name=""/>
+          <p:cNvPr id="120" name=""/>
           <p:cNvSpPr txBox="1"/>
           <p:nvPr/>
         </p:nvSpPr>
@@ -6377,7 +6511,7 @@
       </p:sp>
       <p:sp>
         <p:nvSpPr>
-          <p:cNvPr id="118" name=""/>
+          <p:cNvPr id="121" name=""/>
           <p:cNvSpPr txBox="1"/>
           <p:nvPr/>
         </p:nvSpPr>
@@ -6425,13 +6559,13 @@
       </p:sp>
       <p:sp>
         <p:nvSpPr>
-          <p:cNvPr id="119" name=""/>
+          <p:cNvPr id="122" name=""/>
           <p:cNvSpPr txBox="1"/>
           <p:nvPr/>
         </p:nvSpPr>
         <p:spPr>
           <a:xfrm>
-            <a:off x="5390640" y="2021760"/>
+            <a:off x="5390640" y="2055240"/>
             <a:ext cx="142560" cy="102600"/>
           </a:xfrm>
           <a:prstGeom prst="rect">
@@ -6473,13 +6607,13 @@
       </p:sp>
       <p:sp>
         <p:nvSpPr>
-          <p:cNvPr id="120" name=""/>
+          <p:cNvPr id="123" name=""/>
           <p:cNvSpPr txBox="1"/>
           <p:nvPr/>
         </p:nvSpPr>
         <p:spPr>
           <a:xfrm>
-            <a:off x="5390640" y="1347120"/>
+            <a:off x="5390640" y="1414440"/>
             <a:ext cx="142560" cy="102600"/>
           </a:xfrm>
           <a:prstGeom prst="rect">
@@ -6521,7 +6655,7 @@
       </p:sp>
       <p:sp>
         <p:nvSpPr>
-          <p:cNvPr id="121" name=""/>
+          <p:cNvPr id="124" name=""/>
           <p:cNvSpPr/>
           <p:nvPr/>
         </p:nvSpPr>
@@ -6564,13 +6698,13 @@
       </p:sp>
       <p:sp>
         <p:nvSpPr>
-          <p:cNvPr id="122" name=""/>
-          <p:cNvSpPr/>
-          <p:nvPr/>
-        </p:nvSpPr>
-        <p:spPr>
-          <a:xfrm>
-            <a:off x="5542920" y="2072520"/>
+          <p:cNvPr id="125" name=""/>
+          <p:cNvSpPr/>
+          <p:nvPr/>
+        </p:nvSpPr>
+        <p:spPr>
+          <a:xfrm>
+            <a:off x="5542920" y="2106000"/>
             <a:ext cx="31680" cy="0"/>
           </a:xfrm>
           <a:prstGeom prst="line">
@@ -6607,13 +6741,13 @@
       </p:sp>
       <p:sp>
         <p:nvSpPr>
-          <p:cNvPr id="123" name=""/>
-          <p:cNvSpPr/>
-          <p:nvPr/>
-        </p:nvSpPr>
-        <p:spPr>
-          <a:xfrm>
-            <a:off x="5542920" y="1397880"/>
+          <p:cNvPr id="126" name=""/>
+          <p:cNvSpPr/>
+          <p:nvPr/>
+        </p:nvSpPr>
+        <p:spPr>
+          <a:xfrm>
+            <a:off x="5542920" y="1465200"/>
             <a:ext cx="31680" cy="0"/>
           </a:xfrm>
           <a:prstGeom prst="line">
@@ -6650,13 +6784,13 @@
       </p:sp>
       <p:sp>
         <p:nvSpPr>
-          <p:cNvPr id="124" name=""/>
-          <p:cNvSpPr/>
-          <p:nvPr/>
-        </p:nvSpPr>
-        <p:spPr>
-          <a:xfrm>
-            <a:off x="5542920" y="723240"/>
+          <p:cNvPr id="127" name=""/>
+          <p:cNvSpPr/>
+          <p:nvPr/>
+        </p:nvSpPr>
+        <p:spPr>
+          <a:xfrm>
+            <a:off x="5542920" y="824400"/>
             <a:ext cx="31680" cy="0"/>
           </a:xfrm>
           <a:prstGeom prst="line">
@@ -6693,7 +6827,7 @@
       </p:sp>
       <p:sp>
         <p:nvSpPr>
-          <p:cNvPr id="125" name=""/>
+          <p:cNvPr id="128" name=""/>
           <p:cNvSpPr/>
           <p:nvPr/>
         </p:nvSpPr>
@@ -6736,7 +6870,7 @@
       </p:sp>
       <p:sp>
         <p:nvSpPr>
-          <p:cNvPr id="126" name=""/>
+          <p:cNvPr id="129" name=""/>
           <p:cNvSpPr/>
           <p:nvPr/>
         </p:nvSpPr>
@@ -6779,7 +6913,7 @@
       </p:sp>
       <p:sp>
         <p:nvSpPr>
-          <p:cNvPr id="127" name=""/>
+          <p:cNvPr id="130" name=""/>
           <p:cNvSpPr/>
           <p:nvPr/>
         </p:nvSpPr>
@@ -6822,7 +6956,7 @@
       </p:sp>
       <p:sp>
         <p:nvSpPr>
-          <p:cNvPr id="128" name=""/>
+          <p:cNvPr id="131" name=""/>
           <p:cNvSpPr/>
           <p:nvPr/>
         </p:nvSpPr>
@@ -6865,7 +6999,7 @@
       </p:sp>
       <p:sp>
         <p:nvSpPr>
-          <p:cNvPr id="129" name=""/>
+          <p:cNvPr id="132" name=""/>
           <p:cNvSpPr/>
           <p:nvPr/>
         </p:nvSpPr>
@@ -6908,13 +7042,13 @@
       </p:sp>
       <p:sp>
         <p:nvSpPr>
-          <p:cNvPr id="130" name=""/>
+          <p:cNvPr id="133" name=""/>
           <p:cNvSpPr txBox="1"/>
           <p:nvPr/>
         </p:nvSpPr>
         <p:spPr>
           <a:xfrm>
-            <a:off x="5390640" y="672480"/>
+            <a:off x="5390640" y="773640"/>
             <a:ext cx="142560" cy="102600"/>
           </a:xfrm>
           <a:prstGeom prst="rect">
@@ -6956,7 +7090,7 @@
       </p:sp>
       <p:sp>
         <p:nvSpPr>
-          <p:cNvPr id="131" name=""/>
+          <p:cNvPr id="134" name=""/>
           <p:cNvSpPr txBox="1"/>
           <p:nvPr/>
         </p:nvSpPr>
@@ -7004,7 +7138,7 @@
       </p:sp>
       <p:sp>
         <p:nvSpPr>
-          <p:cNvPr id="132" name=""/>
+          <p:cNvPr id="135" name=""/>
           <p:cNvSpPr txBox="1"/>
           <p:nvPr/>
         </p:nvSpPr>
@@ -7052,7 +7186,7 @@
       </p:sp>
       <p:sp>
         <p:nvSpPr>
-          <p:cNvPr id="133" name=""/>
+          <p:cNvPr id="136" name=""/>
           <p:cNvSpPr txBox="1"/>
           <p:nvPr/>
         </p:nvSpPr>
@@ -7100,7 +7234,7 @@
       </p:sp>
       <p:sp>
         <p:nvSpPr>
-          <p:cNvPr id="134" name=""/>
+          <p:cNvPr id="137" name=""/>
           <p:cNvSpPr txBox="1"/>
           <p:nvPr/>
         </p:nvSpPr>
@@ -7148,7 +7282,7 @@
       </p:sp>
       <p:sp>
         <p:nvSpPr>
-          <p:cNvPr id="135" name=""/>
+          <p:cNvPr id="138" name=""/>
           <p:cNvSpPr txBox="1"/>
           <p:nvPr/>
         </p:nvSpPr>
@@ -7196,7 +7330,7 @@
       </p:sp>
       <p:sp>
         <p:nvSpPr>
-          <p:cNvPr id="136" name=""/>
+          <p:cNvPr id="139" name=""/>
           <p:cNvSpPr txBox="1"/>
           <p:nvPr/>
         </p:nvSpPr>
@@ -7244,7 +7378,7 @@
       </p:sp>
       <p:sp>
         <p:nvSpPr>
-          <p:cNvPr id="137" name=""/>
+          <p:cNvPr id="140" name=""/>
           <p:cNvSpPr txBox="1"/>
           <p:nvPr/>
         </p:nvSpPr>
@@ -7277,7 +7411,7 @@
                 <a:latin typeface="Arial"/>
                 <a:ea typeface="Arial"/>
               </a:rPr>
-              <a:t>1.34-1.41 across all twelve combinations,</a:t>
+              <a:t>1.37-1.43 across all twelve combinations,</a:t>
             </a:r>
             <a:endParaRPr lang="en-US" sz="920" b="0" u="none" strike="noStrike">
               <a:solidFill>
@@ -7292,7 +7426,7 @@
       </p:sp>
       <p:sp>
         <p:nvSpPr>
-          <p:cNvPr id="138" name=""/>
+          <p:cNvPr id="141" name=""/>
           <p:cNvSpPr txBox="1"/>
           <p:nvPr/>
         </p:nvSpPr>
@@ -7340,7 +7474,7 @@
       </p:sp>
       <p:sp>
         <p:nvSpPr>
-          <p:cNvPr id="139" name=""/>
+          <p:cNvPr id="142" name=""/>
           <p:cNvSpPr txBox="1"/>
           <p:nvPr/>
         </p:nvSpPr>
@@ -7388,7 +7522,7 @@
       </p:sp>
       <p:sp>
         <p:nvSpPr>
-          <p:cNvPr id="140" name=""/>
+          <p:cNvPr id="143" name=""/>
           <p:cNvSpPr/>
           <p:nvPr/>
         </p:nvSpPr>
@@ -7451,7 +7585,7 @@
       </p:sp>
       <p:sp>
         <p:nvSpPr>
-          <p:cNvPr id="141" name=""/>
+          <p:cNvPr id="144" name=""/>
           <p:cNvSpPr/>
           <p:nvPr/>
         </p:nvSpPr>
@@ -7514,7 +7648,7 @@
       </p:sp>
       <p:sp>
         <p:nvSpPr>
-          <p:cNvPr id="142" name=""/>
+          <p:cNvPr id="145" name=""/>
           <p:cNvSpPr/>
           <p:nvPr/>
         </p:nvSpPr>
@@ -7574,13 +7708,13 @@
       </p:sp>
       <p:sp>
         <p:nvSpPr>
-          <p:cNvPr id="143" name=""/>
-          <p:cNvSpPr/>
-          <p:nvPr/>
-        </p:nvSpPr>
-        <p:spPr>
-          <a:xfrm>
-            <a:off x="525960" y="5865120"/>
+          <p:cNvPr id="146" name=""/>
+          <p:cNvSpPr/>
+          <p:nvPr/>
+        </p:nvSpPr>
+        <p:spPr>
+          <a:xfrm>
+            <a:off x="525960" y="5795280"/>
             <a:ext cx="4503240" cy="0"/>
           </a:xfrm>
           <a:prstGeom prst="line">
@@ -7617,13 +7751,13 @@
       </p:sp>
       <p:sp>
         <p:nvSpPr>
-          <p:cNvPr id="144" name=""/>
-          <p:cNvSpPr/>
-          <p:nvPr/>
-        </p:nvSpPr>
-        <p:spPr>
-          <a:xfrm>
-            <a:off x="525960" y="5334120"/>
+          <p:cNvPr id="147" name=""/>
+          <p:cNvSpPr/>
+          <p:nvPr/>
+        </p:nvSpPr>
+        <p:spPr>
+          <a:xfrm>
+            <a:off x="525960" y="5211000"/>
             <a:ext cx="4503240" cy="0"/>
           </a:xfrm>
           <a:prstGeom prst="line">
@@ -7660,13 +7794,13 @@
       </p:sp>
       <p:sp>
         <p:nvSpPr>
-          <p:cNvPr id="145" name=""/>
-          <p:cNvSpPr/>
-          <p:nvPr/>
-        </p:nvSpPr>
-        <p:spPr>
-          <a:xfrm>
-            <a:off x="525960" y="4803120"/>
+          <p:cNvPr id="148" name=""/>
+          <p:cNvSpPr/>
+          <p:nvPr/>
+        </p:nvSpPr>
+        <p:spPr>
+          <a:xfrm>
+            <a:off x="525960" y="4626360"/>
             <a:ext cx="4503240" cy="0"/>
           </a:xfrm>
           <a:prstGeom prst="line">
@@ -7703,56 +7837,13 @@
       </p:sp>
       <p:sp>
         <p:nvSpPr>
-          <p:cNvPr id="146" name=""/>
-          <p:cNvSpPr/>
-          <p:nvPr/>
-        </p:nvSpPr>
-        <p:spPr>
-          <a:xfrm>
-            <a:off x="525960" y="4271760"/>
-            <a:ext cx="4503240" cy="0"/>
-          </a:xfrm>
-          <a:prstGeom prst="line">
-            <a:avLst/>
-          </a:prstGeom>
-          <a:ln w="6480">
-            <a:solidFill>
-              <a:srgbClr val="EBEBEB"/>
-            </a:solidFill>
-            <a:round/>
-          </a:ln>
-        </p:spPr>
-        <p:style>
-          <a:lnRef idx="0"/>
-          <a:fillRef idx="0"/>
-          <a:effectRef idx="0"/>
-          <a:fontRef idx="minor"/>
-        </p:style>
-        <p:txBody>
-          <a:bodyPr lIns="3240" tIns="-3240" rIns="3240" bIns="-3240" anchor="t">
-            <a:noAutofit/>
-          </a:bodyPr>
-          <a:p>
-            <a:endParaRPr lang="en-US" sz="2400" b="0" u="none" strike="noStrike">
-              <a:solidFill>
-                <a:srgbClr val="000000"/>
-              </a:solidFill>
-              <a:effectLst/>
-              <a:uFillTx/>
-              <a:latin typeface="Times New Roman"/>
-            </a:endParaRPr>
-          </a:p>
-        </p:txBody>
-      </p:sp>
-      <p:sp>
-        <p:nvSpPr>
-          <p:cNvPr id="147" name=""/>
-          <p:cNvSpPr/>
-          <p:nvPr/>
-        </p:nvSpPr>
-        <p:spPr>
-          <a:xfrm>
-            <a:off x="525960" y="4803120"/>
+          <p:cNvPr id="149" name=""/>
+          <p:cNvSpPr/>
+          <p:nvPr/>
+        </p:nvSpPr>
+        <p:spPr>
+          <a:xfrm>
+            <a:off x="525960" y="4626360"/>
             <a:ext cx="4503240" cy="0"/>
           </a:xfrm>
           <a:prstGeom prst="line">
@@ -7792,14 +7883,14 @@
       </p:sp>
       <p:sp>
         <p:nvSpPr>
-          <p:cNvPr id="148" name=""/>
-          <p:cNvSpPr/>
-          <p:nvPr/>
-        </p:nvSpPr>
-        <p:spPr>
-          <a:xfrm>
-            <a:off x="730440" y="4816800"/>
-            <a:ext cx="4094640" cy="1365120"/>
+          <p:cNvPr id="150" name=""/>
+          <p:cNvSpPr/>
+          <p:nvPr/>
+        </p:nvSpPr>
+        <p:spPr>
+          <a:xfrm>
+            <a:off x="730440" y="4707000"/>
+            <a:ext cx="4094640" cy="1474920"/>
           </a:xfrm>
           <a:custGeom>
             <a:avLst/>
@@ -7807,30 +7898,30 @@
             <a:ahLst/>
             <a:rect l="0" t="0" r="r" b="b"/>
             <a:pathLst>
-              <a:path w="11374" h="3792">
+              <a:path w="11374" h="4097">
                 <a:moveTo>
                   <a:pt x="0" y="0"/>
                 </a:moveTo>
                 <a:lnTo>
-                  <a:pt x="3792" y="836"/>
-                </a:lnTo>
-                <a:lnTo>
-                  <a:pt x="7583" y="726"/>
-                </a:lnTo>
-                <a:lnTo>
-                  <a:pt x="11374" y="1208"/>
-                </a:lnTo>
-                <a:lnTo>
-                  <a:pt x="11374" y="3792"/>
-                </a:lnTo>
-                <a:lnTo>
-                  <a:pt x="7583" y="3493"/>
-                </a:lnTo>
-                <a:lnTo>
-                  <a:pt x="3792" y="3470"/>
-                </a:lnTo>
-                <a:lnTo>
-                  <a:pt x="0" y="2807"/>
+                  <a:pt x="3792" y="1003"/>
+                </a:lnTo>
+                <a:lnTo>
+                  <a:pt x="7583" y="808"/>
+                </a:lnTo>
+                <a:lnTo>
+                  <a:pt x="11374" y="1298"/>
+                </a:lnTo>
+                <a:lnTo>
+                  <a:pt x="11374" y="4097"/>
+                </a:lnTo>
+                <a:lnTo>
+                  <a:pt x="7583" y="3811"/>
+                </a:lnTo>
+                <a:lnTo>
+                  <a:pt x="3792" y="3829"/>
+                </a:lnTo>
+                <a:lnTo>
+                  <a:pt x="0" y="3040"/>
                 </a:lnTo>
                 <a:lnTo>
                   <a:pt x="0" y="0"/>
@@ -7866,14 +7957,14 @@
       </p:sp>
       <p:sp>
         <p:nvSpPr>
-          <p:cNvPr id="149" name=""/>
+          <p:cNvPr id="151" name=""/>
           <p:cNvSpPr/>
           <p:nvPr/>
         </p:nvSpPr>
         <p:spPr>
           <a:xfrm>
             <a:off x="730440" y="4198680"/>
-            <a:ext cx="4094640" cy="1663920"/>
+            <a:ext cx="4094640" cy="1762560"/>
           </a:xfrm>
           <a:custGeom>
             <a:avLst/>
@@ -7881,30 +7972,30 @@
             <a:ahLst/>
             <a:rect l="0" t="0" r="r" b="b"/>
             <a:pathLst>
-              <a:path w="11374" h="4622">
+              <a:path w="11374" h="4896">
                 <a:moveTo>
                   <a:pt x="0" y="0"/>
                 </a:moveTo>
                 <a:lnTo>
-                  <a:pt x="3792" y="1115"/>
-                </a:lnTo>
-                <a:lnTo>
-                  <a:pt x="7583" y="1355"/>
-                </a:lnTo>
-                <a:lnTo>
-                  <a:pt x="11374" y="1735"/>
-                </a:lnTo>
-                <a:lnTo>
-                  <a:pt x="11374" y="4622"/>
-                </a:lnTo>
-                <a:lnTo>
-                  <a:pt x="7583" y="4257"/>
-                </a:lnTo>
-                <a:lnTo>
-                  <a:pt x="3792" y="4085"/>
-                </a:lnTo>
-                <a:lnTo>
-                  <a:pt x="0" y="3232"/>
+                  <a:pt x="3792" y="1343"/>
+                </a:lnTo>
+                <a:lnTo>
+                  <a:pt x="7583" y="1435"/>
+                </a:lnTo>
+                <a:lnTo>
+                  <a:pt x="11374" y="1847"/>
+                </a:lnTo>
+                <a:lnTo>
+                  <a:pt x="11374" y="4896"/>
+                </a:lnTo>
+                <a:lnTo>
+                  <a:pt x="7583" y="4516"/>
+                </a:lnTo>
+                <a:lnTo>
+                  <a:pt x="3792" y="4472"/>
+                </a:lnTo>
+                <a:lnTo>
+                  <a:pt x="0" y="3442"/>
                 </a:lnTo>
                 <a:lnTo>
                   <a:pt x="0" y="0"/>
@@ -7940,14 +8031,14 @@
       </p:sp>
       <p:sp>
         <p:nvSpPr>
-          <p:cNvPr id="150" name=""/>
-          <p:cNvSpPr/>
-          <p:nvPr/>
-        </p:nvSpPr>
-        <p:spPr>
-          <a:xfrm>
-            <a:off x="730440" y="4529520"/>
-            <a:ext cx="4094640" cy="1429560"/>
+          <p:cNvPr id="152" name=""/>
+          <p:cNvSpPr/>
+          <p:nvPr/>
+        </p:nvSpPr>
+        <p:spPr>
+          <a:xfrm>
+            <a:off x="730440" y="4526640"/>
+            <a:ext cx="4094640" cy="1496160"/>
           </a:xfrm>
           <a:custGeom>
             <a:avLst/>
@@ -7955,30 +8046,30 @@
             <a:ahLst/>
             <a:rect l="0" t="0" r="r" b="b"/>
             <a:pathLst>
-              <a:path w="11374" h="3971">
+              <a:path w="11374" h="4156">
                 <a:moveTo>
                   <a:pt x="0" y="0"/>
                 </a:moveTo>
                 <a:lnTo>
-                  <a:pt x="3792" y="896"/>
-                </a:lnTo>
-                <a:lnTo>
-                  <a:pt x="7583" y="764"/>
-                </a:lnTo>
-                <a:lnTo>
-                  <a:pt x="11374" y="1172"/>
-                </a:lnTo>
-                <a:lnTo>
-                  <a:pt x="11374" y="3971"/>
-                </a:lnTo>
-                <a:lnTo>
-                  <a:pt x="7583" y="3642"/>
-                </a:lnTo>
-                <a:lnTo>
-                  <a:pt x="3792" y="3710"/>
-                </a:lnTo>
-                <a:lnTo>
-                  <a:pt x="0" y="3046"/>
+                  <a:pt x="3792" y="1069"/>
+                </a:lnTo>
+                <a:lnTo>
+                  <a:pt x="7583" y="786"/>
+                </a:lnTo>
+                <a:lnTo>
+                  <a:pt x="11374" y="1173"/>
+                </a:lnTo>
+                <a:lnTo>
+                  <a:pt x="11374" y="4156"/>
+                </a:lnTo>
+                <a:lnTo>
+                  <a:pt x="7583" y="3852"/>
+                </a:lnTo>
+                <a:lnTo>
+                  <a:pt x="3792" y="4050"/>
+                </a:lnTo>
+                <a:lnTo>
+                  <a:pt x="0" y="3257"/>
                 </a:lnTo>
                 <a:lnTo>
                   <a:pt x="0" y="0"/>
@@ -8014,14 +8105,14 @@
       </p:sp>
       <p:sp>
         <p:nvSpPr>
-          <p:cNvPr id="151" name=""/>
-          <p:cNvSpPr/>
-          <p:nvPr/>
-        </p:nvSpPr>
-        <p:spPr>
-          <a:xfrm>
-            <a:off x="730440" y="5348520"/>
-            <a:ext cx="4094640" cy="393120"/>
+          <p:cNvPr id="153" name=""/>
+          <p:cNvSpPr/>
+          <p:nvPr/>
+        </p:nvSpPr>
+        <p:spPr>
+          <a:xfrm>
+            <a:off x="730440" y="5282640"/>
+            <a:ext cx="4094640" cy="421920"/>
           </a:xfrm>
           <a:custGeom>
             <a:avLst/>
@@ -8029,18 +8120,18 @@
             <a:ahLst/>
             <a:rect l="0" t="0" r="r" b="b"/>
             <a:pathLst>
-              <a:path fill="none" w="11374" h="1092">
+              <a:path fill="none" w="11374" h="1172">
                 <a:moveTo>
                   <a:pt x="0" y="0"/>
                 </a:moveTo>
                 <a:lnTo>
-                  <a:pt x="3792" y="745"/>
-                </a:lnTo>
-                <a:lnTo>
-                  <a:pt x="7583" y="709"/>
-                </a:lnTo>
-                <a:lnTo>
-                  <a:pt x="11374" y="1092"/>
+                  <a:pt x="3792" y="890"/>
+                </a:lnTo>
+                <a:lnTo>
+                  <a:pt x="7583" y="792"/>
+                </a:lnTo>
+                <a:lnTo>
+                  <a:pt x="11374" y="1172"/>
                 </a:lnTo>
               </a:path>
             </a:pathLst>
@@ -8070,14 +8161,14 @@
       </p:sp>
       <p:sp>
         <p:nvSpPr>
-          <p:cNvPr id="152" name=""/>
-          <p:cNvSpPr/>
-          <p:nvPr/>
-        </p:nvSpPr>
-        <p:spPr>
-          <a:xfrm>
-            <a:off x="730440" y="4812120"/>
-            <a:ext cx="4094640" cy="559440"/>
+          <p:cNvPr id="154" name=""/>
+          <p:cNvSpPr/>
+          <p:nvPr/>
+        </p:nvSpPr>
+        <p:spPr>
+          <a:xfrm>
+            <a:off x="730440" y="4852080"/>
+            <a:ext cx="4094640" cy="590040"/>
           </a:xfrm>
           <a:custGeom>
             <a:avLst/>
@@ -8085,18 +8176,18 @@
             <a:ahLst/>
             <a:rect l="0" t="0" r="r" b="b"/>
             <a:pathLst>
-              <a:path fill="none" w="11374" h="1554">
+              <a:path fill="none" w="11374" h="1639">
                 <a:moveTo>
                   <a:pt x="0" y="0"/>
                 </a:moveTo>
                 <a:lnTo>
-                  <a:pt x="3792" y="976"/>
-                </a:lnTo>
-                <a:lnTo>
-                  <a:pt x="7583" y="1180"/>
-                </a:lnTo>
-                <a:lnTo>
-                  <a:pt x="11374" y="1554"/>
+                  <a:pt x="3792" y="1177"/>
+                </a:lnTo>
+                <a:lnTo>
+                  <a:pt x="7583" y="1243"/>
+                </a:lnTo>
+                <a:lnTo>
+                  <a:pt x="11374" y="1639"/>
                 </a:lnTo>
               </a:path>
             </a:pathLst>
@@ -8126,14 +8217,14 @@
       </p:sp>
       <p:sp>
         <p:nvSpPr>
-          <p:cNvPr id="153" name=""/>
-          <p:cNvSpPr/>
-          <p:nvPr/>
-        </p:nvSpPr>
-        <p:spPr>
-          <a:xfrm>
-            <a:off x="730440" y="5107680"/>
-            <a:ext cx="4094640" cy="375120"/>
+          <p:cNvPr id="155" name=""/>
+          <p:cNvSpPr/>
+          <p:nvPr/>
+        </p:nvSpPr>
+        <p:spPr>
+          <a:xfrm>
+            <a:off x="730440" y="5145120"/>
+            <a:ext cx="4094640" cy="370080"/>
           </a:xfrm>
           <a:custGeom>
             <a:avLst/>
@@ -8141,18 +8232,18 @@
             <a:ahLst/>
             <a:rect l="0" t="0" r="r" b="b"/>
             <a:pathLst>
-              <a:path fill="none" w="11374" h="1042">
+              <a:path fill="none" w="11374" h="1028">
                 <a:moveTo>
                   <a:pt x="0" y="0"/>
                 </a:moveTo>
                 <a:lnTo>
-                  <a:pt x="3792" y="772"/>
-                </a:lnTo>
-                <a:lnTo>
-                  <a:pt x="7583" y="675"/>
-                </a:lnTo>
-                <a:lnTo>
-                  <a:pt x="11374" y="1042"/>
+                  <a:pt x="3792" y="922"/>
+                </a:lnTo>
+                <a:lnTo>
+                  <a:pt x="7583" y="684"/>
+                </a:lnTo>
+                <a:lnTo>
+                  <a:pt x="11374" y="1028"/>
                 </a:lnTo>
               </a:path>
             </a:pathLst>
@@ -8182,14 +8273,14 @@
       </p:sp>
       <p:sp>
         <p:nvSpPr>
-          <p:cNvPr id="154" name=""/>
-          <p:cNvSpPr/>
-          <p:nvPr/>
-        </p:nvSpPr>
-        <p:spPr>
-          <a:xfrm>
-            <a:off x="707400" y="5084640"/>
-            <a:ext cx="46800" cy="46800"/>
+          <p:cNvPr id="156" name=""/>
+          <p:cNvSpPr/>
+          <p:nvPr/>
+        </p:nvSpPr>
+        <p:spPr>
+          <a:xfrm>
+            <a:off x="707400" y="5122080"/>
+            <a:ext cx="46800" cy="46440"/>
           </a:xfrm>
           <a:custGeom>
             <a:avLst/>
@@ -8197,7 +8288,7 @@
             <a:ahLst/>
             <a:rect l="0" t="0" r="r" b="b"/>
             <a:pathLst>
-              <a:path w="130" h="130">
+              <a:path w="130" h="129">
                 <a:moveTo>
                   <a:pt x="0" y="65"/>
                 </a:moveTo>
@@ -8207,8 +8298,8 @@
                   <a:pt x="130" y="65"/>
                 </a:cubicBezTo>
                 <a:cubicBezTo>
-                  <a:pt x="130" y="151"/>
-                  <a:pt x="0" y="151"/>
+                  <a:pt x="130" y="150"/>
+                  <a:pt x="0" y="150"/>
                   <a:pt x="0" y="65"/>
                 </a:cubicBezTo>
                 <a:close/>
@@ -8240,14 +8331,14 @@
       </p:sp>
       <p:sp>
         <p:nvSpPr>
-          <p:cNvPr id="155" name=""/>
-          <p:cNvSpPr/>
-          <p:nvPr/>
-        </p:nvSpPr>
-        <p:spPr>
-          <a:xfrm>
-            <a:off x="707400" y="5084640"/>
-            <a:ext cx="46800" cy="46800"/>
+          <p:cNvPr id="157" name=""/>
+          <p:cNvSpPr/>
+          <p:nvPr/>
+        </p:nvSpPr>
+        <p:spPr>
+          <a:xfrm>
+            <a:off x="707400" y="5122080"/>
+            <a:ext cx="46800" cy="46440"/>
           </a:xfrm>
           <a:custGeom>
             <a:avLst/>
@@ -8255,13 +8346,13 @@
             <a:ahLst/>
             <a:rect l="0" t="0" r="r" b="b"/>
             <a:pathLst>
-              <a:path fill="none" w="130" h="130">
+              <a:path fill="none" w="130" h="129">
                 <a:moveTo>
                   <a:pt x="130" y="65"/>
                 </a:moveTo>
                 <a:cubicBezTo>
-                  <a:pt x="130" y="151"/>
-                  <a:pt x="0" y="151"/>
+                  <a:pt x="130" y="150"/>
+                  <a:pt x="0" y="150"/>
                   <a:pt x="0" y="65"/>
                 </a:cubicBezTo>
                 <a:cubicBezTo>
@@ -8297,13 +8388,13 @@
       </p:sp>
       <p:sp>
         <p:nvSpPr>
-          <p:cNvPr id="156" name=""/>
-          <p:cNvSpPr/>
-          <p:nvPr/>
-        </p:nvSpPr>
-        <p:spPr>
-          <a:xfrm>
-            <a:off x="2072160" y="5362560"/>
+          <p:cNvPr id="158" name=""/>
+          <p:cNvSpPr/>
+          <p:nvPr/>
+        </p:nvSpPr>
+        <p:spPr>
+          <a:xfrm>
+            <a:off x="2072160" y="5453640"/>
             <a:ext cx="46440" cy="46800"/>
           </a:xfrm>
           <a:custGeom>
@@ -8355,13 +8446,13 @@
       </p:sp>
       <p:sp>
         <p:nvSpPr>
-          <p:cNvPr id="157" name=""/>
-          <p:cNvSpPr/>
-          <p:nvPr/>
-        </p:nvSpPr>
-        <p:spPr>
-          <a:xfrm>
-            <a:off x="2072160" y="5362560"/>
+          <p:cNvPr id="159" name=""/>
+          <p:cNvSpPr/>
+          <p:nvPr/>
+        </p:nvSpPr>
+        <p:spPr>
+          <a:xfrm>
+            <a:off x="2072160" y="5453640"/>
             <a:ext cx="46440" cy="46800"/>
           </a:xfrm>
           <a:custGeom>
@@ -8412,13 +8503,13 @@
       </p:sp>
       <p:sp>
         <p:nvSpPr>
-          <p:cNvPr id="158" name=""/>
-          <p:cNvSpPr/>
-          <p:nvPr/>
-        </p:nvSpPr>
-        <p:spPr>
-          <a:xfrm>
-            <a:off x="3436920" y="5327640"/>
+          <p:cNvPr id="160" name=""/>
+          <p:cNvSpPr/>
+          <p:nvPr/>
+        </p:nvSpPr>
+        <p:spPr>
+          <a:xfrm>
+            <a:off x="3436920" y="5367960"/>
             <a:ext cx="46440" cy="46800"/>
           </a:xfrm>
           <a:custGeom>
@@ -8432,13 +8523,13 @@
                   <a:pt x="0" y="65"/>
                 </a:moveTo>
                 <a:cubicBezTo>
-                  <a:pt x="0" y="-22"/>
-                  <a:pt x="129" y="-22"/>
+                  <a:pt x="0" y="-21"/>
+                  <a:pt x="129" y="-21"/>
                   <a:pt x="129" y="65"/>
                 </a:cubicBezTo>
                 <a:cubicBezTo>
-                  <a:pt x="129" y="151"/>
-                  <a:pt x="0" y="151"/>
+                  <a:pt x="129" y="152"/>
+                  <a:pt x="0" y="152"/>
                   <a:pt x="0" y="65"/>
                 </a:cubicBezTo>
                 <a:close/>
@@ -8470,13 +8561,13 @@
       </p:sp>
       <p:sp>
         <p:nvSpPr>
-          <p:cNvPr id="159" name=""/>
-          <p:cNvSpPr/>
-          <p:nvPr/>
-        </p:nvSpPr>
-        <p:spPr>
-          <a:xfrm>
-            <a:off x="3436920" y="5327640"/>
+          <p:cNvPr id="161" name=""/>
+          <p:cNvSpPr/>
+          <p:nvPr/>
+        </p:nvSpPr>
+        <p:spPr>
+          <a:xfrm>
+            <a:off x="3436920" y="5367960"/>
             <a:ext cx="46440" cy="46800"/>
           </a:xfrm>
           <a:custGeom>
@@ -8490,13 +8581,13 @@
                   <a:pt x="129" y="65"/>
                 </a:moveTo>
                 <a:cubicBezTo>
-                  <a:pt x="129" y="151"/>
-                  <a:pt x="0" y="151"/>
+                  <a:pt x="129" y="152"/>
+                  <a:pt x="0" y="152"/>
                   <a:pt x="0" y="65"/>
                 </a:cubicBezTo>
                 <a:cubicBezTo>
-                  <a:pt x="0" y="-22"/>
-                  <a:pt x="129" y="-22"/>
+                  <a:pt x="0" y="-21"/>
+                  <a:pt x="129" y="-21"/>
                   <a:pt x="129" y="65"/>
                 </a:cubicBezTo>
               </a:path>
@@ -8527,13 +8618,13 @@
       </p:sp>
       <p:sp>
         <p:nvSpPr>
-          <p:cNvPr id="160" name=""/>
-          <p:cNvSpPr/>
-          <p:nvPr/>
-        </p:nvSpPr>
-        <p:spPr>
-          <a:xfrm>
-            <a:off x="4801680" y="5459400"/>
+          <p:cNvPr id="162" name=""/>
+          <p:cNvSpPr/>
+          <p:nvPr/>
+        </p:nvSpPr>
+        <p:spPr>
+          <a:xfrm>
+            <a:off x="4801680" y="5491800"/>
             <a:ext cx="46440" cy="46440"/>
           </a:xfrm>
           <a:custGeom>
@@ -8547,13 +8638,13 @@
                   <a:pt x="0" y="65"/>
                 </a:moveTo>
                 <a:cubicBezTo>
-                  <a:pt x="0" y="-21"/>
-                  <a:pt x="129" y="-21"/>
+                  <a:pt x="0" y="-22"/>
+                  <a:pt x="129" y="-22"/>
                   <a:pt x="129" y="65"/>
                 </a:cubicBezTo>
                 <a:cubicBezTo>
-                  <a:pt x="129" y="151"/>
-                  <a:pt x="0" y="151"/>
+                  <a:pt x="129" y="150"/>
+                  <a:pt x="0" y="150"/>
                   <a:pt x="0" y="65"/>
                 </a:cubicBezTo>
                 <a:close/>
@@ -8585,13 +8676,13 @@
       </p:sp>
       <p:sp>
         <p:nvSpPr>
-          <p:cNvPr id="161" name=""/>
-          <p:cNvSpPr/>
-          <p:nvPr/>
-        </p:nvSpPr>
-        <p:spPr>
-          <a:xfrm>
-            <a:off x="4801680" y="5459400"/>
+          <p:cNvPr id="163" name=""/>
+          <p:cNvSpPr/>
+          <p:nvPr/>
+        </p:nvSpPr>
+        <p:spPr>
+          <a:xfrm>
+            <a:off x="4801680" y="5491800"/>
             <a:ext cx="46440" cy="46440"/>
           </a:xfrm>
           <a:custGeom>
@@ -8605,13 +8696,13 @@
                   <a:pt x="129" y="65"/>
                 </a:moveTo>
                 <a:cubicBezTo>
-                  <a:pt x="129" y="151"/>
-                  <a:pt x="0" y="151"/>
+                  <a:pt x="129" y="150"/>
+                  <a:pt x="0" y="150"/>
                   <a:pt x="0" y="65"/>
                 </a:cubicBezTo>
                 <a:cubicBezTo>
-                  <a:pt x="0" y="-21"/>
-                  <a:pt x="129" y="-21"/>
+                  <a:pt x="0" y="-22"/>
+                  <a:pt x="129" y="-22"/>
                   <a:pt x="129" y="65"/>
                 </a:cubicBezTo>
               </a:path>
@@ -8642,13 +8733,13 @@
       </p:sp>
       <p:sp>
         <p:nvSpPr>
-          <p:cNvPr id="162" name=""/>
-          <p:cNvSpPr/>
-          <p:nvPr/>
-        </p:nvSpPr>
-        <p:spPr>
-          <a:xfrm>
-            <a:off x="707400" y="4789080"/>
+          <p:cNvPr id="164" name=""/>
+          <p:cNvSpPr/>
+          <p:nvPr/>
+        </p:nvSpPr>
+        <p:spPr>
+          <a:xfrm>
+            <a:off x="707400" y="4829040"/>
             <a:ext cx="46800" cy="46440"/>
           </a:xfrm>
           <a:custGeom>
@@ -8700,13 +8791,13 @@
       </p:sp>
       <p:sp>
         <p:nvSpPr>
-          <p:cNvPr id="163" name=""/>
-          <p:cNvSpPr/>
-          <p:nvPr/>
-        </p:nvSpPr>
-        <p:spPr>
-          <a:xfrm>
-            <a:off x="707400" y="4789080"/>
+          <p:cNvPr id="165" name=""/>
+          <p:cNvSpPr/>
+          <p:nvPr/>
+        </p:nvSpPr>
+        <p:spPr>
+          <a:xfrm>
+            <a:off x="707400" y="4829040"/>
             <a:ext cx="46800" cy="46440"/>
           </a:xfrm>
           <a:custGeom>
@@ -8757,14 +8848,14 @@
       </p:sp>
       <p:sp>
         <p:nvSpPr>
-          <p:cNvPr id="164" name=""/>
-          <p:cNvSpPr/>
-          <p:nvPr/>
-        </p:nvSpPr>
-        <p:spPr>
-          <a:xfrm>
-            <a:off x="2072160" y="5140440"/>
-            <a:ext cx="46440" cy="46440"/>
+          <p:cNvPr id="166" name=""/>
+          <p:cNvSpPr/>
+          <p:nvPr/>
+        </p:nvSpPr>
+        <p:spPr>
+          <a:xfrm>
+            <a:off x="2072160" y="5252400"/>
+            <a:ext cx="46440" cy="46080"/>
           </a:xfrm>
           <a:custGeom>
             <a:avLst/>
@@ -8772,19 +8863,19 @@
             <a:ahLst/>
             <a:rect l="0" t="0" r="r" b="b"/>
             <a:pathLst>
-              <a:path w="129" h="129">
+              <a:path w="129" h="128">
                 <a:moveTo>
-                  <a:pt x="0" y="65"/>
+                  <a:pt x="0" y="64"/>
                 </a:moveTo>
                 <a:cubicBezTo>
                   <a:pt x="0" y="-21"/>
                   <a:pt x="129" y="-21"/>
-                  <a:pt x="129" y="65"/>
-                </a:cubicBezTo>
-                <a:cubicBezTo>
-                  <a:pt x="129" y="151"/>
-                  <a:pt x="0" y="151"/>
-                  <a:pt x="0" y="65"/>
+                  <a:pt x="129" y="64"/>
+                </a:cubicBezTo>
+                <a:cubicBezTo>
+                  <a:pt x="129" y="150"/>
+                  <a:pt x="0" y="150"/>
+                  <a:pt x="0" y="64"/>
                 </a:cubicBezTo>
                 <a:close/>
               </a:path>
@@ -8815,14 +8906,14 @@
       </p:sp>
       <p:sp>
         <p:nvSpPr>
-          <p:cNvPr id="165" name=""/>
-          <p:cNvSpPr/>
-          <p:nvPr/>
-        </p:nvSpPr>
-        <p:spPr>
-          <a:xfrm>
-            <a:off x="2072160" y="5140440"/>
-            <a:ext cx="46440" cy="46440"/>
+          <p:cNvPr id="167" name=""/>
+          <p:cNvSpPr/>
+          <p:nvPr/>
+        </p:nvSpPr>
+        <p:spPr>
+          <a:xfrm>
+            <a:off x="2072160" y="5252400"/>
+            <a:ext cx="46440" cy="46080"/>
           </a:xfrm>
           <a:custGeom>
             <a:avLst/>
@@ -8830,19 +8921,19 @@
             <a:ahLst/>
             <a:rect l="0" t="0" r="r" b="b"/>
             <a:pathLst>
-              <a:path fill="none" w="129" h="129">
+              <a:path fill="none" w="129" h="128">
                 <a:moveTo>
-                  <a:pt x="129" y="65"/>
+                  <a:pt x="129" y="64"/>
                 </a:moveTo>
                 <a:cubicBezTo>
-                  <a:pt x="129" y="151"/>
-                  <a:pt x="0" y="151"/>
-                  <a:pt x="0" y="65"/>
+                  <a:pt x="129" y="150"/>
+                  <a:pt x="0" y="150"/>
+                  <a:pt x="0" y="64"/>
                 </a:cubicBezTo>
                 <a:cubicBezTo>
                   <a:pt x="0" y="-21"/>
                   <a:pt x="129" y="-21"/>
-                  <a:pt x="129" y="65"/>
+                  <a:pt x="129" y="64"/>
                 </a:cubicBezTo>
               </a:path>
             </a:pathLst>
@@ -8872,14 +8963,14 @@
       </p:sp>
       <p:sp>
         <p:nvSpPr>
-          <p:cNvPr id="166" name=""/>
-          <p:cNvSpPr/>
-          <p:nvPr/>
-        </p:nvSpPr>
-        <p:spPr>
-          <a:xfrm>
-            <a:off x="3436920" y="5213880"/>
-            <a:ext cx="46440" cy="46440"/>
+          <p:cNvPr id="168" name=""/>
+          <p:cNvSpPr/>
+          <p:nvPr/>
+        </p:nvSpPr>
+        <p:spPr>
+          <a:xfrm>
+            <a:off x="3436920" y="5276160"/>
+            <a:ext cx="46440" cy="46800"/>
           </a:xfrm>
           <a:custGeom>
             <a:avLst/>
@@ -8887,18 +8978,18 @@
             <a:ahLst/>
             <a:rect l="0" t="0" r="r" b="b"/>
             <a:pathLst>
-              <a:path w="129" h="129">
+              <a:path w="129" h="130">
                 <a:moveTo>
                   <a:pt x="0" y="65"/>
                 </a:moveTo>
                 <a:cubicBezTo>
-                  <a:pt x="0" y="-22"/>
-                  <a:pt x="129" y="-22"/>
+                  <a:pt x="0" y="-21"/>
+                  <a:pt x="129" y="-21"/>
                   <a:pt x="129" y="65"/>
                 </a:cubicBezTo>
                 <a:cubicBezTo>
-                  <a:pt x="129" y="150"/>
-                  <a:pt x="0" y="150"/>
+                  <a:pt x="129" y="152"/>
+                  <a:pt x="0" y="152"/>
                   <a:pt x="0" y="65"/>
                 </a:cubicBezTo>
                 <a:close/>
@@ -8930,14 +9021,14 @@
       </p:sp>
       <p:sp>
         <p:nvSpPr>
-          <p:cNvPr id="167" name=""/>
-          <p:cNvSpPr/>
-          <p:nvPr/>
-        </p:nvSpPr>
-        <p:spPr>
-          <a:xfrm>
-            <a:off x="3436920" y="5213880"/>
-            <a:ext cx="46440" cy="46440"/>
+          <p:cNvPr id="169" name=""/>
+          <p:cNvSpPr/>
+          <p:nvPr/>
+        </p:nvSpPr>
+        <p:spPr>
+          <a:xfrm>
+            <a:off x="3436920" y="5276160"/>
+            <a:ext cx="46440" cy="46800"/>
           </a:xfrm>
           <a:custGeom>
             <a:avLst/>
@@ -8945,18 +9036,18 @@
             <a:ahLst/>
             <a:rect l="0" t="0" r="r" b="b"/>
             <a:pathLst>
-              <a:path fill="none" w="129" h="129">
+              <a:path fill="none" w="129" h="130">
                 <a:moveTo>
                   <a:pt x="129" y="65"/>
                 </a:moveTo>
                 <a:cubicBezTo>
-                  <a:pt x="129" y="150"/>
-                  <a:pt x="0" y="150"/>
+                  <a:pt x="129" y="152"/>
+                  <a:pt x="0" y="152"/>
                   <a:pt x="0" y="65"/>
                 </a:cubicBezTo>
                 <a:cubicBezTo>
-                  <a:pt x="0" y="-22"/>
-                  <a:pt x="129" y="-22"/>
+                  <a:pt x="0" y="-21"/>
+                  <a:pt x="129" y="-21"/>
                   <a:pt x="129" y="65"/>
                 </a:cubicBezTo>
               </a:path>
@@ -8987,14 +9078,14 @@
       </p:sp>
       <p:sp>
         <p:nvSpPr>
-          <p:cNvPr id="168" name=""/>
-          <p:cNvSpPr/>
-          <p:nvPr/>
-        </p:nvSpPr>
-        <p:spPr>
-          <a:xfrm>
-            <a:off x="4801680" y="5348160"/>
-            <a:ext cx="46440" cy="46080"/>
+          <p:cNvPr id="170" name=""/>
+          <p:cNvSpPr/>
+          <p:nvPr/>
+        </p:nvSpPr>
+        <p:spPr>
+          <a:xfrm>
+            <a:off x="4801680" y="5418720"/>
+            <a:ext cx="46440" cy="46800"/>
           </a:xfrm>
           <a:custGeom>
             <a:avLst/>
@@ -9002,7 +9093,7 @@
             <a:ahLst/>
             <a:rect l="0" t="0" r="r" b="b"/>
             <a:pathLst>
-              <a:path w="129" h="128">
+              <a:path w="129" h="130">
                 <a:moveTo>
                   <a:pt x="0" y="65"/>
                 </a:moveTo>
@@ -9012,8 +9103,8 @@
                   <a:pt x="129" y="65"/>
                 </a:cubicBezTo>
                 <a:cubicBezTo>
-                  <a:pt x="129" y="150"/>
-                  <a:pt x="0" y="150"/>
+                  <a:pt x="129" y="152"/>
+                  <a:pt x="0" y="152"/>
                   <a:pt x="0" y="65"/>
                 </a:cubicBezTo>
                 <a:close/>
@@ -9045,14 +9136,14 @@
       </p:sp>
       <p:sp>
         <p:nvSpPr>
-          <p:cNvPr id="169" name=""/>
-          <p:cNvSpPr/>
-          <p:nvPr/>
-        </p:nvSpPr>
-        <p:spPr>
-          <a:xfrm>
-            <a:off x="4801680" y="5348160"/>
-            <a:ext cx="46440" cy="46080"/>
+          <p:cNvPr id="171" name=""/>
+          <p:cNvSpPr/>
+          <p:nvPr/>
+        </p:nvSpPr>
+        <p:spPr>
+          <a:xfrm>
+            <a:off x="4801680" y="5418720"/>
+            <a:ext cx="46440" cy="46800"/>
           </a:xfrm>
           <a:custGeom>
             <a:avLst/>
@@ -9060,13 +9151,13 @@
             <a:ahLst/>
             <a:rect l="0" t="0" r="r" b="b"/>
             <a:pathLst>
-              <a:path fill="none" w="129" h="128">
+              <a:path fill="none" w="129" h="130">
                 <a:moveTo>
                   <a:pt x="129" y="65"/>
                 </a:moveTo>
                 <a:cubicBezTo>
-                  <a:pt x="129" y="150"/>
-                  <a:pt x="0" y="150"/>
+                  <a:pt x="129" y="152"/>
+                  <a:pt x="0" y="152"/>
                   <a:pt x="0" y="65"/>
                 </a:cubicBezTo>
                 <a:cubicBezTo>
@@ -9102,14 +9193,14 @@
       </p:sp>
       <p:sp>
         <p:nvSpPr>
-          <p:cNvPr id="170" name=""/>
-          <p:cNvSpPr/>
-          <p:nvPr/>
-        </p:nvSpPr>
-        <p:spPr>
-          <a:xfrm>
-            <a:off x="707400" y="5325480"/>
-            <a:ext cx="46800" cy="46800"/>
+          <p:cNvPr id="172" name=""/>
+          <p:cNvSpPr/>
+          <p:nvPr/>
+        </p:nvSpPr>
+        <p:spPr>
+          <a:xfrm>
+            <a:off x="707400" y="5259600"/>
+            <a:ext cx="46800" cy="46440"/>
           </a:xfrm>
           <a:custGeom>
             <a:avLst/>
@@ -9117,7 +9208,7 @@
             <a:ahLst/>
             <a:rect l="0" t="0" r="r" b="b"/>
             <a:pathLst>
-              <a:path w="130" h="130">
+              <a:path w="130" h="129">
                 <a:moveTo>
                   <a:pt x="0" y="65"/>
                 </a:moveTo>
@@ -9127,8 +9218,8 @@
                   <a:pt x="130" y="65"/>
                 </a:cubicBezTo>
                 <a:cubicBezTo>
-                  <a:pt x="130" y="152"/>
-                  <a:pt x="0" y="152"/>
+                  <a:pt x="130" y="151"/>
+                  <a:pt x="0" y="151"/>
                   <a:pt x="0" y="65"/>
                 </a:cubicBezTo>
                 <a:close/>
@@ -9160,14 +9251,14 @@
       </p:sp>
       <p:sp>
         <p:nvSpPr>
-          <p:cNvPr id="171" name=""/>
-          <p:cNvSpPr/>
-          <p:nvPr/>
-        </p:nvSpPr>
-        <p:spPr>
-          <a:xfrm>
-            <a:off x="707400" y="5325480"/>
-            <a:ext cx="46800" cy="46800"/>
+          <p:cNvPr id="173" name=""/>
+          <p:cNvSpPr/>
+          <p:nvPr/>
+        </p:nvSpPr>
+        <p:spPr>
+          <a:xfrm>
+            <a:off x="707400" y="5259600"/>
+            <a:ext cx="46800" cy="46440"/>
           </a:xfrm>
           <a:custGeom>
             <a:avLst/>
@@ -9175,13 +9266,13 @@
             <a:ahLst/>
             <a:rect l="0" t="0" r="r" b="b"/>
             <a:pathLst>
-              <a:path fill="none" w="130" h="130">
+              <a:path fill="none" w="130" h="129">
                 <a:moveTo>
                   <a:pt x="130" y="65"/>
                 </a:moveTo>
                 <a:cubicBezTo>
-                  <a:pt x="130" y="152"/>
-                  <a:pt x="0" y="152"/>
+                  <a:pt x="130" y="151"/>
+                  <a:pt x="0" y="151"/>
                   <a:pt x="0" y="65"/>
                 </a:cubicBezTo>
                 <a:cubicBezTo>
@@ -9217,14 +9308,14 @@
       </p:sp>
       <p:sp>
         <p:nvSpPr>
-          <p:cNvPr id="172" name=""/>
-          <p:cNvSpPr/>
-          <p:nvPr/>
-        </p:nvSpPr>
-        <p:spPr>
-          <a:xfrm>
-            <a:off x="2072160" y="5593680"/>
-            <a:ext cx="46440" cy="46800"/>
+          <p:cNvPr id="174" name=""/>
+          <p:cNvSpPr/>
+          <p:nvPr/>
+        </p:nvSpPr>
+        <p:spPr>
+          <a:xfrm>
+            <a:off x="2072160" y="5580000"/>
+            <a:ext cx="46440" cy="46080"/>
           </a:xfrm>
           <a:custGeom>
             <a:avLst/>
@@ -9232,7 +9323,7 @@
             <a:ahLst/>
             <a:rect l="0" t="0" r="r" b="b"/>
             <a:pathLst>
-              <a:path w="129" h="130">
+              <a:path w="129" h="128">
                 <a:moveTo>
                   <a:pt x="0" y="65"/>
                 </a:moveTo>
@@ -9242,8 +9333,8 @@
                   <a:pt x="129" y="65"/>
                 </a:cubicBezTo>
                 <a:cubicBezTo>
-                  <a:pt x="129" y="152"/>
-                  <a:pt x="0" y="152"/>
+                  <a:pt x="129" y="150"/>
+                  <a:pt x="0" y="150"/>
                   <a:pt x="0" y="65"/>
                 </a:cubicBezTo>
                 <a:close/>
@@ -9275,14 +9366,14 @@
       </p:sp>
       <p:sp>
         <p:nvSpPr>
-          <p:cNvPr id="173" name=""/>
-          <p:cNvSpPr/>
-          <p:nvPr/>
-        </p:nvSpPr>
-        <p:spPr>
-          <a:xfrm>
-            <a:off x="2072160" y="5593680"/>
-            <a:ext cx="46440" cy="46800"/>
+          <p:cNvPr id="175" name=""/>
+          <p:cNvSpPr/>
+          <p:nvPr/>
+        </p:nvSpPr>
+        <p:spPr>
+          <a:xfrm>
+            <a:off x="2072160" y="5580000"/>
+            <a:ext cx="46440" cy="46080"/>
           </a:xfrm>
           <a:custGeom>
             <a:avLst/>
@@ -9290,13 +9381,13 @@
             <a:ahLst/>
             <a:rect l="0" t="0" r="r" b="b"/>
             <a:pathLst>
-              <a:path fill="none" w="129" h="130">
+              <a:path fill="none" w="129" h="128">
                 <a:moveTo>
                   <a:pt x="129" y="65"/>
                 </a:moveTo>
                 <a:cubicBezTo>
-                  <a:pt x="129" y="152"/>
-                  <a:pt x="0" y="152"/>
+                  <a:pt x="129" y="150"/>
+                  <a:pt x="0" y="150"/>
                   <a:pt x="0" y="65"/>
                 </a:cubicBezTo>
                 <a:cubicBezTo>
@@ -9332,14 +9423,14 @@
       </p:sp>
       <p:sp>
         <p:nvSpPr>
-          <p:cNvPr id="174" name=""/>
-          <p:cNvSpPr/>
-          <p:nvPr/>
-        </p:nvSpPr>
-        <p:spPr>
-          <a:xfrm>
-            <a:off x="3436920" y="5580720"/>
-            <a:ext cx="46440" cy="46440"/>
+          <p:cNvPr id="176" name=""/>
+          <p:cNvSpPr/>
+          <p:nvPr/>
+        </p:nvSpPr>
+        <p:spPr>
+          <a:xfrm>
+            <a:off x="3436920" y="5544720"/>
+            <a:ext cx="46440" cy="46800"/>
           </a:xfrm>
           <a:custGeom>
             <a:avLst/>
@@ -9347,18 +9438,18 @@
             <a:ahLst/>
             <a:rect l="0" t="0" r="r" b="b"/>
             <a:pathLst>
-              <a:path w="129" h="129">
+              <a:path w="129" h="130">
                 <a:moveTo>
                   <a:pt x="0" y="65"/>
                 </a:moveTo>
                 <a:cubicBezTo>
-                  <a:pt x="0" y="-22"/>
-                  <a:pt x="129" y="-22"/>
+                  <a:pt x="0" y="-21"/>
+                  <a:pt x="129" y="-21"/>
                   <a:pt x="129" y="65"/>
                 </a:cubicBezTo>
                 <a:cubicBezTo>
-                  <a:pt x="129" y="150"/>
-                  <a:pt x="0" y="150"/>
+                  <a:pt x="129" y="152"/>
+                  <a:pt x="0" y="152"/>
                   <a:pt x="0" y="65"/>
                 </a:cubicBezTo>
                 <a:close/>
@@ -9390,14 +9481,14 @@
       </p:sp>
       <p:sp>
         <p:nvSpPr>
-          <p:cNvPr id="175" name=""/>
-          <p:cNvSpPr/>
-          <p:nvPr/>
-        </p:nvSpPr>
-        <p:spPr>
-          <a:xfrm>
-            <a:off x="3436920" y="5580720"/>
-            <a:ext cx="46440" cy="46440"/>
+          <p:cNvPr id="177" name=""/>
+          <p:cNvSpPr/>
+          <p:nvPr/>
+        </p:nvSpPr>
+        <p:spPr>
+          <a:xfrm>
+            <a:off x="3436920" y="5544720"/>
+            <a:ext cx="46440" cy="46800"/>
           </a:xfrm>
           <a:custGeom>
             <a:avLst/>
@@ -9405,18 +9496,18 @@
             <a:ahLst/>
             <a:rect l="0" t="0" r="r" b="b"/>
             <a:pathLst>
-              <a:path fill="none" w="129" h="129">
+              <a:path fill="none" w="129" h="130">
                 <a:moveTo>
                   <a:pt x="129" y="65"/>
                 </a:moveTo>
                 <a:cubicBezTo>
-                  <a:pt x="129" y="150"/>
-                  <a:pt x="0" y="150"/>
+                  <a:pt x="129" y="152"/>
+                  <a:pt x="0" y="152"/>
                   <a:pt x="0" y="65"/>
                 </a:cubicBezTo>
                 <a:cubicBezTo>
-                  <a:pt x="0" y="-22"/>
-                  <a:pt x="129" y="-22"/>
+                  <a:pt x="0" y="-21"/>
+                  <a:pt x="129" y="-21"/>
                   <a:pt x="129" y="65"/>
                 </a:cubicBezTo>
               </a:path>
@@ -9447,13 +9538,13 @@
       </p:sp>
       <p:sp>
         <p:nvSpPr>
-          <p:cNvPr id="176" name=""/>
-          <p:cNvSpPr/>
-          <p:nvPr/>
-        </p:nvSpPr>
-        <p:spPr>
-          <a:xfrm>
-            <a:off x="4801680" y="5718240"/>
+          <p:cNvPr id="178" name=""/>
+          <p:cNvSpPr/>
+          <p:nvPr/>
+        </p:nvSpPr>
+        <p:spPr>
+          <a:xfrm>
+            <a:off x="4801680" y="5681160"/>
             <a:ext cx="46440" cy="46440"/>
           </a:xfrm>
           <a:custGeom>
@@ -9505,13 +9596,13 @@
       </p:sp>
       <p:sp>
         <p:nvSpPr>
-          <p:cNvPr id="177" name=""/>
-          <p:cNvSpPr/>
-          <p:nvPr/>
-        </p:nvSpPr>
-        <p:spPr>
-          <a:xfrm>
-            <a:off x="4801680" y="5718240"/>
+          <p:cNvPr id="179" name=""/>
+          <p:cNvSpPr/>
+          <p:nvPr/>
+        </p:nvSpPr>
+        <p:spPr>
+          <a:xfrm>
+            <a:off x="4801680" y="5681160"/>
             <a:ext cx="46440" cy="46440"/>
           </a:xfrm>
           <a:custGeom>
@@ -9562,7 +9653,7 @@
       </p:sp>
       <p:sp>
         <p:nvSpPr>
-          <p:cNvPr id="178" name=""/>
+          <p:cNvPr id="180" name=""/>
           <p:cNvSpPr/>
           <p:nvPr/>
         </p:nvSpPr>
@@ -9605,7 +9696,7 @@
       </p:sp>
       <p:sp>
         <p:nvSpPr>
-          <p:cNvPr id="179" name=""/>
+          <p:cNvPr id="181" name=""/>
           <p:cNvSpPr txBox="1"/>
           <p:nvPr/>
         </p:nvSpPr>
@@ -9653,13 +9744,13 @@
       </p:sp>
       <p:sp>
         <p:nvSpPr>
-          <p:cNvPr id="180" name=""/>
+          <p:cNvPr id="182" name=""/>
           <p:cNvSpPr txBox="1"/>
           <p:nvPr/>
         </p:nvSpPr>
         <p:spPr>
           <a:xfrm>
-            <a:off x="342000" y="5814720"/>
+            <a:off x="342000" y="5744880"/>
             <a:ext cx="142560" cy="102600"/>
           </a:xfrm>
           <a:prstGeom prst="rect">
@@ -9701,13 +9792,13 @@
       </p:sp>
       <p:sp>
         <p:nvSpPr>
-          <p:cNvPr id="181" name=""/>
+          <p:cNvPr id="183" name=""/>
           <p:cNvSpPr txBox="1"/>
           <p:nvPr/>
         </p:nvSpPr>
         <p:spPr>
           <a:xfrm>
-            <a:off x="342000" y="5283720"/>
+            <a:off x="342000" y="5160240"/>
             <a:ext cx="142560" cy="102600"/>
           </a:xfrm>
           <a:prstGeom prst="rect">
@@ -9749,13 +9840,357 @@
       </p:sp>
       <p:sp>
         <p:nvSpPr>
-          <p:cNvPr id="182" name=""/>
+          <p:cNvPr id="184" name=""/>
+          <p:cNvSpPr/>
+          <p:nvPr/>
+        </p:nvSpPr>
+        <p:spPr>
+          <a:xfrm>
+            <a:off x="494280" y="5795280"/>
+            <a:ext cx="31680" cy="0"/>
+          </a:xfrm>
+          <a:prstGeom prst="line">
+            <a:avLst/>
+          </a:prstGeom>
+          <a:ln w="7920">
+            <a:solidFill>
+              <a:srgbClr val="333333"/>
+            </a:solidFill>
+            <a:round/>
+          </a:ln>
+        </p:spPr>
+        <p:style>
+          <a:lnRef idx="0"/>
+          <a:fillRef idx="0"/>
+          <a:effectRef idx="0"/>
+          <a:fontRef idx="minor"/>
+        </p:style>
+        <p:txBody>
+          <a:bodyPr lIns="3960" tIns="-3960" rIns="3960" bIns="-3960" anchor="t">
+            <a:noAutofit/>
+          </a:bodyPr>
+          <a:p>
+            <a:endParaRPr lang="en-US" sz="2400" b="0" u="none" strike="noStrike">
+              <a:solidFill>
+                <a:srgbClr val="000000"/>
+              </a:solidFill>
+              <a:effectLst/>
+              <a:uFillTx/>
+              <a:latin typeface="Times New Roman"/>
+            </a:endParaRPr>
+          </a:p>
+        </p:txBody>
+      </p:sp>
+      <p:sp>
+        <p:nvSpPr>
+          <p:cNvPr id="185" name=""/>
+          <p:cNvSpPr/>
+          <p:nvPr/>
+        </p:nvSpPr>
+        <p:spPr>
+          <a:xfrm>
+            <a:off x="494280" y="5211000"/>
+            <a:ext cx="31680" cy="0"/>
+          </a:xfrm>
+          <a:prstGeom prst="line">
+            <a:avLst/>
+          </a:prstGeom>
+          <a:ln w="7920">
+            <a:solidFill>
+              <a:srgbClr val="333333"/>
+            </a:solidFill>
+            <a:round/>
+          </a:ln>
+        </p:spPr>
+        <p:style>
+          <a:lnRef idx="0"/>
+          <a:fillRef idx="0"/>
+          <a:effectRef idx="0"/>
+          <a:fontRef idx="minor"/>
+        </p:style>
+        <p:txBody>
+          <a:bodyPr lIns="3960" tIns="-3960" rIns="3960" bIns="-3960" anchor="t">
+            <a:noAutofit/>
+          </a:bodyPr>
+          <a:p>
+            <a:endParaRPr lang="en-US" sz="2400" b="0" u="none" strike="noStrike">
+              <a:solidFill>
+                <a:srgbClr val="000000"/>
+              </a:solidFill>
+              <a:effectLst/>
+              <a:uFillTx/>
+              <a:latin typeface="Times New Roman"/>
+            </a:endParaRPr>
+          </a:p>
+        </p:txBody>
+      </p:sp>
+      <p:sp>
+        <p:nvSpPr>
+          <p:cNvPr id="186" name=""/>
+          <p:cNvSpPr/>
+          <p:nvPr/>
+        </p:nvSpPr>
+        <p:spPr>
+          <a:xfrm>
+            <a:off x="494280" y="4626360"/>
+            <a:ext cx="31680" cy="0"/>
+          </a:xfrm>
+          <a:prstGeom prst="line">
+            <a:avLst/>
+          </a:prstGeom>
+          <a:ln w="7920">
+            <a:solidFill>
+              <a:srgbClr val="333333"/>
+            </a:solidFill>
+            <a:round/>
+          </a:ln>
+        </p:spPr>
+        <p:style>
+          <a:lnRef idx="0"/>
+          <a:fillRef idx="0"/>
+          <a:effectRef idx="0"/>
+          <a:fontRef idx="minor"/>
+        </p:style>
+        <p:txBody>
+          <a:bodyPr lIns="3960" tIns="-3960" rIns="3960" bIns="-3960" anchor="t">
+            <a:noAutofit/>
+          </a:bodyPr>
+          <a:p>
+            <a:endParaRPr lang="en-US" sz="2400" b="0" u="none" strike="noStrike">
+              <a:solidFill>
+                <a:srgbClr val="000000"/>
+              </a:solidFill>
+              <a:effectLst/>
+              <a:uFillTx/>
+              <a:latin typeface="Times New Roman"/>
+            </a:endParaRPr>
+          </a:p>
+        </p:txBody>
+      </p:sp>
+      <p:sp>
+        <p:nvSpPr>
+          <p:cNvPr id="187" name=""/>
+          <p:cNvSpPr/>
+          <p:nvPr/>
+        </p:nvSpPr>
+        <p:spPr>
+          <a:xfrm>
+            <a:off x="525960" y="6280920"/>
+            <a:ext cx="4503600" cy="0"/>
+          </a:xfrm>
+          <a:prstGeom prst="line">
+            <a:avLst/>
+          </a:prstGeom>
+          <a:ln cap="sq" w="9360">
+            <a:solidFill>
+              <a:srgbClr val="333333"/>
+            </a:solidFill>
+            <a:round/>
+          </a:ln>
+        </p:spPr>
+        <p:style>
+          <a:lnRef idx="0"/>
+          <a:fillRef idx="0"/>
+          <a:effectRef idx="0"/>
+          <a:fontRef idx="minor"/>
+        </p:style>
+        <p:txBody>
+          <a:bodyPr lIns="4680" tIns="-4680" rIns="4680" bIns="-4680" anchor="t">
+            <a:noAutofit/>
+          </a:bodyPr>
+          <a:p>
+            <a:endParaRPr lang="en-US" sz="2400" b="0" u="none" strike="noStrike">
+              <a:solidFill>
+                <a:srgbClr val="000000"/>
+              </a:solidFill>
+              <a:effectLst/>
+              <a:uFillTx/>
+              <a:latin typeface="Times New Roman"/>
+            </a:endParaRPr>
+          </a:p>
+        </p:txBody>
+      </p:sp>
+      <p:sp>
+        <p:nvSpPr>
+          <p:cNvPr id="188" name=""/>
+          <p:cNvSpPr/>
+          <p:nvPr/>
+        </p:nvSpPr>
+        <p:spPr>
+          <a:xfrm flipV="1">
+            <a:off x="730440" y="6280920"/>
+            <a:ext cx="0" cy="31680"/>
+          </a:xfrm>
+          <a:prstGeom prst="line">
+            <a:avLst/>
+          </a:prstGeom>
+          <a:ln w="7920">
+            <a:solidFill>
+              <a:srgbClr val="333333"/>
+            </a:solidFill>
+            <a:round/>
+          </a:ln>
+        </p:spPr>
+        <p:style>
+          <a:lnRef idx="0"/>
+          <a:fillRef idx="0"/>
+          <a:effectRef idx="0"/>
+          <a:fontRef idx="minor"/>
+        </p:style>
+        <p:txBody>
+          <a:bodyPr lIns="3960" tIns="3960" rIns="3960" bIns="3960" anchor="t">
+            <a:noAutofit/>
+          </a:bodyPr>
+          <a:p>
+            <a:endParaRPr lang="en-US" sz="2400" b="0" u="none" strike="noStrike">
+              <a:solidFill>
+                <a:srgbClr val="000000"/>
+              </a:solidFill>
+              <a:effectLst/>
+              <a:uFillTx/>
+              <a:latin typeface="Times New Roman"/>
+            </a:endParaRPr>
+          </a:p>
+        </p:txBody>
+      </p:sp>
+      <p:sp>
+        <p:nvSpPr>
+          <p:cNvPr id="189" name=""/>
+          <p:cNvSpPr/>
+          <p:nvPr/>
+        </p:nvSpPr>
+        <p:spPr>
+          <a:xfrm flipV="1">
+            <a:off x="2095200" y="6280920"/>
+            <a:ext cx="0" cy="31680"/>
+          </a:xfrm>
+          <a:prstGeom prst="line">
+            <a:avLst/>
+          </a:prstGeom>
+          <a:ln w="7920">
+            <a:solidFill>
+              <a:srgbClr val="333333"/>
+            </a:solidFill>
+            <a:round/>
+          </a:ln>
+        </p:spPr>
+        <p:style>
+          <a:lnRef idx="0"/>
+          <a:fillRef idx="0"/>
+          <a:effectRef idx="0"/>
+          <a:fontRef idx="minor"/>
+        </p:style>
+        <p:txBody>
+          <a:bodyPr lIns="3960" tIns="3960" rIns="3960" bIns="3960" anchor="t">
+            <a:noAutofit/>
+          </a:bodyPr>
+          <a:p>
+            <a:endParaRPr lang="en-US" sz="2400" b="0" u="none" strike="noStrike">
+              <a:solidFill>
+                <a:srgbClr val="000000"/>
+              </a:solidFill>
+              <a:effectLst/>
+              <a:uFillTx/>
+              <a:latin typeface="Times New Roman"/>
+            </a:endParaRPr>
+          </a:p>
+        </p:txBody>
+      </p:sp>
+      <p:sp>
+        <p:nvSpPr>
+          <p:cNvPr id="190" name=""/>
+          <p:cNvSpPr/>
+          <p:nvPr/>
+        </p:nvSpPr>
+        <p:spPr>
+          <a:xfrm flipV="1">
+            <a:off x="3459960" y="6280920"/>
+            <a:ext cx="0" cy="31680"/>
+          </a:xfrm>
+          <a:prstGeom prst="line">
+            <a:avLst/>
+          </a:prstGeom>
+          <a:ln w="7920">
+            <a:solidFill>
+              <a:srgbClr val="333333"/>
+            </a:solidFill>
+            <a:round/>
+          </a:ln>
+        </p:spPr>
+        <p:style>
+          <a:lnRef idx="0"/>
+          <a:fillRef idx="0"/>
+          <a:effectRef idx="0"/>
+          <a:fontRef idx="minor"/>
+        </p:style>
+        <p:txBody>
+          <a:bodyPr lIns="3960" tIns="3960" rIns="3960" bIns="3960" anchor="t">
+            <a:noAutofit/>
+          </a:bodyPr>
+          <a:p>
+            <a:endParaRPr lang="en-US" sz="2400" b="0" u="none" strike="noStrike">
+              <a:solidFill>
+                <a:srgbClr val="000000"/>
+              </a:solidFill>
+              <a:effectLst/>
+              <a:uFillTx/>
+              <a:latin typeface="Times New Roman"/>
+            </a:endParaRPr>
+          </a:p>
+        </p:txBody>
+      </p:sp>
+      <p:sp>
+        <p:nvSpPr>
+          <p:cNvPr id="191" name=""/>
+          <p:cNvSpPr/>
+          <p:nvPr/>
+        </p:nvSpPr>
+        <p:spPr>
+          <a:xfrm flipV="1">
+            <a:off x="4824720" y="6280920"/>
+            <a:ext cx="0" cy="31680"/>
+          </a:xfrm>
+          <a:prstGeom prst="line">
+            <a:avLst/>
+          </a:prstGeom>
+          <a:ln w="7920">
+            <a:solidFill>
+              <a:srgbClr val="333333"/>
+            </a:solidFill>
+            <a:round/>
+          </a:ln>
+        </p:spPr>
+        <p:style>
+          <a:lnRef idx="0"/>
+          <a:fillRef idx="0"/>
+          <a:effectRef idx="0"/>
+          <a:fontRef idx="minor"/>
+        </p:style>
+        <p:txBody>
+          <a:bodyPr lIns="3960" tIns="3960" rIns="3960" bIns="3960" anchor="t">
+            <a:noAutofit/>
+          </a:bodyPr>
+          <a:p>
+            <a:endParaRPr lang="en-US" sz="2400" b="0" u="none" strike="noStrike">
+              <a:solidFill>
+                <a:srgbClr val="000000"/>
+              </a:solidFill>
+              <a:effectLst/>
+              <a:uFillTx/>
+              <a:latin typeface="Times New Roman"/>
+            </a:endParaRPr>
+          </a:p>
+        </p:txBody>
+      </p:sp>
+      <p:sp>
+        <p:nvSpPr>
+          <p:cNvPr id="192" name=""/>
           <p:cNvSpPr txBox="1"/>
           <p:nvPr/>
         </p:nvSpPr>
         <p:spPr>
           <a:xfrm>
-            <a:off x="342000" y="4752360"/>
+            <a:off x="342000" y="4575600"/>
             <a:ext cx="142560" cy="102600"/>
           </a:xfrm>
           <a:prstGeom prst="rect">
@@ -9797,441 +10232,6 @@
       </p:sp>
       <p:sp>
         <p:nvSpPr>
-          <p:cNvPr id="183" name=""/>
-          <p:cNvSpPr/>
-          <p:nvPr/>
-        </p:nvSpPr>
-        <p:spPr>
-          <a:xfrm>
-            <a:off x="494280" y="5865120"/>
-            <a:ext cx="31680" cy="0"/>
-          </a:xfrm>
-          <a:prstGeom prst="line">
-            <a:avLst/>
-          </a:prstGeom>
-          <a:ln w="7920">
-            <a:solidFill>
-              <a:srgbClr val="333333"/>
-            </a:solidFill>
-            <a:round/>
-          </a:ln>
-        </p:spPr>
-        <p:style>
-          <a:lnRef idx="0"/>
-          <a:fillRef idx="0"/>
-          <a:effectRef idx="0"/>
-          <a:fontRef idx="minor"/>
-        </p:style>
-        <p:txBody>
-          <a:bodyPr lIns="3960" tIns="-3960" rIns="3960" bIns="-3960" anchor="t">
-            <a:noAutofit/>
-          </a:bodyPr>
-          <a:p>
-            <a:endParaRPr lang="en-US" sz="2400" b="0" u="none" strike="noStrike">
-              <a:solidFill>
-                <a:srgbClr val="000000"/>
-              </a:solidFill>
-              <a:effectLst/>
-              <a:uFillTx/>
-              <a:latin typeface="Times New Roman"/>
-            </a:endParaRPr>
-          </a:p>
-        </p:txBody>
-      </p:sp>
-      <p:sp>
-        <p:nvSpPr>
-          <p:cNvPr id="184" name=""/>
-          <p:cNvSpPr/>
-          <p:nvPr/>
-        </p:nvSpPr>
-        <p:spPr>
-          <a:xfrm>
-            <a:off x="494280" y="5334120"/>
-            <a:ext cx="31680" cy="0"/>
-          </a:xfrm>
-          <a:prstGeom prst="line">
-            <a:avLst/>
-          </a:prstGeom>
-          <a:ln w="7920">
-            <a:solidFill>
-              <a:srgbClr val="333333"/>
-            </a:solidFill>
-            <a:round/>
-          </a:ln>
-        </p:spPr>
-        <p:style>
-          <a:lnRef idx="0"/>
-          <a:fillRef idx="0"/>
-          <a:effectRef idx="0"/>
-          <a:fontRef idx="minor"/>
-        </p:style>
-        <p:txBody>
-          <a:bodyPr lIns="3960" tIns="-3960" rIns="3960" bIns="-3960" anchor="t">
-            <a:noAutofit/>
-          </a:bodyPr>
-          <a:p>
-            <a:endParaRPr lang="en-US" sz="2400" b="0" u="none" strike="noStrike">
-              <a:solidFill>
-                <a:srgbClr val="000000"/>
-              </a:solidFill>
-              <a:effectLst/>
-              <a:uFillTx/>
-              <a:latin typeface="Times New Roman"/>
-            </a:endParaRPr>
-          </a:p>
-        </p:txBody>
-      </p:sp>
-      <p:sp>
-        <p:nvSpPr>
-          <p:cNvPr id="185" name=""/>
-          <p:cNvSpPr/>
-          <p:nvPr/>
-        </p:nvSpPr>
-        <p:spPr>
-          <a:xfrm>
-            <a:off x="494280" y="4803120"/>
-            <a:ext cx="31680" cy="0"/>
-          </a:xfrm>
-          <a:prstGeom prst="line">
-            <a:avLst/>
-          </a:prstGeom>
-          <a:ln w="7920">
-            <a:solidFill>
-              <a:srgbClr val="333333"/>
-            </a:solidFill>
-            <a:round/>
-          </a:ln>
-        </p:spPr>
-        <p:style>
-          <a:lnRef idx="0"/>
-          <a:fillRef idx="0"/>
-          <a:effectRef idx="0"/>
-          <a:fontRef idx="minor"/>
-        </p:style>
-        <p:txBody>
-          <a:bodyPr lIns="3960" tIns="-3960" rIns="3960" bIns="-3960" anchor="t">
-            <a:noAutofit/>
-          </a:bodyPr>
-          <a:p>
-            <a:endParaRPr lang="en-US" sz="2400" b="0" u="none" strike="noStrike">
-              <a:solidFill>
-                <a:srgbClr val="000000"/>
-              </a:solidFill>
-              <a:effectLst/>
-              <a:uFillTx/>
-              <a:latin typeface="Times New Roman"/>
-            </a:endParaRPr>
-          </a:p>
-        </p:txBody>
-      </p:sp>
-      <p:sp>
-        <p:nvSpPr>
-          <p:cNvPr id="186" name=""/>
-          <p:cNvSpPr/>
-          <p:nvPr/>
-        </p:nvSpPr>
-        <p:spPr>
-          <a:xfrm>
-            <a:off x="494280" y="4271760"/>
-            <a:ext cx="31680" cy="0"/>
-          </a:xfrm>
-          <a:prstGeom prst="line">
-            <a:avLst/>
-          </a:prstGeom>
-          <a:ln w="7920">
-            <a:solidFill>
-              <a:srgbClr val="333333"/>
-            </a:solidFill>
-            <a:round/>
-          </a:ln>
-        </p:spPr>
-        <p:style>
-          <a:lnRef idx="0"/>
-          <a:fillRef idx="0"/>
-          <a:effectRef idx="0"/>
-          <a:fontRef idx="minor"/>
-        </p:style>
-        <p:txBody>
-          <a:bodyPr lIns="3960" tIns="-3960" rIns="3960" bIns="-3960" anchor="t">
-            <a:noAutofit/>
-          </a:bodyPr>
-          <a:p>
-            <a:endParaRPr lang="en-US" sz="2400" b="0" u="none" strike="noStrike">
-              <a:solidFill>
-                <a:srgbClr val="000000"/>
-              </a:solidFill>
-              <a:effectLst/>
-              <a:uFillTx/>
-              <a:latin typeface="Times New Roman"/>
-            </a:endParaRPr>
-          </a:p>
-        </p:txBody>
-      </p:sp>
-      <p:sp>
-        <p:nvSpPr>
-          <p:cNvPr id="187" name=""/>
-          <p:cNvSpPr/>
-          <p:nvPr/>
-        </p:nvSpPr>
-        <p:spPr>
-          <a:xfrm>
-            <a:off x="525960" y="6280920"/>
-            <a:ext cx="4503600" cy="0"/>
-          </a:xfrm>
-          <a:prstGeom prst="line">
-            <a:avLst/>
-          </a:prstGeom>
-          <a:ln cap="sq" w="9360">
-            <a:solidFill>
-              <a:srgbClr val="333333"/>
-            </a:solidFill>
-            <a:round/>
-          </a:ln>
-        </p:spPr>
-        <p:style>
-          <a:lnRef idx="0"/>
-          <a:fillRef idx="0"/>
-          <a:effectRef idx="0"/>
-          <a:fontRef idx="minor"/>
-        </p:style>
-        <p:txBody>
-          <a:bodyPr lIns="4680" tIns="-4680" rIns="4680" bIns="-4680" anchor="t">
-            <a:noAutofit/>
-          </a:bodyPr>
-          <a:p>
-            <a:endParaRPr lang="en-US" sz="2400" b="0" u="none" strike="noStrike">
-              <a:solidFill>
-                <a:srgbClr val="000000"/>
-              </a:solidFill>
-              <a:effectLst/>
-              <a:uFillTx/>
-              <a:latin typeface="Times New Roman"/>
-            </a:endParaRPr>
-          </a:p>
-        </p:txBody>
-      </p:sp>
-      <p:sp>
-        <p:nvSpPr>
-          <p:cNvPr id="188" name=""/>
-          <p:cNvSpPr/>
-          <p:nvPr/>
-        </p:nvSpPr>
-        <p:spPr>
-          <a:xfrm flipV="1">
-            <a:off x="730440" y="6280920"/>
-            <a:ext cx="0" cy="31680"/>
-          </a:xfrm>
-          <a:prstGeom prst="line">
-            <a:avLst/>
-          </a:prstGeom>
-          <a:ln w="7920">
-            <a:solidFill>
-              <a:srgbClr val="333333"/>
-            </a:solidFill>
-            <a:round/>
-          </a:ln>
-        </p:spPr>
-        <p:style>
-          <a:lnRef idx="0"/>
-          <a:fillRef idx="0"/>
-          <a:effectRef idx="0"/>
-          <a:fontRef idx="minor"/>
-        </p:style>
-        <p:txBody>
-          <a:bodyPr lIns="3960" tIns="3960" rIns="3960" bIns="3960" anchor="t">
-            <a:noAutofit/>
-          </a:bodyPr>
-          <a:p>
-            <a:endParaRPr lang="en-US" sz="2400" b="0" u="none" strike="noStrike">
-              <a:solidFill>
-                <a:srgbClr val="000000"/>
-              </a:solidFill>
-              <a:effectLst/>
-              <a:uFillTx/>
-              <a:latin typeface="Times New Roman"/>
-            </a:endParaRPr>
-          </a:p>
-        </p:txBody>
-      </p:sp>
-      <p:sp>
-        <p:nvSpPr>
-          <p:cNvPr id="189" name=""/>
-          <p:cNvSpPr/>
-          <p:nvPr/>
-        </p:nvSpPr>
-        <p:spPr>
-          <a:xfrm flipV="1">
-            <a:off x="2095200" y="6280920"/>
-            <a:ext cx="0" cy="31680"/>
-          </a:xfrm>
-          <a:prstGeom prst="line">
-            <a:avLst/>
-          </a:prstGeom>
-          <a:ln w="7920">
-            <a:solidFill>
-              <a:srgbClr val="333333"/>
-            </a:solidFill>
-            <a:round/>
-          </a:ln>
-        </p:spPr>
-        <p:style>
-          <a:lnRef idx="0"/>
-          <a:fillRef idx="0"/>
-          <a:effectRef idx="0"/>
-          <a:fontRef idx="minor"/>
-        </p:style>
-        <p:txBody>
-          <a:bodyPr lIns="3960" tIns="3960" rIns="3960" bIns="3960" anchor="t">
-            <a:noAutofit/>
-          </a:bodyPr>
-          <a:p>
-            <a:endParaRPr lang="en-US" sz="2400" b="0" u="none" strike="noStrike">
-              <a:solidFill>
-                <a:srgbClr val="000000"/>
-              </a:solidFill>
-              <a:effectLst/>
-              <a:uFillTx/>
-              <a:latin typeface="Times New Roman"/>
-            </a:endParaRPr>
-          </a:p>
-        </p:txBody>
-      </p:sp>
-      <p:sp>
-        <p:nvSpPr>
-          <p:cNvPr id="190" name=""/>
-          <p:cNvSpPr/>
-          <p:nvPr/>
-        </p:nvSpPr>
-        <p:spPr>
-          <a:xfrm flipV="1">
-            <a:off x="3459960" y="6280920"/>
-            <a:ext cx="0" cy="31680"/>
-          </a:xfrm>
-          <a:prstGeom prst="line">
-            <a:avLst/>
-          </a:prstGeom>
-          <a:ln w="7920">
-            <a:solidFill>
-              <a:srgbClr val="333333"/>
-            </a:solidFill>
-            <a:round/>
-          </a:ln>
-        </p:spPr>
-        <p:style>
-          <a:lnRef idx="0"/>
-          <a:fillRef idx="0"/>
-          <a:effectRef idx="0"/>
-          <a:fontRef idx="minor"/>
-        </p:style>
-        <p:txBody>
-          <a:bodyPr lIns="3960" tIns="3960" rIns="3960" bIns="3960" anchor="t">
-            <a:noAutofit/>
-          </a:bodyPr>
-          <a:p>
-            <a:endParaRPr lang="en-US" sz="2400" b="0" u="none" strike="noStrike">
-              <a:solidFill>
-                <a:srgbClr val="000000"/>
-              </a:solidFill>
-              <a:effectLst/>
-              <a:uFillTx/>
-              <a:latin typeface="Times New Roman"/>
-            </a:endParaRPr>
-          </a:p>
-        </p:txBody>
-      </p:sp>
-      <p:sp>
-        <p:nvSpPr>
-          <p:cNvPr id="191" name=""/>
-          <p:cNvSpPr/>
-          <p:nvPr/>
-        </p:nvSpPr>
-        <p:spPr>
-          <a:xfrm flipV="1">
-            <a:off x="4824720" y="6280920"/>
-            <a:ext cx="0" cy="31680"/>
-          </a:xfrm>
-          <a:prstGeom prst="line">
-            <a:avLst/>
-          </a:prstGeom>
-          <a:ln w="7920">
-            <a:solidFill>
-              <a:srgbClr val="333333"/>
-            </a:solidFill>
-            <a:round/>
-          </a:ln>
-        </p:spPr>
-        <p:style>
-          <a:lnRef idx="0"/>
-          <a:fillRef idx="0"/>
-          <a:effectRef idx="0"/>
-          <a:fontRef idx="minor"/>
-        </p:style>
-        <p:txBody>
-          <a:bodyPr lIns="3960" tIns="3960" rIns="3960" bIns="3960" anchor="t">
-            <a:noAutofit/>
-          </a:bodyPr>
-          <a:p>
-            <a:endParaRPr lang="en-US" sz="2400" b="0" u="none" strike="noStrike">
-              <a:solidFill>
-                <a:srgbClr val="000000"/>
-              </a:solidFill>
-              <a:effectLst/>
-              <a:uFillTx/>
-              <a:latin typeface="Times New Roman"/>
-            </a:endParaRPr>
-          </a:p>
-        </p:txBody>
-      </p:sp>
-      <p:sp>
-        <p:nvSpPr>
-          <p:cNvPr id="192" name=""/>
-          <p:cNvSpPr txBox="1"/>
-          <p:nvPr/>
-        </p:nvSpPr>
-        <p:spPr>
-          <a:xfrm>
-            <a:off x="342000" y="4221360"/>
-            <a:ext cx="142560" cy="102600"/>
-          </a:xfrm>
-          <a:prstGeom prst="rect">
-            <a:avLst/>
-          </a:prstGeom>
-          <a:noFill/>
-          <a:ln w="0">
-            <a:noFill/>
-          </a:ln>
-        </p:spPr>
-        <p:txBody>
-          <a:bodyPr wrap="none" lIns="0" tIns="0" rIns="0" bIns="0" anchor="t">
-            <a:spAutoFit/>
-          </a:bodyPr>
-          <a:p>
-            <a:pPr/>
-            <a:r>
-              <a:rPr lang="en-US" sz="800" b="0" u="none" strike="noStrike">
-                <a:solidFill>
-                  <a:srgbClr val="262626"/>
-                </a:solidFill>
-                <a:effectLst/>
-                <a:uFillTx/>
-                <a:latin typeface="Arial"/>
-                <a:ea typeface="Arial"/>
-              </a:rPr>
-              <a:t>1.1</a:t>
-            </a:r>
-            <a:endParaRPr lang="en-US" sz="800" b="0" u="none" strike="noStrike">
-              <a:solidFill>
-                <a:srgbClr val="000000"/>
-              </a:solidFill>
-              <a:effectLst/>
-              <a:uFillTx/>
-              <a:latin typeface="Times New Roman"/>
-            </a:endParaRPr>
-          </a:p>
-        </p:txBody>
-      </p:sp>
-      <p:sp>
-        <p:nvSpPr>
           <p:cNvPr id="193" name=""/>
           <p:cNvSpPr txBox="1"/>
           <p:nvPr/>
@@ -10725,7 +10725,7 @@
         </p:nvSpPr>
         <p:spPr>
           <a:xfrm>
-            <a:off x="5561640" y="5765040"/>
+            <a:off x="5561640" y="5767560"/>
             <a:ext cx="4503600" cy="0"/>
           </a:xfrm>
           <a:prstGeom prst="line">
@@ -10768,7 +10768,7 @@
         </p:nvSpPr>
         <p:spPr>
           <a:xfrm>
-            <a:off x="5561640" y="5348160"/>
+            <a:off x="5561640" y="5353920"/>
             <a:ext cx="4503600" cy="0"/>
           </a:xfrm>
           <a:prstGeom prst="line">
@@ -10811,7 +10811,7 @@
         </p:nvSpPr>
         <p:spPr>
           <a:xfrm>
-            <a:off x="5561640" y="4931640"/>
+            <a:off x="5561640" y="4939920"/>
             <a:ext cx="4503600" cy="0"/>
           </a:xfrm>
           <a:prstGeom prst="line">
@@ -10854,7 +10854,7 @@
         </p:nvSpPr>
         <p:spPr>
           <a:xfrm>
-            <a:off x="5561640" y="4514760"/>
+            <a:off x="5561640" y="4525920"/>
             <a:ext cx="4503600" cy="0"/>
           </a:xfrm>
           <a:prstGeom prst="line">
@@ -10892,6 +10892,49 @@
       <p:sp>
         <p:nvSpPr>
           <p:cNvPr id="207" name=""/>
+          <p:cNvSpPr/>
+          <p:nvPr/>
+        </p:nvSpPr>
+        <p:spPr>
+          <a:xfrm>
+            <a:off x="5561640" y="4111920"/>
+            <a:ext cx="4503600" cy="0"/>
+          </a:xfrm>
+          <a:prstGeom prst="line">
+            <a:avLst/>
+          </a:prstGeom>
+          <a:ln w="6480">
+            <a:solidFill>
+              <a:srgbClr val="EBEBEB"/>
+            </a:solidFill>
+            <a:round/>
+          </a:ln>
+        </p:spPr>
+        <p:style>
+          <a:lnRef idx="0"/>
+          <a:fillRef idx="0"/>
+          <a:effectRef idx="0"/>
+          <a:fontRef idx="minor"/>
+        </p:style>
+        <p:txBody>
+          <a:bodyPr lIns="3240" tIns="-3240" rIns="3240" bIns="-3240" anchor="t">
+            <a:noAutofit/>
+          </a:bodyPr>
+          <a:p>
+            <a:endParaRPr lang="en-US" sz="2400" b="0" u="none" strike="noStrike">
+              <a:solidFill>
+                <a:srgbClr val="000000"/>
+              </a:solidFill>
+              <a:effectLst/>
+              <a:uFillTx/>
+              <a:latin typeface="Times New Roman"/>
+            </a:endParaRPr>
+          </a:p>
+        </p:txBody>
+      </p:sp>
+      <p:sp>
+        <p:nvSpPr>
+          <p:cNvPr id="208" name=""/>
           <p:cNvSpPr/>
           <p:nvPr/>
         </p:nvSpPr>
@@ -10911,10 +10954,10 @@
                   <a:pt x="0" y="0"/>
                 </a:moveTo>
                 <a:lnTo>
-                  <a:pt x="3792" y="1596"/>
-                </a:lnTo>
-                <a:lnTo>
-                  <a:pt x="7583" y="4999"/>
+                  <a:pt x="3792" y="1895"/>
+                </a:lnTo>
+                <a:lnTo>
+                  <a:pt x="7583" y="5029"/>
                 </a:lnTo>
                 <a:lnTo>
                   <a:pt x="11373" y="5509"/>
@@ -10947,14 +10990,14 @@
       </p:sp>
       <p:sp>
         <p:nvSpPr>
-          <p:cNvPr id="208" name=""/>
-          <p:cNvSpPr/>
-          <p:nvPr/>
-        </p:nvSpPr>
-        <p:spPr>
-          <a:xfrm>
-            <a:off x="5766480" y="4489200"/>
-            <a:ext cx="4094280" cy="1692720"/>
+          <p:cNvPr id="209" name=""/>
+          <p:cNvSpPr/>
+          <p:nvPr/>
+        </p:nvSpPr>
+        <p:spPr>
+          <a:xfrm>
+            <a:off x="5766480" y="4306320"/>
+            <a:ext cx="4094280" cy="1875600"/>
           </a:xfrm>
           <a:custGeom>
             <a:avLst/>
@@ -10962,18 +11005,18 @@
             <a:ahLst/>
             <a:rect l="0" t="0" r="r" b="b"/>
             <a:pathLst>
-              <a:path fill="none" w="11373" h="4702">
+              <a:path fill="none" w="11373" h="5210">
                 <a:moveTo>
                   <a:pt x="0" y="0"/>
                 </a:moveTo>
                 <a:lnTo>
-                  <a:pt x="3792" y="634"/>
-                </a:lnTo>
-                <a:lnTo>
-                  <a:pt x="7583" y="3411"/>
-                </a:lnTo>
-                <a:lnTo>
-                  <a:pt x="11373" y="4702"/>
+                  <a:pt x="3792" y="1206"/>
+                </a:lnTo>
+                <a:lnTo>
+                  <a:pt x="7583" y="3831"/>
+                </a:lnTo>
+                <a:lnTo>
+                  <a:pt x="11373" y="5210"/>
                 </a:lnTo>
               </a:path>
             </a:pathLst>
@@ -11003,14 +11046,14 @@
       </p:sp>
       <p:sp>
         <p:nvSpPr>
-          <p:cNvPr id="209" name=""/>
-          <p:cNvSpPr/>
-          <p:nvPr/>
-        </p:nvSpPr>
-        <p:spPr>
-          <a:xfrm>
-            <a:off x="5766480" y="4289400"/>
-            <a:ext cx="4094280" cy="1892520"/>
+          <p:cNvPr id="210" name=""/>
+          <p:cNvSpPr/>
+          <p:nvPr/>
+        </p:nvSpPr>
+        <p:spPr>
+          <a:xfrm>
+            <a:off x="5766480" y="4232880"/>
+            <a:ext cx="4094280" cy="1949040"/>
           </a:xfrm>
           <a:custGeom>
             <a:avLst/>
@@ -11018,18 +11061,18 @@
             <a:ahLst/>
             <a:rect l="0" t="0" r="r" b="b"/>
             <a:pathLst>
-              <a:path fill="none" w="11373" h="5257">
+              <a:path fill="none" w="11373" h="5414">
                 <a:moveTo>
                   <a:pt x="0" y="0"/>
                 </a:moveTo>
                 <a:lnTo>
-                  <a:pt x="3792" y="1293"/>
-                </a:lnTo>
-                <a:lnTo>
-                  <a:pt x="7583" y="4096"/>
-                </a:lnTo>
-                <a:lnTo>
-                  <a:pt x="11373" y="5257"/>
+                  <a:pt x="3792" y="1795"/>
+                </a:lnTo>
+                <a:lnTo>
+                  <a:pt x="7583" y="4242"/>
+                </a:lnTo>
+                <a:lnTo>
+                  <a:pt x="11373" y="5414"/>
                 </a:lnTo>
               </a:path>
             </a:pathLst>
@@ -11059,14 +11102,14 @@
       </p:sp>
       <p:sp>
         <p:nvSpPr>
-          <p:cNvPr id="210" name=""/>
-          <p:cNvSpPr/>
-          <p:nvPr/>
-        </p:nvSpPr>
-        <p:spPr>
-          <a:xfrm>
-            <a:off x="5743440" y="4266360"/>
-            <a:ext cx="46440" cy="46440"/>
+          <p:cNvPr id="211" name=""/>
+          <p:cNvSpPr/>
+          <p:nvPr/>
+        </p:nvSpPr>
+        <p:spPr>
+          <a:xfrm>
+            <a:off x="5743440" y="4209840"/>
+            <a:ext cx="46440" cy="46800"/>
           </a:xfrm>
           <a:custGeom>
             <a:avLst/>
@@ -11074,7 +11117,7 @@
             <a:ahLst/>
             <a:rect l="0" t="0" r="r" b="b"/>
             <a:pathLst>
-              <a:path w="129" h="129">
+              <a:path w="129" h="130">
                 <a:moveTo>
                   <a:pt x="0" y="65"/>
                 </a:moveTo>
@@ -11084,8 +11127,8 @@
                   <a:pt x="129" y="65"/>
                 </a:cubicBezTo>
                 <a:cubicBezTo>
-                  <a:pt x="129" y="151"/>
-                  <a:pt x="0" y="151"/>
+                  <a:pt x="129" y="152"/>
+                  <a:pt x="0" y="152"/>
                   <a:pt x="0" y="65"/>
                 </a:cubicBezTo>
                 <a:close/>
@@ -11117,14 +11160,14 @@
       </p:sp>
       <p:sp>
         <p:nvSpPr>
-          <p:cNvPr id="211" name=""/>
-          <p:cNvSpPr/>
-          <p:nvPr/>
-        </p:nvSpPr>
-        <p:spPr>
-          <a:xfrm>
-            <a:off x="5743440" y="4266360"/>
-            <a:ext cx="46440" cy="46440"/>
+          <p:cNvPr id="212" name=""/>
+          <p:cNvSpPr/>
+          <p:nvPr/>
+        </p:nvSpPr>
+        <p:spPr>
+          <a:xfrm>
+            <a:off x="5743440" y="4209840"/>
+            <a:ext cx="46440" cy="46800"/>
           </a:xfrm>
           <a:custGeom>
             <a:avLst/>
@@ -11132,13 +11175,13 @@
             <a:ahLst/>
             <a:rect l="0" t="0" r="r" b="b"/>
             <a:pathLst>
-              <a:path fill="none" w="129" h="129">
+              <a:path fill="none" w="129" h="130">
                 <a:moveTo>
                   <a:pt x="129" y="65"/>
                 </a:moveTo>
                 <a:cubicBezTo>
-                  <a:pt x="129" y="151"/>
-                  <a:pt x="0" y="151"/>
+                  <a:pt x="129" y="152"/>
+                  <a:pt x="0" y="152"/>
                   <a:pt x="0" y="65"/>
                 </a:cubicBezTo>
                 <a:cubicBezTo>
@@ -11174,14 +11217,14 @@
       </p:sp>
       <p:sp>
         <p:nvSpPr>
-          <p:cNvPr id="212" name=""/>
-          <p:cNvSpPr/>
-          <p:nvPr/>
-        </p:nvSpPr>
-        <p:spPr>
-          <a:xfrm>
-            <a:off x="7108200" y="4731480"/>
-            <a:ext cx="46440" cy="46440"/>
+          <p:cNvPr id="213" name=""/>
+          <p:cNvSpPr/>
+          <p:nvPr/>
+        </p:nvSpPr>
+        <p:spPr>
+          <a:xfrm>
+            <a:off x="7108200" y="4855680"/>
+            <a:ext cx="46440" cy="46800"/>
           </a:xfrm>
           <a:custGeom>
             <a:avLst/>
@@ -11189,19 +11232,19 @@
             <a:ahLst/>
             <a:rect l="0" t="0" r="r" b="b"/>
             <a:pathLst>
-              <a:path w="129" h="129">
+              <a:path w="129" h="130">
                 <a:moveTo>
-                  <a:pt x="0" y="64"/>
+                  <a:pt x="0" y="65"/>
                 </a:moveTo>
                 <a:cubicBezTo>
                   <a:pt x="0" y="-21"/>
                   <a:pt x="129" y="-21"/>
-                  <a:pt x="129" y="64"/>
-                </a:cubicBezTo>
-                <a:cubicBezTo>
-                  <a:pt x="129" y="151"/>
-                  <a:pt x="0" y="151"/>
-                  <a:pt x="0" y="64"/>
+                  <a:pt x="129" y="65"/>
+                </a:cubicBezTo>
+                <a:cubicBezTo>
+                  <a:pt x="129" y="152"/>
+                  <a:pt x="0" y="152"/>
+                  <a:pt x="0" y="65"/>
                 </a:cubicBezTo>
                 <a:close/>
               </a:path>
@@ -11232,14 +11275,14 @@
       </p:sp>
       <p:sp>
         <p:nvSpPr>
-          <p:cNvPr id="213" name=""/>
-          <p:cNvSpPr/>
-          <p:nvPr/>
-        </p:nvSpPr>
-        <p:spPr>
-          <a:xfrm>
-            <a:off x="7108200" y="4731480"/>
-            <a:ext cx="46440" cy="46440"/>
+          <p:cNvPr id="214" name=""/>
+          <p:cNvSpPr/>
+          <p:nvPr/>
+        </p:nvSpPr>
+        <p:spPr>
+          <a:xfrm>
+            <a:off x="7108200" y="4855680"/>
+            <a:ext cx="46440" cy="46800"/>
           </a:xfrm>
           <a:custGeom>
             <a:avLst/>
@@ -11247,19 +11290,19 @@
             <a:ahLst/>
             <a:rect l="0" t="0" r="r" b="b"/>
             <a:pathLst>
-              <a:path fill="none" w="129" h="129">
+              <a:path fill="none" w="129" h="130">
                 <a:moveTo>
-                  <a:pt x="129" y="64"/>
+                  <a:pt x="129" y="65"/>
                 </a:moveTo>
                 <a:cubicBezTo>
-                  <a:pt x="129" y="151"/>
-                  <a:pt x="0" y="151"/>
-                  <a:pt x="0" y="64"/>
+                  <a:pt x="129" y="152"/>
+                  <a:pt x="0" y="152"/>
+                  <a:pt x="0" y="65"/>
                 </a:cubicBezTo>
                 <a:cubicBezTo>
                   <a:pt x="0" y="-21"/>
                   <a:pt x="129" y="-21"/>
-                  <a:pt x="129" y="64"/>
+                  <a:pt x="129" y="65"/>
                 </a:cubicBezTo>
               </a:path>
             </a:pathLst>
@@ -11289,13 +11332,13 @@
       </p:sp>
       <p:sp>
         <p:nvSpPr>
-          <p:cNvPr id="214" name=""/>
-          <p:cNvSpPr/>
-          <p:nvPr/>
-        </p:nvSpPr>
-        <p:spPr>
-          <a:xfrm>
-            <a:off x="8472600" y="5740560"/>
+          <p:cNvPr id="215" name=""/>
+          <p:cNvSpPr/>
+          <p:nvPr/>
+        </p:nvSpPr>
+        <p:spPr>
+          <a:xfrm>
+            <a:off x="8472600" y="5736600"/>
             <a:ext cx="46800" cy="46800"/>
           </a:xfrm>
           <a:custGeom>
@@ -11347,13 +11390,13 @@
       </p:sp>
       <p:sp>
         <p:nvSpPr>
-          <p:cNvPr id="215" name=""/>
-          <p:cNvSpPr/>
-          <p:nvPr/>
-        </p:nvSpPr>
-        <p:spPr>
-          <a:xfrm>
-            <a:off x="8472600" y="5740560"/>
+          <p:cNvPr id="216" name=""/>
+          <p:cNvSpPr/>
+          <p:nvPr/>
+        </p:nvSpPr>
+        <p:spPr>
+          <a:xfrm>
+            <a:off x="8472600" y="5736600"/>
             <a:ext cx="46800" cy="46800"/>
           </a:xfrm>
           <a:custGeom>
@@ -11404,7 +11447,7 @@
       </p:sp>
       <p:sp>
         <p:nvSpPr>
-          <p:cNvPr id="216" name=""/>
+          <p:cNvPr id="217" name=""/>
           <p:cNvSpPr/>
           <p:nvPr/>
         </p:nvSpPr>
@@ -11462,7 +11505,7 @@
       </p:sp>
       <p:sp>
         <p:nvSpPr>
-          <p:cNvPr id="217" name=""/>
+          <p:cNvPr id="218" name=""/>
           <p:cNvSpPr/>
           <p:nvPr/>
         </p:nvSpPr>
@@ -11519,14 +11562,14 @@
       </p:sp>
       <p:sp>
         <p:nvSpPr>
-          <p:cNvPr id="218" name=""/>
-          <p:cNvSpPr/>
-          <p:nvPr/>
-        </p:nvSpPr>
-        <p:spPr>
-          <a:xfrm>
-            <a:off x="5743440" y="4466160"/>
-            <a:ext cx="46440" cy="46440"/>
+          <p:cNvPr id="219" name=""/>
+          <p:cNvSpPr/>
+          <p:nvPr/>
+        </p:nvSpPr>
+        <p:spPr>
+          <a:xfrm>
+            <a:off x="5743440" y="4283280"/>
+            <a:ext cx="46440" cy="46080"/>
           </a:xfrm>
           <a:custGeom>
             <a:avLst/>
@@ -11534,19 +11577,19 @@
             <a:ahLst/>
             <a:rect l="0" t="0" r="r" b="b"/>
             <a:pathLst>
-              <a:path w="129" h="129">
+              <a:path w="129" h="128">
                 <a:moveTo>
-                  <a:pt x="0" y="65"/>
+                  <a:pt x="0" y="64"/>
                 </a:moveTo>
                 <a:cubicBezTo>
                   <a:pt x="0" y="-21"/>
                   <a:pt x="129" y="-21"/>
-                  <a:pt x="129" y="65"/>
-                </a:cubicBezTo>
-                <a:cubicBezTo>
-                  <a:pt x="129" y="151"/>
-                  <a:pt x="0" y="151"/>
-                  <a:pt x="0" y="65"/>
+                  <a:pt x="129" y="64"/>
+                </a:cubicBezTo>
+                <a:cubicBezTo>
+                  <a:pt x="129" y="150"/>
+                  <a:pt x="0" y="150"/>
+                  <a:pt x="0" y="64"/>
                 </a:cubicBezTo>
                 <a:close/>
               </a:path>
@@ -11577,14 +11620,14 @@
       </p:sp>
       <p:sp>
         <p:nvSpPr>
-          <p:cNvPr id="219" name=""/>
-          <p:cNvSpPr/>
-          <p:nvPr/>
-        </p:nvSpPr>
-        <p:spPr>
-          <a:xfrm>
-            <a:off x="5743440" y="4466160"/>
-            <a:ext cx="46440" cy="46440"/>
+          <p:cNvPr id="220" name=""/>
+          <p:cNvSpPr/>
+          <p:nvPr/>
+        </p:nvSpPr>
+        <p:spPr>
+          <a:xfrm>
+            <a:off x="5743440" y="4283280"/>
+            <a:ext cx="46440" cy="46080"/>
           </a:xfrm>
           <a:custGeom>
             <a:avLst/>
@@ -11592,19 +11635,19 @@
             <a:ahLst/>
             <a:rect l="0" t="0" r="r" b="b"/>
             <a:pathLst>
-              <a:path fill="none" w="129" h="129">
+              <a:path fill="none" w="129" h="128">
                 <a:moveTo>
-                  <a:pt x="129" y="65"/>
+                  <a:pt x="129" y="64"/>
                 </a:moveTo>
                 <a:cubicBezTo>
-                  <a:pt x="129" y="151"/>
-                  <a:pt x="0" y="151"/>
-                  <a:pt x="0" y="65"/>
+                  <a:pt x="129" y="150"/>
+                  <a:pt x="0" y="150"/>
+                  <a:pt x="0" y="64"/>
                 </a:cubicBezTo>
                 <a:cubicBezTo>
                   <a:pt x="0" y="-21"/>
                   <a:pt x="129" y="-21"/>
-                  <a:pt x="129" y="65"/>
+                  <a:pt x="129" y="64"/>
                 </a:cubicBezTo>
               </a:path>
             </a:pathLst>
@@ -11634,13 +11677,13 @@
       </p:sp>
       <p:sp>
         <p:nvSpPr>
-          <p:cNvPr id="220" name=""/>
-          <p:cNvSpPr/>
-          <p:nvPr/>
-        </p:nvSpPr>
-        <p:spPr>
-          <a:xfrm>
-            <a:off x="7108200" y="4694400"/>
+          <p:cNvPr id="221" name=""/>
+          <p:cNvSpPr/>
+          <p:nvPr/>
+        </p:nvSpPr>
+        <p:spPr>
+          <a:xfrm>
+            <a:off x="7108200" y="4717080"/>
             <a:ext cx="46440" cy="46440"/>
           </a:xfrm>
           <a:custGeom>
@@ -11651,17 +11694,17 @@
             <a:pathLst>
               <a:path w="129" h="129">
                 <a:moveTo>
-                  <a:pt x="0" y="64"/>
+                  <a:pt x="0" y="65"/>
                 </a:moveTo>
                 <a:cubicBezTo>
                   <a:pt x="0" y="-21"/>
                   <a:pt x="129" y="-21"/>
-                  <a:pt x="129" y="64"/>
+                  <a:pt x="129" y="65"/>
                 </a:cubicBezTo>
                 <a:cubicBezTo>
                   <a:pt x="129" y="151"/>
                   <a:pt x="0" y="151"/>
-                  <a:pt x="0" y="64"/>
+                  <a:pt x="0" y="65"/>
                 </a:cubicBezTo>
                 <a:close/>
               </a:path>
@@ -11692,13 +11735,13 @@
       </p:sp>
       <p:sp>
         <p:nvSpPr>
-          <p:cNvPr id="221" name=""/>
-          <p:cNvSpPr/>
-          <p:nvPr/>
-        </p:nvSpPr>
-        <p:spPr>
-          <a:xfrm>
-            <a:off x="7108200" y="4694400"/>
+          <p:cNvPr id="222" name=""/>
+          <p:cNvSpPr/>
+          <p:nvPr/>
+        </p:nvSpPr>
+        <p:spPr>
+          <a:xfrm>
+            <a:off x="7108200" y="4717080"/>
             <a:ext cx="46440" cy="46440"/>
           </a:xfrm>
           <a:custGeom>
@@ -11709,17 +11752,17 @@
             <a:pathLst>
               <a:path fill="none" w="129" h="129">
                 <a:moveTo>
-                  <a:pt x="129" y="64"/>
+                  <a:pt x="129" y="65"/>
                 </a:moveTo>
                 <a:cubicBezTo>
                   <a:pt x="129" y="151"/>
                   <a:pt x="0" y="151"/>
-                  <a:pt x="0" y="64"/>
+                  <a:pt x="0" y="65"/>
                 </a:cubicBezTo>
                 <a:cubicBezTo>
                   <a:pt x="0" y="-21"/>
                   <a:pt x="129" y="-21"/>
-                  <a:pt x="129" y="64"/>
+                  <a:pt x="129" y="65"/>
                 </a:cubicBezTo>
               </a:path>
             </a:pathLst>
@@ -11749,14 +11792,14 @@
       </p:sp>
       <p:sp>
         <p:nvSpPr>
-          <p:cNvPr id="222" name=""/>
-          <p:cNvSpPr/>
-          <p:nvPr/>
-        </p:nvSpPr>
-        <p:spPr>
-          <a:xfrm>
-            <a:off x="8472600" y="5694120"/>
-            <a:ext cx="46800" cy="46800"/>
+          <p:cNvPr id="223" name=""/>
+          <p:cNvSpPr/>
+          <p:nvPr/>
+        </p:nvSpPr>
+        <p:spPr>
+          <a:xfrm>
+            <a:off x="8472600" y="5662080"/>
+            <a:ext cx="46800" cy="46440"/>
           </a:xfrm>
           <a:custGeom>
             <a:avLst/>
@@ -11764,13 +11807,13 @@
             <a:ahLst/>
             <a:rect l="0" t="0" r="r" b="b"/>
             <a:pathLst>
-              <a:path w="130" h="130">
+              <a:path w="130" h="129">
                 <a:moveTo>
                   <a:pt x="0" y="65"/>
                 </a:moveTo>
                 <a:cubicBezTo>
-                  <a:pt x="0" y="-22"/>
-                  <a:pt x="130" y="-22"/>
+                  <a:pt x="0" y="-21"/>
+                  <a:pt x="130" y="-21"/>
                   <a:pt x="130" y="65"/>
                 </a:cubicBezTo>
                 <a:cubicBezTo>
@@ -11807,14 +11850,14 @@
       </p:sp>
       <p:sp>
         <p:nvSpPr>
-          <p:cNvPr id="223" name=""/>
-          <p:cNvSpPr/>
-          <p:nvPr/>
-        </p:nvSpPr>
-        <p:spPr>
-          <a:xfrm>
-            <a:off x="8472600" y="5694120"/>
-            <a:ext cx="46800" cy="46800"/>
+          <p:cNvPr id="224" name=""/>
+          <p:cNvSpPr/>
+          <p:nvPr/>
+        </p:nvSpPr>
+        <p:spPr>
+          <a:xfrm>
+            <a:off x="8472600" y="5662080"/>
+            <a:ext cx="46800" cy="46440"/>
           </a:xfrm>
           <a:custGeom>
             <a:avLst/>
@@ -11822,7 +11865,7 @@
             <a:ahLst/>
             <a:rect l="0" t="0" r="r" b="b"/>
             <a:pathLst>
-              <a:path fill="none" w="130" h="130">
+              <a:path fill="none" w="130" h="129">
                 <a:moveTo>
                   <a:pt x="130" y="65"/>
                 </a:moveTo>
@@ -11832,8 +11875,8 @@
                   <a:pt x="0" y="65"/>
                 </a:cubicBezTo>
                 <a:cubicBezTo>
-                  <a:pt x="0" y="-22"/>
-                  <a:pt x="130" y="-22"/>
+                  <a:pt x="0" y="-21"/>
+                  <a:pt x="130" y="-21"/>
                   <a:pt x="130" y="65"/>
                 </a:cubicBezTo>
               </a:path>
@@ -11864,7 +11907,7 @@
       </p:sp>
       <p:sp>
         <p:nvSpPr>
-          <p:cNvPr id="224" name=""/>
+          <p:cNvPr id="225" name=""/>
           <p:cNvSpPr/>
           <p:nvPr/>
         </p:nvSpPr>
@@ -11922,7 +11965,7 @@
       </p:sp>
       <p:sp>
         <p:nvSpPr>
-          <p:cNvPr id="225" name=""/>
+          <p:cNvPr id="226" name=""/>
           <p:cNvSpPr/>
           <p:nvPr/>
         </p:nvSpPr>
@@ -11979,7 +12022,7 @@
       </p:sp>
       <p:sp>
         <p:nvSpPr>
-          <p:cNvPr id="226" name=""/>
+          <p:cNvPr id="227" name=""/>
           <p:cNvSpPr/>
           <p:nvPr/>
         </p:nvSpPr>
@@ -12037,7 +12080,7 @@
       </p:sp>
       <p:sp>
         <p:nvSpPr>
-          <p:cNvPr id="227" name=""/>
+          <p:cNvPr id="228" name=""/>
           <p:cNvSpPr/>
           <p:nvPr/>
         </p:nvSpPr>
@@ -12094,14 +12137,14 @@
       </p:sp>
       <p:sp>
         <p:nvSpPr>
-          <p:cNvPr id="228" name=""/>
-          <p:cNvSpPr/>
-          <p:nvPr/>
-        </p:nvSpPr>
-        <p:spPr>
-          <a:xfrm>
-            <a:off x="7108200" y="4750200"/>
-            <a:ext cx="46440" cy="46080"/>
+          <p:cNvPr id="229" name=""/>
+          <p:cNvSpPr/>
+          <p:nvPr/>
+        </p:nvSpPr>
+        <p:spPr>
+          <a:xfrm>
+            <a:off x="7108200" y="4857840"/>
+            <a:ext cx="46440" cy="46800"/>
           </a:xfrm>
           <a:custGeom>
             <a:avLst/>
@@ -12109,18 +12152,18 @@
             <a:ahLst/>
             <a:rect l="0" t="0" r="r" b="b"/>
             <a:pathLst>
-              <a:path w="129" h="128">
+              <a:path w="129" h="130">
                 <a:moveTo>
                   <a:pt x="0" y="65"/>
                 </a:moveTo>
                 <a:cubicBezTo>
-                  <a:pt x="0" y="-21"/>
-                  <a:pt x="129" y="-21"/>
+                  <a:pt x="0" y="-22"/>
+                  <a:pt x="129" y="-22"/>
                   <a:pt x="129" y="65"/>
                 </a:cubicBezTo>
                 <a:cubicBezTo>
-                  <a:pt x="129" y="150"/>
-                  <a:pt x="0" y="150"/>
+                  <a:pt x="129" y="151"/>
+                  <a:pt x="0" y="151"/>
                   <a:pt x="0" y="65"/>
                 </a:cubicBezTo>
                 <a:close/>
@@ -12152,14 +12195,14 @@
       </p:sp>
       <p:sp>
         <p:nvSpPr>
-          <p:cNvPr id="229" name=""/>
-          <p:cNvSpPr/>
-          <p:nvPr/>
-        </p:nvSpPr>
-        <p:spPr>
-          <a:xfrm>
-            <a:off x="7108200" y="4750200"/>
-            <a:ext cx="46440" cy="46080"/>
+          <p:cNvPr id="230" name=""/>
+          <p:cNvSpPr/>
+          <p:nvPr/>
+        </p:nvSpPr>
+        <p:spPr>
+          <a:xfrm>
+            <a:off x="7108200" y="4857840"/>
+            <a:ext cx="46440" cy="46800"/>
           </a:xfrm>
           <a:custGeom>
             <a:avLst/>
@@ -12167,18 +12210,18 @@
             <a:ahLst/>
             <a:rect l="0" t="0" r="r" b="b"/>
             <a:pathLst>
-              <a:path fill="none" w="129" h="128">
+              <a:path fill="none" w="129" h="130">
                 <a:moveTo>
                   <a:pt x="129" y="65"/>
                 </a:moveTo>
                 <a:cubicBezTo>
-                  <a:pt x="129" y="150"/>
-                  <a:pt x="0" y="150"/>
+                  <a:pt x="129" y="151"/>
+                  <a:pt x="0" y="151"/>
                   <a:pt x="0" y="65"/>
                 </a:cubicBezTo>
                 <a:cubicBezTo>
-                  <a:pt x="0" y="-21"/>
-                  <a:pt x="129" y="-21"/>
+                  <a:pt x="0" y="-22"/>
+                  <a:pt x="129" y="-22"/>
                   <a:pt x="129" y="65"/>
                 </a:cubicBezTo>
               </a:path>
@@ -12209,13 +12252,13 @@
       </p:sp>
       <p:sp>
         <p:nvSpPr>
-          <p:cNvPr id="230" name=""/>
-          <p:cNvSpPr/>
-          <p:nvPr/>
-        </p:nvSpPr>
-        <p:spPr>
-          <a:xfrm>
-            <a:off x="8472600" y="5974920"/>
+          <p:cNvPr id="231" name=""/>
+          <p:cNvSpPr/>
+          <p:nvPr/>
+        </p:nvSpPr>
+        <p:spPr>
+          <a:xfrm>
+            <a:off x="8472600" y="5985720"/>
             <a:ext cx="46800" cy="46440"/>
           </a:xfrm>
           <a:custGeom>
@@ -12267,13 +12310,13 @@
       </p:sp>
       <p:sp>
         <p:nvSpPr>
-          <p:cNvPr id="231" name=""/>
-          <p:cNvSpPr/>
-          <p:nvPr/>
-        </p:nvSpPr>
-        <p:spPr>
-          <a:xfrm>
-            <a:off x="8472600" y="5974920"/>
+          <p:cNvPr id="232" name=""/>
+          <p:cNvSpPr/>
+          <p:nvPr/>
+        </p:nvSpPr>
+        <p:spPr>
+          <a:xfrm>
+            <a:off x="8472600" y="5985720"/>
             <a:ext cx="46800" cy="46440"/>
           </a:xfrm>
           <a:custGeom>
@@ -12324,7 +12367,7 @@
       </p:sp>
       <p:sp>
         <p:nvSpPr>
-          <p:cNvPr id="232" name=""/>
+          <p:cNvPr id="233" name=""/>
           <p:cNvSpPr/>
           <p:nvPr/>
         </p:nvSpPr>
@@ -12382,7 +12425,7 @@
       </p:sp>
       <p:sp>
         <p:nvSpPr>
-          <p:cNvPr id="233" name=""/>
+          <p:cNvPr id="234" name=""/>
           <p:cNvSpPr/>
           <p:nvPr/>
         </p:nvSpPr>
@@ -12439,7 +12482,7 @@
       </p:sp>
       <p:sp>
         <p:nvSpPr>
-          <p:cNvPr id="234" name=""/>
+          <p:cNvPr id="235" name=""/>
           <p:cNvSpPr/>
           <p:nvPr/>
         </p:nvSpPr>
@@ -12496,7 +12539,7 @@
       </p:sp>
       <p:sp>
         <p:nvSpPr>
-          <p:cNvPr id="235" name=""/>
+          <p:cNvPr id="236" name=""/>
           <p:cNvSpPr/>
           <p:nvPr/>
         </p:nvSpPr>
@@ -12553,7 +12596,7 @@
       </p:sp>
       <p:sp>
         <p:nvSpPr>
-          <p:cNvPr id="236" name=""/>
+          <p:cNvPr id="237" name=""/>
           <p:cNvSpPr/>
           <p:nvPr/>
         </p:nvSpPr>
@@ -12610,7 +12653,7 @@
       </p:sp>
       <p:sp>
         <p:nvSpPr>
-          <p:cNvPr id="237" name=""/>
+          <p:cNvPr id="238" name=""/>
           <p:cNvSpPr/>
           <p:nvPr/>
         </p:nvSpPr>
@@ -12653,7 +12696,7 @@
       </p:sp>
       <p:sp>
         <p:nvSpPr>
-          <p:cNvPr id="238" name=""/>
+          <p:cNvPr id="239" name=""/>
           <p:cNvSpPr txBox="1"/>
           <p:nvPr/>
         </p:nvSpPr>
@@ -12701,7 +12744,7 @@
       </p:sp>
       <p:sp>
         <p:nvSpPr>
-          <p:cNvPr id="239" name=""/>
+          <p:cNvPr id="240" name=""/>
           <p:cNvSpPr txBox="1"/>
           <p:nvPr/>
         </p:nvSpPr>
@@ -12749,13 +12792,13 @@
       </p:sp>
       <p:sp>
         <p:nvSpPr>
-          <p:cNvPr id="240" name=""/>
+          <p:cNvPr id="241" name=""/>
           <p:cNvSpPr txBox="1"/>
           <p:nvPr/>
         </p:nvSpPr>
         <p:spPr>
           <a:xfrm>
-            <a:off x="5454000" y="5714280"/>
+            <a:off x="5454000" y="5717160"/>
             <a:ext cx="101160" cy="102600"/>
           </a:xfrm>
           <a:prstGeom prst="rect">
@@ -12797,13 +12840,13 @@
       </p:sp>
       <p:sp>
         <p:nvSpPr>
-          <p:cNvPr id="241" name=""/>
+          <p:cNvPr id="242" name=""/>
           <p:cNvSpPr txBox="1"/>
           <p:nvPr/>
         </p:nvSpPr>
         <p:spPr>
           <a:xfrm>
-            <a:off x="5403240" y="5297760"/>
+            <a:off x="5403240" y="5303160"/>
             <a:ext cx="114120" cy="102600"/>
           </a:xfrm>
           <a:prstGeom prst="rect">
@@ -12845,13 +12888,13 @@
       </p:sp>
       <p:sp>
         <p:nvSpPr>
-          <p:cNvPr id="242" name=""/>
+          <p:cNvPr id="243" name=""/>
           <p:cNvSpPr txBox="1"/>
           <p:nvPr/>
         </p:nvSpPr>
         <p:spPr>
           <a:xfrm>
-            <a:off x="5403240" y="4880880"/>
+            <a:off x="5403240" y="4889160"/>
             <a:ext cx="114120" cy="102600"/>
           </a:xfrm>
           <a:prstGeom prst="rect">
@@ -12893,443 +12936,13 @@
       </p:sp>
       <p:sp>
         <p:nvSpPr>
-          <p:cNvPr id="243" name=""/>
-          <p:cNvSpPr/>
-          <p:nvPr/>
-        </p:nvSpPr>
-        <p:spPr>
-          <a:xfrm>
-            <a:off x="5529960" y="6181560"/>
-            <a:ext cx="31680" cy="0"/>
-          </a:xfrm>
-          <a:prstGeom prst="line">
-            <a:avLst/>
-          </a:prstGeom>
-          <a:ln w="7920">
-            <a:solidFill>
-              <a:srgbClr val="333333"/>
-            </a:solidFill>
-            <a:round/>
-          </a:ln>
-        </p:spPr>
-        <p:style>
-          <a:lnRef idx="0"/>
-          <a:fillRef idx="0"/>
-          <a:effectRef idx="0"/>
-          <a:fontRef idx="minor"/>
-        </p:style>
-        <p:txBody>
-          <a:bodyPr lIns="3960" tIns="-3960" rIns="3960" bIns="-3960" anchor="t">
-            <a:noAutofit/>
-          </a:bodyPr>
-          <a:p>
-            <a:endParaRPr lang="en-US" sz="2400" b="0" u="none" strike="noStrike">
-              <a:solidFill>
-                <a:srgbClr val="000000"/>
-              </a:solidFill>
-              <a:effectLst/>
-              <a:uFillTx/>
-              <a:latin typeface="Times New Roman"/>
-            </a:endParaRPr>
-          </a:p>
-        </p:txBody>
-      </p:sp>
-      <p:sp>
-        <p:nvSpPr>
           <p:cNvPr id="244" name=""/>
-          <p:cNvSpPr/>
-          <p:nvPr/>
-        </p:nvSpPr>
-        <p:spPr>
-          <a:xfrm>
-            <a:off x="5529960" y="5765040"/>
-            <a:ext cx="31680" cy="0"/>
-          </a:xfrm>
-          <a:prstGeom prst="line">
-            <a:avLst/>
-          </a:prstGeom>
-          <a:ln w="7920">
-            <a:solidFill>
-              <a:srgbClr val="333333"/>
-            </a:solidFill>
-            <a:round/>
-          </a:ln>
-        </p:spPr>
-        <p:style>
-          <a:lnRef idx="0"/>
-          <a:fillRef idx="0"/>
-          <a:effectRef idx="0"/>
-          <a:fontRef idx="minor"/>
-        </p:style>
-        <p:txBody>
-          <a:bodyPr lIns="3960" tIns="-3960" rIns="3960" bIns="-3960" anchor="t">
-            <a:noAutofit/>
-          </a:bodyPr>
-          <a:p>
-            <a:endParaRPr lang="en-US" sz="2400" b="0" u="none" strike="noStrike">
-              <a:solidFill>
-                <a:srgbClr val="000000"/>
-              </a:solidFill>
-              <a:effectLst/>
-              <a:uFillTx/>
-              <a:latin typeface="Times New Roman"/>
-            </a:endParaRPr>
-          </a:p>
-        </p:txBody>
-      </p:sp>
-      <p:sp>
-        <p:nvSpPr>
-          <p:cNvPr id="245" name=""/>
-          <p:cNvSpPr/>
-          <p:nvPr/>
-        </p:nvSpPr>
-        <p:spPr>
-          <a:xfrm>
-            <a:off x="5529960" y="5348160"/>
-            <a:ext cx="31680" cy="0"/>
-          </a:xfrm>
-          <a:prstGeom prst="line">
-            <a:avLst/>
-          </a:prstGeom>
-          <a:ln w="7920">
-            <a:solidFill>
-              <a:srgbClr val="333333"/>
-            </a:solidFill>
-            <a:round/>
-          </a:ln>
-        </p:spPr>
-        <p:style>
-          <a:lnRef idx="0"/>
-          <a:fillRef idx="0"/>
-          <a:effectRef idx="0"/>
-          <a:fontRef idx="minor"/>
-        </p:style>
-        <p:txBody>
-          <a:bodyPr lIns="3960" tIns="-3960" rIns="3960" bIns="-3960" anchor="t">
-            <a:noAutofit/>
-          </a:bodyPr>
-          <a:p>
-            <a:endParaRPr lang="en-US" sz="2400" b="0" u="none" strike="noStrike">
-              <a:solidFill>
-                <a:srgbClr val="000000"/>
-              </a:solidFill>
-              <a:effectLst/>
-              <a:uFillTx/>
-              <a:latin typeface="Times New Roman"/>
-            </a:endParaRPr>
-          </a:p>
-        </p:txBody>
-      </p:sp>
-      <p:sp>
-        <p:nvSpPr>
-          <p:cNvPr id="246" name=""/>
-          <p:cNvSpPr/>
-          <p:nvPr/>
-        </p:nvSpPr>
-        <p:spPr>
-          <a:xfrm>
-            <a:off x="5529960" y="4931640"/>
-            <a:ext cx="31680" cy="0"/>
-          </a:xfrm>
-          <a:prstGeom prst="line">
-            <a:avLst/>
-          </a:prstGeom>
-          <a:ln w="7920">
-            <a:solidFill>
-              <a:srgbClr val="333333"/>
-            </a:solidFill>
-            <a:round/>
-          </a:ln>
-        </p:spPr>
-        <p:style>
-          <a:lnRef idx="0"/>
-          <a:fillRef idx="0"/>
-          <a:effectRef idx="0"/>
-          <a:fontRef idx="minor"/>
-        </p:style>
-        <p:txBody>
-          <a:bodyPr lIns="3960" tIns="-3960" rIns="3960" bIns="-3960" anchor="t">
-            <a:noAutofit/>
-          </a:bodyPr>
-          <a:p>
-            <a:endParaRPr lang="en-US" sz="2400" b="0" u="none" strike="noStrike">
-              <a:solidFill>
-                <a:srgbClr val="000000"/>
-              </a:solidFill>
-              <a:effectLst/>
-              <a:uFillTx/>
-              <a:latin typeface="Times New Roman"/>
-            </a:endParaRPr>
-          </a:p>
-        </p:txBody>
-      </p:sp>
-      <p:sp>
-        <p:nvSpPr>
-          <p:cNvPr id="247" name=""/>
-          <p:cNvSpPr/>
-          <p:nvPr/>
-        </p:nvSpPr>
-        <p:spPr>
-          <a:xfrm>
-            <a:off x="5529960" y="4514760"/>
-            <a:ext cx="31680" cy="0"/>
-          </a:xfrm>
-          <a:prstGeom prst="line">
-            <a:avLst/>
-          </a:prstGeom>
-          <a:ln w="7920">
-            <a:solidFill>
-              <a:srgbClr val="333333"/>
-            </a:solidFill>
-            <a:round/>
-          </a:ln>
-        </p:spPr>
-        <p:style>
-          <a:lnRef idx="0"/>
-          <a:fillRef idx="0"/>
-          <a:effectRef idx="0"/>
-          <a:fontRef idx="minor"/>
-        </p:style>
-        <p:txBody>
-          <a:bodyPr lIns="3960" tIns="-3960" rIns="3960" bIns="-3960" anchor="t">
-            <a:noAutofit/>
-          </a:bodyPr>
-          <a:p>
-            <a:endParaRPr lang="en-US" sz="2400" b="0" u="none" strike="noStrike">
-              <a:solidFill>
-                <a:srgbClr val="000000"/>
-              </a:solidFill>
-              <a:effectLst/>
-              <a:uFillTx/>
-              <a:latin typeface="Times New Roman"/>
-            </a:endParaRPr>
-          </a:p>
-        </p:txBody>
-      </p:sp>
-      <p:sp>
-        <p:nvSpPr>
-          <p:cNvPr id="248" name=""/>
-          <p:cNvSpPr/>
-          <p:nvPr/>
-        </p:nvSpPr>
-        <p:spPr>
-          <a:xfrm>
-            <a:off x="5561640" y="6280920"/>
-            <a:ext cx="4503600" cy="0"/>
-          </a:xfrm>
-          <a:prstGeom prst="line">
-            <a:avLst/>
-          </a:prstGeom>
-          <a:ln cap="sq" w="9360">
-            <a:solidFill>
-              <a:srgbClr val="333333"/>
-            </a:solidFill>
-            <a:round/>
-          </a:ln>
-        </p:spPr>
-        <p:style>
-          <a:lnRef idx="0"/>
-          <a:fillRef idx="0"/>
-          <a:effectRef idx="0"/>
-          <a:fontRef idx="minor"/>
-        </p:style>
-        <p:txBody>
-          <a:bodyPr lIns="4680" tIns="-4680" rIns="4680" bIns="-4680" anchor="t">
-            <a:noAutofit/>
-          </a:bodyPr>
-          <a:p>
-            <a:endParaRPr lang="en-US" sz="2400" b="0" u="none" strike="noStrike">
-              <a:solidFill>
-                <a:srgbClr val="000000"/>
-              </a:solidFill>
-              <a:effectLst/>
-              <a:uFillTx/>
-              <a:latin typeface="Times New Roman"/>
-            </a:endParaRPr>
-          </a:p>
-        </p:txBody>
-      </p:sp>
-      <p:sp>
-        <p:nvSpPr>
-          <p:cNvPr id="249" name=""/>
-          <p:cNvSpPr/>
-          <p:nvPr/>
-        </p:nvSpPr>
-        <p:spPr>
-          <a:xfrm flipV="1">
-            <a:off x="5766480" y="6280920"/>
-            <a:ext cx="0" cy="31680"/>
-          </a:xfrm>
-          <a:prstGeom prst="line">
-            <a:avLst/>
-          </a:prstGeom>
-          <a:ln w="7920">
-            <a:solidFill>
-              <a:srgbClr val="333333"/>
-            </a:solidFill>
-            <a:round/>
-          </a:ln>
-        </p:spPr>
-        <p:style>
-          <a:lnRef idx="0"/>
-          <a:fillRef idx="0"/>
-          <a:effectRef idx="0"/>
-          <a:fontRef idx="minor"/>
-        </p:style>
-        <p:txBody>
-          <a:bodyPr lIns="3960" tIns="3960" rIns="3960" bIns="3960" anchor="t">
-            <a:noAutofit/>
-          </a:bodyPr>
-          <a:p>
-            <a:endParaRPr lang="en-US" sz="2400" b="0" u="none" strike="noStrike">
-              <a:solidFill>
-                <a:srgbClr val="000000"/>
-              </a:solidFill>
-              <a:effectLst/>
-              <a:uFillTx/>
-              <a:latin typeface="Times New Roman"/>
-            </a:endParaRPr>
-          </a:p>
-        </p:txBody>
-      </p:sp>
-      <p:sp>
-        <p:nvSpPr>
-          <p:cNvPr id="250" name=""/>
-          <p:cNvSpPr/>
-          <p:nvPr/>
-        </p:nvSpPr>
-        <p:spPr>
-          <a:xfrm flipV="1">
-            <a:off x="7131240" y="6280920"/>
-            <a:ext cx="0" cy="31680"/>
-          </a:xfrm>
-          <a:prstGeom prst="line">
-            <a:avLst/>
-          </a:prstGeom>
-          <a:ln w="7920">
-            <a:solidFill>
-              <a:srgbClr val="333333"/>
-            </a:solidFill>
-            <a:round/>
-          </a:ln>
-        </p:spPr>
-        <p:style>
-          <a:lnRef idx="0"/>
-          <a:fillRef idx="0"/>
-          <a:effectRef idx="0"/>
-          <a:fontRef idx="minor"/>
-        </p:style>
-        <p:txBody>
-          <a:bodyPr lIns="3960" tIns="3960" rIns="3960" bIns="3960" anchor="t">
-            <a:noAutofit/>
-          </a:bodyPr>
-          <a:p>
-            <a:endParaRPr lang="en-US" sz="2400" b="0" u="none" strike="noStrike">
-              <a:solidFill>
-                <a:srgbClr val="000000"/>
-              </a:solidFill>
-              <a:effectLst/>
-              <a:uFillTx/>
-              <a:latin typeface="Times New Roman"/>
-            </a:endParaRPr>
-          </a:p>
-        </p:txBody>
-      </p:sp>
-      <p:sp>
-        <p:nvSpPr>
-          <p:cNvPr id="251" name=""/>
-          <p:cNvSpPr/>
-          <p:nvPr/>
-        </p:nvSpPr>
-        <p:spPr>
-          <a:xfrm flipV="1">
-            <a:off x="8496000" y="6280920"/>
-            <a:ext cx="0" cy="31680"/>
-          </a:xfrm>
-          <a:prstGeom prst="line">
-            <a:avLst/>
-          </a:prstGeom>
-          <a:ln w="7920">
-            <a:solidFill>
-              <a:srgbClr val="333333"/>
-            </a:solidFill>
-            <a:round/>
-          </a:ln>
-        </p:spPr>
-        <p:style>
-          <a:lnRef idx="0"/>
-          <a:fillRef idx="0"/>
-          <a:effectRef idx="0"/>
-          <a:fontRef idx="minor"/>
-        </p:style>
-        <p:txBody>
-          <a:bodyPr lIns="3960" tIns="3960" rIns="3960" bIns="3960" anchor="t">
-            <a:noAutofit/>
-          </a:bodyPr>
-          <a:p>
-            <a:endParaRPr lang="en-US" sz="2400" b="0" u="none" strike="noStrike">
-              <a:solidFill>
-                <a:srgbClr val="000000"/>
-              </a:solidFill>
-              <a:effectLst/>
-              <a:uFillTx/>
-              <a:latin typeface="Times New Roman"/>
-            </a:endParaRPr>
-          </a:p>
-        </p:txBody>
-      </p:sp>
-      <p:sp>
-        <p:nvSpPr>
-          <p:cNvPr id="252" name=""/>
-          <p:cNvSpPr/>
-          <p:nvPr/>
-        </p:nvSpPr>
-        <p:spPr>
-          <a:xfrm flipV="1">
-            <a:off x="9860400" y="6280920"/>
-            <a:ext cx="0" cy="31680"/>
-          </a:xfrm>
-          <a:prstGeom prst="line">
-            <a:avLst/>
-          </a:prstGeom>
-          <a:ln w="7920">
-            <a:solidFill>
-              <a:srgbClr val="333333"/>
-            </a:solidFill>
-            <a:round/>
-          </a:ln>
-        </p:spPr>
-        <p:style>
-          <a:lnRef idx="0"/>
-          <a:fillRef idx="0"/>
-          <a:effectRef idx="0"/>
-          <a:fontRef idx="minor"/>
-        </p:style>
-        <p:txBody>
-          <a:bodyPr lIns="3960" tIns="3960" rIns="3960" bIns="3960" anchor="t">
-            <a:noAutofit/>
-          </a:bodyPr>
-          <a:p>
-            <a:endParaRPr lang="en-US" sz="2400" b="0" u="none" strike="noStrike">
-              <a:solidFill>
-                <a:srgbClr val="000000"/>
-              </a:solidFill>
-              <a:effectLst/>
-              <a:uFillTx/>
-              <a:latin typeface="Times New Roman"/>
-            </a:endParaRPr>
-          </a:p>
-        </p:txBody>
-      </p:sp>
-      <p:sp>
-        <p:nvSpPr>
-          <p:cNvPr id="253" name=""/>
           <p:cNvSpPr txBox="1"/>
           <p:nvPr/>
         </p:nvSpPr>
         <p:spPr>
           <a:xfrm>
-            <a:off x="5403240" y="4464360"/>
+            <a:off x="5403240" y="4475160"/>
             <a:ext cx="114120" cy="102600"/>
           </a:xfrm>
           <a:prstGeom prst="rect">
@@ -13371,7 +12984,528 @@
       </p:sp>
       <p:sp>
         <p:nvSpPr>
+          <p:cNvPr id="245" name=""/>
+          <p:cNvSpPr/>
+          <p:nvPr/>
+        </p:nvSpPr>
+        <p:spPr>
+          <a:xfrm>
+            <a:off x="5529960" y="6181560"/>
+            <a:ext cx="31680" cy="0"/>
+          </a:xfrm>
+          <a:prstGeom prst="line">
+            <a:avLst/>
+          </a:prstGeom>
+          <a:ln w="7920">
+            <a:solidFill>
+              <a:srgbClr val="333333"/>
+            </a:solidFill>
+            <a:round/>
+          </a:ln>
+        </p:spPr>
+        <p:style>
+          <a:lnRef idx="0"/>
+          <a:fillRef idx="0"/>
+          <a:effectRef idx="0"/>
+          <a:fontRef idx="minor"/>
+        </p:style>
+        <p:txBody>
+          <a:bodyPr lIns="3960" tIns="-3960" rIns="3960" bIns="-3960" anchor="t">
+            <a:noAutofit/>
+          </a:bodyPr>
+          <a:p>
+            <a:endParaRPr lang="en-US" sz="2400" b="0" u="none" strike="noStrike">
+              <a:solidFill>
+                <a:srgbClr val="000000"/>
+              </a:solidFill>
+              <a:effectLst/>
+              <a:uFillTx/>
+              <a:latin typeface="Times New Roman"/>
+            </a:endParaRPr>
+          </a:p>
+        </p:txBody>
+      </p:sp>
+      <p:sp>
+        <p:nvSpPr>
+          <p:cNvPr id="246" name=""/>
+          <p:cNvSpPr/>
+          <p:nvPr/>
+        </p:nvSpPr>
+        <p:spPr>
+          <a:xfrm>
+            <a:off x="5529960" y="5767560"/>
+            <a:ext cx="31680" cy="0"/>
+          </a:xfrm>
+          <a:prstGeom prst="line">
+            <a:avLst/>
+          </a:prstGeom>
+          <a:ln w="7920">
+            <a:solidFill>
+              <a:srgbClr val="333333"/>
+            </a:solidFill>
+            <a:round/>
+          </a:ln>
+        </p:spPr>
+        <p:style>
+          <a:lnRef idx="0"/>
+          <a:fillRef idx="0"/>
+          <a:effectRef idx="0"/>
+          <a:fontRef idx="minor"/>
+        </p:style>
+        <p:txBody>
+          <a:bodyPr lIns="3960" tIns="-3960" rIns="3960" bIns="-3960" anchor="t">
+            <a:noAutofit/>
+          </a:bodyPr>
+          <a:p>
+            <a:endParaRPr lang="en-US" sz="2400" b="0" u="none" strike="noStrike">
+              <a:solidFill>
+                <a:srgbClr val="000000"/>
+              </a:solidFill>
+              <a:effectLst/>
+              <a:uFillTx/>
+              <a:latin typeface="Times New Roman"/>
+            </a:endParaRPr>
+          </a:p>
+        </p:txBody>
+      </p:sp>
+      <p:sp>
+        <p:nvSpPr>
+          <p:cNvPr id="247" name=""/>
+          <p:cNvSpPr/>
+          <p:nvPr/>
+        </p:nvSpPr>
+        <p:spPr>
+          <a:xfrm>
+            <a:off x="5529960" y="5353920"/>
+            <a:ext cx="31680" cy="0"/>
+          </a:xfrm>
+          <a:prstGeom prst="line">
+            <a:avLst/>
+          </a:prstGeom>
+          <a:ln w="7920">
+            <a:solidFill>
+              <a:srgbClr val="333333"/>
+            </a:solidFill>
+            <a:round/>
+          </a:ln>
+        </p:spPr>
+        <p:style>
+          <a:lnRef idx="0"/>
+          <a:fillRef idx="0"/>
+          <a:effectRef idx="0"/>
+          <a:fontRef idx="minor"/>
+        </p:style>
+        <p:txBody>
+          <a:bodyPr lIns="3960" tIns="-3960" rIns="3960" bIns="-3960" anchor="t">
+            <a:noAutofit/>
+          </a:bodyPr>
+          <a:p>
+            <a:endParaRPr lang="en-US" sz="2400" b="0" u="none" strike="noStrike">
+              <a:solidFill>
+                <a:srgbClr val="000000"/>
+              </a:solidFill>
+              <a:effectLst/>
+              <a:uFillTx/>
+              <a:latin typeface="Times New Roman"/>
+            </a:endParaRPr>
+          </a:p>
+        </p:txBody>
+      </p:sp>
+      <p:sp>
+        <p:nvSpPr>
+          <p:cNvPr id="248" name=""/>
+          <p:cNvSpPr/>
+          <p:nvPr/>
+        </p:nvSpPr>
+        <p:spPr>
+          <a:xfrm>
+            <a:off x="5529960" y="4939920"/>
+            <a:ext cx="31680" cy="0"/>
+          </a:xfrm>
+          <a:prstGeom prst="line">
+            <a:avLst/>
+          </a:prstGeom>
+          <a:ln w="7920">
+            <a:solidFill>
+              <a:srgbClr val="333333"/>
+            </a:solidFill>
+            <a:round/>
+          </a:ln>
+        </p:spPr>
+        <p:style>
+          <a:lnRef idx="0"/>
+          <a:fillRef idx="0"/>
+          <a:effectRef idx="0"/>
+          <a:fontRef idx="minor"/>
+        </p:style>
+        <p:txBody>
+          <a:bodyPr lIns="3960" tIns="-3960" rIns="3960" bIns="-3960" anchor="t">
+            <a:noAutofit/>
+          </a:bodyPr>
+          <a:p>
+            <a:endParaRPr lang="en-US" sz="2400" b="0" u="none" strike="noStrike">
+              <a:solidFill>
+                <a:srgbClr val="000000"/>
+              </a:solidFill>
+              <a:effectLst/>
+              <a:uFillTx/>
+              <a:latin typeface="Times New Roman"/>
+            </a:endParaRPr>
+          </a:p>
+        </p:txBody>
+      </p:sp>
+      <p:sp>
+        <p:nvSpPr>
+          <p:cNvPr id="249" name=""/>
+          <p:cNvSpPr/>
+          <p:nvPr/>
+        </p:nvSpPr>
+        <p:spPr>
+          <a:xfrm>
+            <a:off x="5529960" y="4525920"/>
+            <a:ext cx="31680" cy="0"/>
+          </a:xfrm>
+          <a:prstGeom prst="line">
+            <a:avLst/>
+          </a:prstGeom>
+          <a:ln w="7920">
+            <a:solidFill>
+              <a:srgbClr val="333333"/>
+            </a:solidFill>
+            <a:round/>
+          </a:ln>
+        </p:spPr>
+        <p:style>
+          <a:lnRef idx="0"/>
+          <a:fillRef idx="0"/>
+          <a:effectRef idx="0"/>
+          <a:fontRef idx="minor"/>
+        </p:style>
+        <p:txBody>
+          <a:bodyPr lIns="3960" tIns="-3960" rIns="3960" bIns="-3960" anchor="t">
+            <a:noAutofit/>
+          </a:bodyPr>
+          <a:p>
+            <a:endParaRPr lang="en-US" sz="2400" b="0" u="none" strike="noStrike">
+              <a:solidFill>
+                <a:srgbClr val="000000"/>
+              </a:solidFill>
+              <a:effectLst/>
+              <a:uFillTx/>
+              <a:latin typeface="Times New Roman"/>
+            </a:endParaRPr>
+          </a:p>
+        </p:txBody>
+      </p:sp>
+      <p:sp>
+        <p:nvSpPr>
+          <p:cNvPr id="250" name=""/>
+          <p:cNvSpPr/>
+          <p:nvPr/>
+        </p:nvSpPr>
+        <p:spPr>
+          <a:xfrm>
+            <a:off x="5529960" y="4111920"/>
+            <a:ext cx="31680" cy="0"/>
+          </a:xfrm>
+          <a:prstGeom prst="line">
+            <a:avLst/>
+          </a:prstGeom>
+          <a:ln w="7920">
+            <a:solidFill>
+              <a:srgbClr val="333333"/>
+            </a:solidFill>
+            <a:round/>
+          </a:ln>
+        </p:spPr>
+        <p:style>
+          <a:lnRef idx="0"/>
+          <a:fillRef idx="0"/>
+          <a:effectRef idx="0"/>
+          <a:fontRef idx="minor"/>
+        </p:style>
+        <p:txBody>
+          <a:bodyPr lIns="3960" tIns="-3960" rIns="3960" bIns="-3960" anchor="t">
+            <a:noAutofit/>
+          </a:bodyPr>
+          <a:p>
+            <a:endParaRPr lang="en-US" sz="2400" b="0" u="none" strike="noStrike">
+              <a:solidFill>
+                <a:srgbClr val="000000"/>
+              </a:solidFill>
+              <a:effectLst/>
+              <a:uFillTx/>
+              <a:latin typeface="Times New Roman"/>
+            </a:endParaRPr>
+          </a:p>
+        </p:txBody>
+      </p:sp>
+      <p:sp>
+        <p:nvSpPr>
+          <p:cNvPr id="251" name=""/>
+          <p:cNvSpPr/>
+          <p:nvPr/>
+        </p:nvSpPr>
+        <p:spPr>
+          <a:xfrm>
+            <a:off x="5561640" y="6280920"/>
+            <a:ext cx="4503600" cy="0"/>
+          </a:xfrm>
+          <a:prstGeom prst="line">
+            <a:avLst/>
+          </a:prstGeom>
+          <a:ln cap="sq" w="9360">
+            <a:solidFill>
+              <a:srgbClr val="333333"/>
+            </a:solidFill>
+            <a:round/>
+          </a:ln>
+        </p:spPr>
+        <p:style>
+          <a:lnRef idx="0"/>
+          <a:fillRef idx="0"/>
+          <a:effectRef idx="0"/>
+          <a:fontRef idx="minor"/>
+        </p:style>
+        <p:txBody>
+          <a:bodyPr lIns="4680" tIns="-4680" rIns="4680" bIns="-4680" anchor="t">
+            <a:noAutofit/>
+          </a:bodyPr>
+          <a:p>
+            <a:endParaRPr lang="en-US" sz="2400" b="0" u="none" strike="noStrike">
+              <a:solidFill>
+                <a:srgbClr val="000000"/>
+              </a:solidFill>
+              <a:effectLst/>
+              <a:uFillTx/>
+              <a:latin typeface="Times New Roman"/>
+            </a:endParaRPr>
+          </a:p>
+        </p:txBody>
+      </p:sp>
+      <p:sp>
+        <p:nvSpPr>
+          <p:cNvPr id="252" name=""/>
+          <p:cNvSpPr/>
+          <p:nvPr/>
+        </p:nvSpPr>
+        <p:spPr>
+          <a:xfrm flipV="1">
+            <a:off x="5766480" y="6280920"/>
+            <a:ext cx="0" cy="31680"/>
+          </a:xfrm>
+          <a:prstGeom prst="line">
+            <a:avLst/>
+          </a:prstGeom>
+          <a:ln w="7920">
+            <a:solidFill>
+              <a:srgbClr val="333333"/>
+            </a:solidFill>
+            <a:round/>
+          </a:ln>
+        </p:spPr>
+        <p:style>
+          <a:lnRef idx="0"/>
+          <a:fillRef idx="0"/>
+          <a:effectRef idx="0"/>
+          <a:fontRef idx="minor"/>
+        </p:style>
+        <p:txBody>
+          <a:bodyPr lIns="3960" tIns="3960" rIns="3960" bIns="3960" anchor="t">
+            <a:noAutofit/>
+          </a:bodyPr>
+          <a:p>
+            <a:endParaRPr lang="en-US" sz="2400" b="0" u="none" strike="noStrike">
+              <a:solidFill>
+                <a:srgbClr val="000000"/>
+              </a:solidFill>
+              <a:effectLst/>
+              <a:uFillTx/>
+              <a:latin typeface="Times New Roman"/>
+            </a:endParaRPr>
+          </a:p>
+        </p:txBody>
+      </p:sp>
+      <p:sp>
+        <p:nvSpPr>
+          <p:cNvPr id="253" name=""/>
+          <p:cNvSpPr/>
+          <p:nvPr/>
+        </p:nvSpPr>
+        <p:spPr>
+          <a:xfrm flipV="1">
+            <a:off x="7131240" y="6280920"/>
+            <a:ext cx="0" cy="31680"/>
+          </a:xfrm>
+          <a:prstGeom prst="line">
+            <a:avLst/>
+          </a:prstGeom>
+          <a:ln w="7920">
+            <a:solidFill>
+              <a:srgbClr val="333333"/>
+            </a:solidFill>
+            <a:round/>
+          </a:ln>
+        </p:spPr>
+        <p:style>
+          <a:lnRef idx="0"/>
+          <a:fillRef idx="0"/>
+          <a:effectRef idx="0"/>
+          <a:fontRef idx="minor"/>
+        </p:style>
+        <p:txBody>
+          <a:bodyPr lIns="3960" tIns="3960" rIns="3960" bIns="3960" anchor="t">
+            <a:noAutofit/>
+          </a:bodyPr>
+          <a:p>
+            <a:endParaRPr lang="en-US" sz="2400" b="0" u="none" strike="noStrike">
+              <a:solidFill>
+                <a:srgbClr val="000000"/>
+              </a:solidFill>
+              <a:effectLst/>
+              <a:uFillTx/>
+              <a:latin typeface="Times New Roman"/>
+            </a:endParaRPr>
+          </a:p>
+        </p:txBody>
+      </p:sp>
+      <p:sp>
+        <p:nvSpPr>
           <p:cNvPr id="254" name=""/>
+          <p:cNvSpPr/>
+          <p:nvPr/>
+        </p:nvSpPr>
+        <p:spPr>
+          <a:xfrm flipV="1">
+            <a:off x="8496000" y="6280920"/>
+            <a:ext cx="0" cy="31680"/>
+          </a:xfrm>
+          <a:prstGeom prst="line">
+            <a:avLst/>
+          </a:prstGeom>
+          <a:ln w="7920">
+            <a:solidFill>
+              <a:srgbClr val="333333"/>
+            </a:solidFill>
+            <a:round/>
+          </a:ln>
+        </p:spPr>
+        <p:style>
+          <a:lnRef idx="0"/>
+          <a:fillRef idx="0"/>
+          <a:effectRef idx="0"/>
+          <a:fontRef idx="minor"/>
+        </p:style>
+        <p:txBody>
+          <a:bodyPr lIns="3960" tIns="3960" rIns="3960" bIns="3960" anchor="t">
+            <a:noAutofit/>
+          </a:bodyPr>
+          <a:p>
+            <a:endParaRPr lang="en-US" sz="2400" b="0" u="none" strike="noStrike">
+              <a:solidFill>
+                <a:srgbClr val="000000"/>
+              </a:solidFill>
+              <a:effectLst/>
+              <a:uFillTx/>
+              <a:latin typeface="Times New Roman"/>
+            </a:endParaRPr>
+          </a:p>
+        </p:txBody>
+      </p:sp>
+      <p:sp>
+        <p:nvSpPr>
+          <p:cNvPr id="255" name=""/>
+          <p:cNvSpPr/>
+          <p:nvPr/>
+        </p:nvSpPr>
+        <p:spPr>
+          <a:xfrm flipV="1">
+            <a:off x="9860400" y="6280920"/>
+            <a:ext cx="0" cy="31680"/>
+          </a:xfrm>
+          <a:prstGeom prst="line">
+            <a:avLst/>
+          </a:prstGeom>
+          <a:ln w="7920">
+            <a:solidFill>
+              <a:srgbClr val="333333"/>
+            </a:solidFill>
+            <a:round/>
+          </a:ln>
+        </p:spPr>
+        <p:style>
+          <a:lnRef idx="0"/>
+          <a:fillRef idx="0"/>
+          <a:effectRef idx="0"/>
+          <a:fontRef idx="minor"/>
+        </p:style>
+        <p:txBody>
+          <a:bodyPr lIns="3960" tIns="3960" rIns="3960" bIns="3960" anchor="t">
+            <a:noAutofit/>
+          </a:bodyPr>
+          <a:p>
+            <a:endParaRPr lang="en-US" sz="2400" b="0" u="none" strike="noStrike">
+              <a:solidFill>
+                <a:srgbClr val="000000"/>
+              </a:solidFill>
+              <a:effectLst/>
+              <a:uFillTx/>
+              <a:latin typeface="Times New Roman"/>
+            </a:endParaRPr>
+          </a:p>
+        </p:txBody>
+      </p:sp>
+      <p:sp>
+        <p:nvSpPr>
+          <p:cNvPr id="256" name=""/>
+          <p:cNvSpPr txBox="1"/>
+          <p:nvPr/>
+        </p:nvSpPr>
+        <p:spPr>
+          <a:xfrm>
+            <a:off x="5403240" y="4061160"/>
+            <a:ext cx="114120" cy="102600"/>
+          </a:xfrm>
+          <a:prstGeom prst="rect">
+            <a:avLst/>
+          </a:prstGeom>
+          <a:noFill/>
+          <a:ln w="0">
+            <a:noFill/>
+          </a:ln>
+        </p:spPr>
+        <p:txBody>
+          <a:bodyPr wrap="none" lIns="0" tIns="0" rIns="0" bIns="0" anchor="t">
+            <a:spAutoFit/>
+          </a:bodyPr>
+          <a:p>
+            <a:pPr/>
+            <a:r>
+              <a:rPr lang="en-US" sz="800" b="0" u="none" strike="noStrike">
+                <a:solidFill>
+                  <a:srgbClr val="262626"/>
+                </a:solidFill>
+                <a:effectLst/>
+                <a:uFillTx/>
+                <a:latin typeface="Arial"/>
+                <a:ea typeface="Arial"/>
+              </a:rPr>
+              <a:t>25</a:t>
+            </a:r>
+            <a:endParaRPr lang="en-US" sz="800" b="0" u="none" strike="noStrike">
+              <a:solidFill>
+                <a:srgbClr val="000000"/>
+              </a:solidFill>
+              <a:effectLst/>
+              <a:uFillTx/>
+              <a:latin typeface="Times New Roman"/>
+            </a:endParaRPr>
+          </a:p>
+        </p:txBody>
+      </p:sp>
+      <p:sp>
+        <p:nvSpPr>
+          <p:cNvPr id="257" name=""/>
           <p:cNvSpPr txBox="1"/>
           <p:nvPr/>
         </p:nvSpPr>
@@ -13419,7 +13553,7 @@
       </p:sp>
       <p:sp>
         <p:nvSpPr>
-          <p:cNvPr id="255" name=""/>
+          <p:cNvPr id="258" name=""/>
           <p:cNvSpPr txBox="1"/>
           <p:nvPr/>
         </p:nvSpPr>
@@ -13467,7 +13601,7 @@
       </p:sp>
       <p:sp>
         <p:nvSpPr>
-          <p:cNvPr id="256" name=""/>
+          <p:cNvPr id="259" name=""/>
           <p:cNvSpPr txBox="1"/>
           <p:nvPr/>
         </p:nvSpPr>
@@ -13515,7 +13649,7 @@
       </p:sp>
       <p:sp>
         <p:nvSpPr>
-          <p:cNvPr id="257" name=""/>
+          <p:cNvPr id="260" name=""/>
           <p:cNvSpPr txBox="1"/>
           <p:nvPr/>
         </p:nvSpPr>
@@ -13563,7 +13697,7 @@
       </p:sp>
       <p:sp>
         <p:nvSpPr>
-          <p:cNvPr id="258" name=""/>
+          <p:cNvPr id="261" name=""/>
           <p:cNvSpPr txBox="1"/>
           <p:nvPr/>
         </p:nvSpPr>
@@ -13611,7 +13745,7 @@
       </p:sp>
       <p:sp>
         <p:nvSpPr>
-          <p:cNvPr id="259" name=""/>
+          <p:cNvPr id="262" name=""/>
           <p:cNvSpPr txBox="1"/>
           <p:nvPr/>
         </p:nvSpPr>
@@ -13659,7 +13793,7 @@
       </p:sp>
       <p:sp>
         <p:nvSpPr>
-          <p:cNvPr id="260" name=""/>
+          <p:cNvPr id="263" name=""/>
           <p:cNvSpPr txBox="1"/>
           <p:nvPr/>
         </p:nvSpPr>
@@ -13692,7 +13826,7 @@
                 <a:latin typeface="Arial"/>
                 <a:ea typeface="Arial"/>
               </a:rPr>
-              <a:t>Circles mark the AIC optimum; W = 15 is within 2.2-5.6 units of it in every series. </a:t>
+              <a:t>Circles mark the AIC optimum; W = 15 is within 2.1-6.0 units of it in every series. </a:t>
             </a:r>
             <a:endParaRPr lang="en-US" sz="920" b="0" u="none" strike="noStrike">
               <a:solidFill>
@@ -13707,7 +13841,7 @@
       </p:sp>
       <p:sp>
         <p:nvSpPr>
-          <p:cNvPr id="261" name=""/>
+          <p:cNvPr id="264" name=""/>
           <p:cNvSpPr txBox="1"/>
           <p:nvPr/>
         </p:nvSpPr>
@@ -13755,7 +13889,7 @@
       </p:sp>
       <p:sp>
         <p:nvSpPr>
-          <p:cNvPr id="262" name=""/>
+          <p:cNvPr id="265" name=""/>
           <p:cNvSpPr txBox="1"/>
           <p:nvPr/>
         </p:nvSpPr>
@@ -13803,7 +13937,7 @@
       </p:sp>
       <p:sp>
         <p:nvSpPr>
-          <p:cNvPr id="263" name=""/>
+          <p:cNvPr id="266" name=""/>
           <p:cNvSpPr txBox="1"/>
           <p:nvPr/>
         </p:nvSpPr>
@@ -13851,7 +13985,7 @@
       </p:sp>
       <p:sp>
         <p:nvSpPr>
-          <p:cNvPr id="264" name=""/>
+          <p:cNvPr id="267" name=""/>
           <p:cNvSpPr txBox="1"/>
           <p:nvPr/>
         </p:nvSpPr>
@@ -13899,7 +14033,7 @@
       </p:sp>
       <p:sp>
         <p:nvSpPr>
-          <p:cNvPr id="265" name=""/>
+          <p:cNvPr id="268" name=""/>
           <p:cNvSpPr txBox="1"/>
           <p:nvPr/>
         </p:nvSpPr>
